--- a/content/W02/D3/slides/C2_W02_D03_half2_STUDENT.pptx
+++ b/content/W02/D3/slides/C2_W02_D03_half2_STUDENT.pptx
@@ -5912,7 +5912,7 @@
       </p:sp>
       <p:pic>
         <p:nvPicPr>
-          <p:cNvPr id="9" name="mermaid diagram" descr="072cb25fd55901bb.png"/>
+          <p:cNvPr id="9" name="mermaid diagram" descr="33720ee511043066.png"/>
           <p:cNvPicPr>
             <a:picLocks noChangeAspect="1"/>
           </p:cNvPicPr>
@@ -9213,7 +9213,7 @@
       </p:sp>
       <p:pic>
         <p:nvPicPr>
-          <p:cNvPr id="9" name="mermaid diagram" descr="ec4eac8ad329a26c.png"/>
+          <p:cNvPr id="9" name="mermaid diagram" descr="60880d5d1c33dfe7.png"/>
           <p:cNvPicPr>
             <a:picLocks noChangeAspect="1"/>
           </p:cNvPicPr>
@@ -9941,7 +9941,7 @@
       </p:sp>
       <p:pic>
         <p:nvPicPr>
-          <p:cNvPr id="9" name="mermaid diagram" descr="0e829dbf5bcfa9d8.png"/>
+          <p:cNvPr id="9" name="mermaid diagram" descr="216612f11ed8aadc.png"/>
           <p:cNvPicPr>
             <a:picLocks noChangeAspect="1"/>
           </p:cNvPicPr>
@@ -23613,7 +23613,7 @@
       </p:sp>
       <p:pic>
         <p:nvPicPr>
-          <p:cNvPr id="9" name="mermaid diagram" descr="6d5d96cd100b13a1.png"/>
+          <p:cNvPr id="9" name="mermaid diagram" descr="73d24c5273fe3b87.png"/>
           <p:cNvPicPr>
             <a:picLocks noChangeAspect="1"/>
           </p:cNvPicPr>

--- a/content/W02/D3/slides/C2_W02_D03_half2_STUDENT.pptx
+++ b/content/W02/D3/slides/C2_W02_D03_half2_STUDENT.pptx
@@ -771,17 +771,17 @@
           </a:p>
           <a:p>
             <a:r>
-              <a:t>right and is the dangerous one: which of the tied pair ships depends on the tiebreaker, so a member</a:t>
-            </a:r>
-          </a:p>
-          <a:p>
-            <a:r>
-              <a:t>can be on Monday's list and off Tuesday's with the same spend. Interview [F] follow-up: your top</a:t>
-            </a:r>
-          </a:p>
-          <a:p>
-            <a:r>
-              <a:t>fifty came back with 51 rows; it is no bug, and the stakeholder is told the tie and the count.</a:t>
+              <a:t>right and is the dangerous one: which member at the line ships depends on the tiebreaker, so a</a:t>
+            </a:r>
+          </a:p>
+          <a:p>
+            <a:r>
+              <a:t>member can be on Monday's list and off Tuesday's with the same spend. Interview [F] follow-up: your</a:t>
+            </a:r>
+          </a:p>
+          <a:p>
+            <a:r>
+              <a:t>top ten came back with eleven rows; it is no bug, and the stakeholder is told the tie and the count.</a:t>
             </a:r>
           </a:p>
         </p:txBody>
@@ -8100,7 +8100,7 @@
                 </a:solidFill>
                 <a:latin typeface="Georgia"/>
               </a:rPr>
-              <a:t>Answer: 51, with RANK, and the line says why</a:t>
+              <a:t>Answer: RANK's count, and the line says why</a:t>
             </a:r>
           </a:p>
         </p:txBody>
@@ -8135,7 +8135,7 @@
                 </a:solidFill>
                 <a:latin typeface="Calibri"/>
               </a:rPr>
-              <a:t>Two Retail-Plus members tie at fiftieth, so RANK keeps both and ships fifty-one.</a:t>
+              <a:t>The room's four counts came from four rules, and the one to ship is the count RANK returned.</a:t>
             </a:r>
           </a:p>
         </p:txBody>
@@ -8150,7 +8150,7 @@
         </p:nvGraphicFramePr>
         <p:xfrm>
           <a:off x="530352" y="1956816"/>
-          <a:ext cx="11130989" cy="1849120"/>
+          <a:ext cx="11130989" cy="2574544"/>
         </p:xfrm>
         <a:graphic>
           <a:graphicData uri="http://schemas.openxmlformats.org/drawingml/2006/table">
@@ -8159,9 +8159,9 @@
                 <a:tableStyleId>{2D5ABB26-0587-4C30-8999-92F81FD0307C}</a:tableStyleId>
               </a:tblPr>
               <a:tblGrid>
-                <a:gridCol w="2472044"/>
-                <a:gridCol w="2264852"/>
-                <a:gridCol w="6394093"/>
+                <a:gridCol w="2498621"/>
+                <a:gridCol w="2169533"/>
+                <a:gridCol w="6462835"/>
               </a:tblGrid>
               <a:tr h="369824">
                 <a:tc>
@@ -8198,7 +8198,7 @@
                           </a:solidFill>
                           <a:latin typeface="Calibri"/>
                         </a:rPr>
-                        <a:t>Retail-Plus ships</a:t>
+                        <a:t>The room's count</a:t>
                       </a:r>
                     </a:p>
                   </a:txBody>
@@ -8220,7 +8220,7 @@
                           </a:solidFill>
                           <a:latin typeface="Calibri"/>
                         </a:rPr>
-                        <a:t>What it did at the line</a:t>
+                        <a:t>What the rule did at the line, in the room's files</a:t>
                       </a:r>
                     </a:p>
                   </a:txBody>
@@ -8231,7 +8231,7 @@
                   </a:tcPr>
                 </a:tc>
               </a:tr>
-              <a:tr h="369824">
+              <a:tr h="611632">
                 <a:tc>
                   <a:txBody>
                     <a:bodyPr/>
@@ -8288,7 +8288,7 @@
                           </a:solidFill>
                           <a:latin typeface="Calibri"/>
                         </a:rPr>
-                        <a:t>Both tied members kept, which is what the head asked</a:t>
+                        <a:t>Every member sharing the last position kept, which is what the head asked</a:t>
                       </a:r>
                     </a:p>
                   </a:txBody>
@@ -8299,7 +8299,7 @@
                   </a:tcPr>
                 </a:tc>
               </a:tr>
-              <a:tr h="369824">
+              <a:tr h="611632">
                 <a:tc>
                   <a:txBody>
                     <a:bodyPr/>
@@ -8356,7 +8356,7 @@
                           </a:solidFill>
                           <a:latin typeface="Calibri"/>
                         </a:rPr>
-                        <a:t>Both tied members dropped, the forty-nine he forbade</a:t>
+                        <a:t>The members sharing the last position all dropped, the forty-nine he forbade</a:t>
                       </a:r>
                     </a:p>
                   </a:txBody>
@@ -8424,7 +8424,7 @@
                           </a:solidFill>
                           <a:latin typeface="Calibri"/>
                         </a:rPr>
-                        <a:t>One tied member dropped by the database's choice</a:t>
+                        <a:t>One member at the last position dropped by the database's choice</a:t>
                       </a:r>
                     </a:p>
                   </a:txBody>
@@ -8435,7 +8435,7 @@
                   </a:tcPr>
                 </a:tc>
               </a:tr>
-              <a:tr h="369824">
+              <a:tr h="611632">
                 <a:tc>
                   <a:txBody>
                     <a:bodyPr/>
@@ -8492,7 +8492,7 @@
                           </a:solidFill>
                           <a:latin typeface="Calibri"/>
                         </a:rPr>
-                        <a:t>A tie higher up saved a number, so a member past the line ships</a:t>
+                        <a:t>A shared position higher up saved a number, so a member past the line ships</a:t>
                       </a:r>
                     </a:p>
                   </a:txBody>
@@ -8515,7 +8515,7 @@
         </p:nvSpPr>
         <p:spPr>
           <a:xfrm>
-            <a:off x="530352" y="4061968"/>
+            <a:off x="530352" y="4787392"/>
             <a:ext cx="11130991" cy="1121664"/>
           </a:xfrm>
           <a:prstGeom prst="roundRect">
@@ -8569,7 +8569,7 @@
         </p:nvSpPr>
         <p:spPr>
           <a:xfrm>
-            <a:off x="758952" y="4394200"/>
+            <a:off x="758952" y="5119624"/>
             <a:ext cx="457200" cy="457200"/>
           </a:xfrm>
           <a:prstGeom prst="ellipse">
@@ -8621,7 +8621,7 @@
         </p:blipFill>
         <p:spPr>
           <a:xfrm>
-            <a:off x="868680" y="4503928"/>
+            <a:off x="868680" y="5229352"/>
             <a:ext cx="237744" cy="237744"/>
           </a:xfrm>
           <a:prstGeom prst="rect">
@@ -8637,7 +8637,7 @@
         </p:nvSpPr>
         <p:spPr>
           <a:xfrm>
-            <a:off x="1399031" y="4208272"/>
+            <a:off x="1399031" y="4933696"/>
             <a:ext cx="9987991" cy="160401"/>
           </a:xfrm>
           <a:prstGeom prst="rect">
@@ -8672,7 +8672,7 @@
         </p:nvSpPr>
         <p:spPr>
           <a:xfrm>
-            <a:off x="1399031" y="4427728"/>
+            <a:off x="1399031" y="5153152"/>
             <a:ext cx="9987991" cy="682752"/>
           </a:xfrm>
           <a:prstGeom prst="rect">
@@ -8693,7 +8693,7 @@
                 </a:solidFill>
                 <a:latin typeface="Calibri"/>
               </a:rPr>
-              <a:t>Fifty-one is correct, and it is only defensible with its reason beside it: "51 Retail-Plus members, because two tie at fiftieth."</a:t>
+              <a:t>The RANK count is correct, and it is only defensible with its reason beside it, read from your own file: count the members at the last position and say it in the same line as the count.</a:t>
             </a:r>
           </a:p>
         </p:txBody>
@@ -9421,7 +9421,7 @@
                 </a:solidFill>
                 <a:latin typeface="Calibri"/>
               </a:rPr>
-              <a:t>A month with no order is no reading, so it breaks the run. Nine listed members spent less in August than July and less again in September, three each in Business, Retail-Core and Retail-Plus.</a:t>
+              <a:t>A month with no order is no reading, so it breaks the run. Nine listed members spent less in August than July and less again in September.</a:t>
             </a:r>
           </a:p>
         </p:txBody>
@@ -10742,7 +10742,7 @@
                 </a:solidFill>
                 <a:latin typeface="Georgia"/>
               </a:rPr>
-              <a:t>"We ranked with RANK inside each segment, so tied members share a place and nobody at the line is dropped by a coin toss: the list carries 35 Business and 20 Student members, which is every Q2 buyer there, 50 Retail-Core and 51 Retail-Plus, because two Retail-Plus members tie at fiftieth. Nine listed members spent less in August than July and less again in September; a member with no August order is not flagged, because a month without an order is no reading. Q2 closed on plan, Rs 9,84,00,000 against Rs 9,83,99,990, and the Rs 1.58 crore lead at mid-quarter came from one week in July, so the weekly run rate has been below plan since 10 August."</a:t>
+              <a:t>"We ranked with RANK inside each segment, so tied members share a place and nobody at the line is dropped by a coin toss: the list carries 35 Business and 20 Student members, which is every Q2 buyer there, 50 Retail-Core and 51 Retail-Plus, where our RANK file shows two members sharing the fiftieth place. Nine listed members spent less in August than July and less again in September; a member with no August order is not flagged, because a month without an order is no reading. Q2 closed on plan, Rs 9,84,00,000 against Rs 9,83,99,990, and the Rs 1.58 crore lead at mid-quarter came from one week in July, so the weekly run rate has been below plan since 10 August."</a:t>
             </a:r>
           </a:p>
         </p:txBody>
@@ -11490,7 +11490,7 @@
                 </a:solidFill>
                 <a:latin typeface="Calibri"/>
               </a:rPr>
-              <a:t>Week 2 Wednesday: the case and the close</a:t>
+              <a:t>Week 2, Day 3. Marketing's Monday file, and the sentence on it</a:t>
             </a:r>
           </a:p>
         </p:txBody>
@@ -16074,7 +16074,7 @@
                 </a:solidFill>
                 <a:latin typeface="Calibri"/>
               </a:rPr>
-              <a:t>Week 2 Wednesday: the case and the close</a:t>
+              <a:t>Week 2, Day 3. Marketing's Monday file, and the sentence on it</a:t>
             </a:r>
           </a:p>
         </p:txBody>
@@ -22361,7 +22361,7 @@
                 </a:solidFill>
                 <a:latin typeface="Calibri"/>
               </a:rPr>
-              <a:t>Week 2 Wednesday: the case and the close</a:t>
+              <a:t>Week 2, Day 3. Marketing's Monday file, and the sentence on it</a:t>
             </a:r>
           </a:p>
         </p:txBody>

--- a/content/W02/D3/slides/C2_W02_D03_half2_STUDENT.pptx
+++ b/content/W02/D3/slides/C2_W02_D03_half2_STUDENT.pptx
@@ -34,6 +34,7 @@
     <p:sldId id="282" r:id="rId34"/>
     <p:sldId id="283" r:id="rId35"/>
     <p:sldId id="284" r:id="rId36"/>
+    <p:sldId id="285" r:id="rId37"/>
   </p:sldIdLst>
   <p:sldSz cx="12191695" cy="6858000" type="screen4x3"/>
   <p:notesSz cx="6858000" cy="9144000"/>
@@ -690,7 +691,7 @@
           <a:lstStyle/>
           <a:p>
             <a:r>
-              <a:t>LIVE, 2 minutes. Read his row aloud: three months with orders and three without. Letters in chat.</a:t>
+              <a:t>LIVE, 2 minutes. Read C-0216's row aloud: three months with orders and three without. Letters in chat.</a:t>
             </a:r>
           </a:p>
           <a:p>
@@ -1535,12 +1536,12 @@
           <a:lstStyle/>
           <a:p>
             <a:r>
-              <a:t>LIVE, 2 minutes. These are the morning's rules, not the case's answers. Then go: seventeen</a:t>
-            </a:r>
-          </a:p>
-          <a:p>
-            <a:r>
-              <a:t>minutes, parts 1 and 2. After the case, the close.</a:t>
+              <a:t>LIVE, 2 minutes. The cards repeat the morning's rules and give away none of the case's answers.</a:t>
+            </a:r>
+          </a:p>
+          <a:p>
+            <a:r>
+              <a:t>Then go: seventeen minutes, parts 1 and 2. After the case, the close.</a:t>
             </a:r>
           </a:p>
         </p:txBody>
@@ -1905,17 +1906,22 @@
           <a:lstStyle/>
           <a:p>
             <a:r>
-              <a:t>SELF-STUDY, and the practice lab's drill. [S] is a staple asked everywhere, [F] frequent at global</a:t>
-            </a:r>
-          </a:p>
-          <a:p>
-            <a:r>
-              <a:t>capability centres and product companies, [D] a differentiator. Each question is answered in full in</a:t>
-            </a:r>
-          </a:p>
-          <a:p>
-            <a:r>
-              <a:t>its chapter's notebook and in the study notes; in the lab, pairs ask each other aloud.</a:t>
+              <a:t>SELF-STUDY, and the practice lab's drill. [S] is a staple asked everywhere and [F] frequent at global</a:t>
+            </a:r>
+          </a:p>
+          <a:p>
+            <a:r>
+              <a:t>capability centres and product companies; D23 carries the three differentiators. Each question is</a:t>
+            </a:r>
+          </a:p>
+          <a:p>
+            <a:r>
+              <a:t>answered in full in its chapter's notebook and in the study notes; in the lab, pairs ask each other</a:t>
+            </a:r>
+          </a:p>
+          <a:p>
+            <a:r>
+              <a:t>aloud.</a:t>
             </a:r>
           </a:p>
         </p:txBody>
@@ -1985,17 +1991,12 @@
           <a:lstStyle/>
           <a:p>
             <a:r>
-              <a:t>SELF-STUDY, in pairs or alone, about forty minutes. The notebook is</a:t>
-            </a:r>
-          </a:p>
-          <a:p>
-            <a:r>
-              <a:t>notebooks/C2_W02_D03_ex2_second_case_STUDENT.ipynb and the brief</a:t>
-            </a:r>
-          </a:p>
-          <a:p>
-            <a:r>
-              <a:t>exercises/unguided/C2_W02_D03_second_case_STUDENT.md.</a:t>
+              <a:t>SELF-STUDY, and the practice lab's drill, asked last. [D] marks a differentiator. The answers are in</a:t>
+            </a:r>
+          </a:p>
+          <a:p>
+            <a:r>
+              <a:t>chapter 3's, chapter 6's and chapter 5's notebooks and in the study notes.</a:t>
             </a:r>
           </a:p>
         </p:txBody>
@@ -2065,12 +2066,17 @@
           <a:lstStyle/>
           <a:p>
             <a:r>
-              <a:t>SELF-STUDY, and the lab's debrief of the room's wrong answers. Each line is a trap the day staged on</a:t>
-            </a:r>
-          </a:p>
-          <a:p>
-            <a:r>
-              <a:t>purpose; the room met each one before its name.</a:t>
+              <a:t>SELF-STUDY, in pairs or alone, about forty minutes. The notebook is</a:t>
+            </a:r>
+          </a:p>
+          <a:p>
+            <a:r>
+              <a:t>notebooks/C2_W02_D03_ex2_second_case_STUDENT.ipynb and the brief</a:t>
+            </a:r>
+          </a:p>
+          <a:p>
+            <a:r>
+              <a:t>exercises/unguided/C2_W02_D03_second_case_STUDENT.md.</a:t>
             </a:r>
           </a:p>
         </p:txBody>
@@ -2140,12 +2146,12 @@
           <a:lstStyle/>
           <a:p>
             <a:r>
-              <a:t>LIVE, 1 minute. Read it and leave it open: today's flag becomes a column of tomorrow's table. The</a:t>
-            </a:r>
-          </a:p>
-          <a:p>
-            <a:r>
-              <a:t>pre-read for Thursday ships tonight. Then the tentative IITGN block.</a:t>
+              <a:t>SELF-STUDY, and the lab's debrief of the room's wrong answers. Each line is a trap the day staged on</a:t>
+            </a:r>
+          </a:p>
+          <a:p>
+            <a:r>
+              <a:t>purpose, and the room met each wrong number before anyone named the mistake.</a:t>
             </a:r>
           </a:p>
         </p:txBody>
@@ -2255,6 +2261,81 @@
 </p:notes>
 </file>
 
+<file path=ppt/notesSlides/notesSlide30.xml><?xml version="1.0" encoding="utf-8"?>
+<p:notes xmlns:a="http://schemas.openxmlformats.org/drawingml/2006/main" xmlns:p="http://schemas.openxmlformats.org/presentationml/2006/main" xmlns:r="http://schemas.openxmlformats.org/officeDocument/2006/relationships">
+  <p:cSld>
+    <p:spTree>
+      <p:nvGrpSpPr>
+        <p:cNvPr id="1" name=""/>
+        <p:cNvGrpSpPr/>
+        <p:nvPr/>
+      </p:nvGrpSpPr>
+      <p:grpSpPr>
+        <a:xfrm>
+          <a:off x="0" y="0"/>
+          <a:ext cx="0" cy="0"/>
+          <a:chOff x="0" y="0"/>
+          <a:chExt cx="0" cy="0"/>
+        </a:xfrm>
+      </p:grpSpPr>
+      <p:sp>
+        <p:nvSpPr>
+          <p:cNvPr id="2" name="Slide Image Placeholder 1"/>
+          <p:cNvSpPr>
+            <a:spLocks noGrp="1"/>
+          </p:cNvSpPr>
+          <p:nvPr>
+            <p:ph type="sldImg" idx="2"/>
+          </p:nvPr>
+        </p:nvSpPr>
+        <p:spPr/>
+      </p:sp>
+      <p:sp>
+        <p:nvSpPr>
+          <p:cNvPr id="3" name="Notes Placeholder 2"/>
+          <p:cNvSpPr>
+            <a:spLocks noGrp="1"/>
+          </p:cNvSpPr>
+          <p:nvPr>
+            <p:ph type="body" idx="3" sz="quarter"/>
+          </p:nvPr>
+        </p:nvSpPr>
+        <p:spPr/>
+        <p:txBody>
+          <a:bodyPr/>
+          <a:lstStyle/>
+          <a:p>
+            <a:r>
+              <a:t>LIVE, 1 minute. Read it and leave it open: today's flag becomes a column of tomorrow's table. The</a:t>
+            </a:r>
+          </a:p>
+          <a:p>
+            <a:r>
+              <a:t>pre-read for Thursday ships tonight. Then the tentative IITGN block.</a:t>
+            </a:r>
+          </a:p>
+        </p:txBody>
+      </p:sp>
+      <p:sp>
+        <p:nvSpPr>
+          <p:cNvPr id="4" name="Slide Number Placeholder 3"/>
+          <p:cNvSpPr>
+            <a:spLocks noGrp="1"/>
+          </p:cNvSpPr>
+          <p:nvPr>
+            <p:ph type="sldNum" idx="5" sz="quarter"/>
+          </p:nvPr>
+        </p:nvSpPr>
+        <p:spPr/>
+      </p:sp>
+    </p:spTree>
+  </p:cSld>
+  <p:clrMapOvr>
+    <a:masterClrMapping/>
+  </p:clrMapOvr>
+</p:notes>
+</file>
+
 <file path=ppt/notesSlides/notesSlide4.xml><?xml version="1.0" encoding="utf-8"?>
 <p:notes xmlns:a="http://schemas.openxmlformats.org/drawingml/2006/main" xmlns:p="http://schemas.openxmlformats.org/presentationml/2006/main" xmlns:r="http://schemas.openxmlformats.org/officeDocument/2006/relationships">
   <p:cSld>
@@ -2620,7 +2701,7 @@
           <a:lstStyle/>
           <a:p>
             <a:r>
-              <a:t>LIVE, 1 minute. Two readings of "the month before": the calendar's, and the row LAG reads. They</a:t>
+              <a:t>LIVE, 1 minute. "The month before" has two readings: the calendar's, and the row LAG reads. They</a:t>
             </a:r>
           </a:p>
           <a:p>
@@ -5983,7 +6064,7 @@
                 </a:solidFill>
                 <a:latin typeface="Georgia"/>
               </a:rPr>
-              <a:t>“Before we ring anyone: one of your flagged members rang our help line to say he was travelling in August and has not stopped buying. Is your flag wrong about him, and how many others?”</a:t>
+              <a:t>“Before we ring anyone: one of your flagged members rang our help line to say they were travelling in August and have not stopped buying. Is your flag wrong about them, and how many others?”</a:t>
             </a:r>
           </a:p>
         </p:txBody>
@@ -6298,7 +6379,7 @@
                 </a:solidFill>
                 <a:latin typeface="Calibri"/>
               </a:rPr>
-              <a:t>1 / 29</a:t>
+              <a:t>1 / 30</a:t>
             </a:r>
           </a:p>
         </p:txBody>
@@ -7246,7 +7327,7 @@
                 </a:solidFill>
                 <a:latin typeface="Calibri"/>
               </a:rPr>
-              <a:t>S8  ·  10 / 29</a:t>
+              <a:t>S8  ·  10 / 30</a:t>
             </a:r>
           </a:p>
         </p:txBody>
@@ -7487,7 +7568,7 @@
                 </a:solidFill>
                 <a:latin typeface="Calibri"/>
               </a:rPr>
-              <a:t>What did LAG compare for the member who says he was on holiday?</a:t>
+              <a:t>What did LAG compare for the member who says they were on holiday?</a:t>
             </a:r>
           </a:p>
         </p:txBody>
@@ -7844,7 +7925,7 @@
         <p:spPr>
           <a:xfrm>
             <a:off x="530352" y="2883408"/>
-            <a:ext cx="11130991" cy="807720"/>
+            <a:ext cx="11130991" cy="1074420"/>
           </a:xfrm>
           <a:prstGeom prst="roundRect">
             <a:avLst>
@@ -7892,7 +7973,7 @@
         <p:spPr>
           <a:xfrm>
             <a:off x="676656" y="3011424"/>
-            <a:ext cx="45720" cy="551688"/>
+            <a:ext cx="45720" cy="818388"/>
           </a:xfrm>
           <a:prstGeom prst="roundRect">
             <a:avLst>
@@ -7938,7 +8019,7 @@
         <p:spPr>
           <a:xfrm>
             <a:off x="877824" y="3002280"/>
-            <a:ext cx="10564063" cy="624840"/>
+            <a:ext cx="10564063" cy="891540"/>
           </a:xfrm>
           <a:prstGeom prst="rect">
             <a:avLst/>
@@ -7967,7 +8048,7 @@
                 </a:solidFill>
                 <a:latin typeface="Calibri"/>
               </a:rPr>
-              <a:t>C-0216 of Retail-Plus stands at place 23 on his segment's list. Which month did LAG treat as "last month" for his September, as a letter? a) August; b) July; c) June; d) none, since his August is empty.</a:t>
+              <a:t>C-0216 of Retail-Plus stands at place 23 on the Retail-Plus list. Which month did LAG treat as "last month" for C-0216's September, as a letter? a) August; b) July; c) June; d) none, since their August is empty.</a:t>
             </a:r>
           </a:p>
         </p:txBody>
@@ -8239,7 +8320,7 @@
                 </a:solidFill>
                 <a:latin typeface="Calibri"/>
               </a:rPr>
-              <a:t>S9  ·  11 / 29</a:t>
+              <a:t>S9  ·  11 / 30</a:t>
             </a:r>
           </a:p>
         </p:txBody>
@@ -8480,14 +8561,14 @@
                 </a:solidFill>
                 <a:latin typeface="Calibri"/>
               </a:rPr>
-              <a:t>What did LAG compare for the member who says he was on holiday?</a:t>
+              <a:t>What did LAG compare for the member who says they were on holiday?</a:t>
             </a:r>
           </a:p>
         </p:txBody>
       </p:sp>
       <p:pic>
         <p:nvPicPr>
-          <p:cNvPr id="9" name="mermaid diagram" descr="d7920b8c8aeac347.png"/>
+          <p:cNvPr id="9" name="mermaid diagram" descr="cae16322f66e6210.png"/>
           <p:cNvPicPr>
             <a:picLocks noChangeAspect="1"/>
           </p:cNvPicPr>
@@ -8501,8 +8582,8 @@
         </p:blipFill>
         <p:spPr>
           <a:xfrm>
-            <a:off x="1409547" y="1956816"/>
-            <a:ext cx="9372600" cy="2000250"/>
+            <a:off x="3352647" y="1956816"/>
+            <a:ext cx="5486400" cy="1557337"/>
           </a:xfrm>
           <a:prstGeom prst="rect">
             <a:avLst/>
@@ -8517,7 +8598,7 @@
         </p:nvSpPr>
         <p:spPr>
           <a:xfrm>
-            <a:off x="530352" y="4103370"/>
+            <a:off x="530352" y="3660457"/>
             <a:ext cx="11130991" cy="807720"/>
           </a:xfrm>
           <a:prstGeom prst="roundRect">
@@ -8565,7 +8646,7 @@
         </p:nvSpPr>
         <p:spPr>
           <a:xfrm>
-            <a:off x="676656" y="4231385"/>
+            <a:off x="676656" y="3788473"/>
             <a:ext cx="45720" cy="551688"/>
           </a:xfrm>
           <a:prstGeom prst="roundRect">
@@ -8611,7 +8692,7 @@
         </p:nvSpPr>
         <p:spPr>
           <a:xfrm>
-            <a:off x="877824" y="4222242"/>
+            <a:off x="877824" y="3779329"/>
             <a:ext cx="10564063" cy="624840"/>
           </a:xfrm>
           <a:prstGeom prst="rect">
@@ -8641,7 +8722,7 @@
                 </a:solidFill>
                 <a:latin typeface="Calibri"/>
               </a:rPr>
-              <a:t>There is no August row, so LAG compared September with July and July with May. Chapter 4's flag called that two months of falls; his rows say August is simply empty.</a:t>
+              <a:t>There is no August row, so LAG compared September with July and July with May. Chapter 4's flag called that two months of falls; C-0216's rows say August is simply empty.</a:t>
             </a:r>
           </a:p>
         </p:txBody>
@@ -8913,7 +8994,7 @@
                 </a:solidFill>
                 <a:latin typeface="Calibri"/>
               </a:rPr>
-              <a:t>S10  ·  12 / 29</a:t>
+              <a:t>S10  ·  12 / 30</a:t>
             </a:r>
           </a:p>
         </p:txBody>
@@ -9643,7 +9724,7 @@
                 </a:solidFill>
                 <a:latin typeface="Calibri"/>
               </a:rPr>
-              <a:t>The hurried reply to the head of Retail-Plus is that C-0216 did spend less each time he ordered, and every one of the sixteen gets the same call.</a:t>
+              <a:t>The hurried reply to the head of Retail-Plus is that C-0216 did spend less with each order, and every one of the sixteen gets the same call.</a:t>
             </a:r>
           </a:p>
         </p:txBody>
@@ -9915,7 +9996,7 @@
                 </a:solidFill>
                 <a:latin typeface="Calibri"/>
               </a:rPr>
-              <a:t>S11  ·  13 / 29</a:t>
+              <a:t>S11  ·  13 / 30</a:t>
             </a:r>
           </a:p>
         </p:txBody>
@@ -10163,7 +10244,7 @@
       </p:sp>
       <p:pic>
         <p:nvPicPr>
-          <p:cNvPr id="9" name="mermaid diagram" descr="6eea9dc41337f1ff.png"/>
+          <p:cNvPr id="9" name="mermaid diagram" descr="c8994adb0d915e8d.png"/>
           <p:cNvPicPr>
             <a:picLocks noChangeAspect="1"/>
           </p:cNvPicPr>
@@ -10177,8 +10258,8 @@
         </p:blipFill>
         <p:spPr>
           <a:xfrm>
-            <a:off x="1866747" y="1956816"/>
-            <a:ext cx="8458200" cy="2771775"/>
+            <a:off x="1909610" y="1956816"/>
+            <a:ext cx="8372475" cy="1800225"/>
           </a:xfrm>
           <a:prstGeom prst="rect">
             <a:avLst/>
@@ -10193,7 +10274,7 @@
         </p:nvSpPr>
         <p:spPr>
           <a:xfrm>
-            <a:off x="530352" y="4874895"/>
+            <a:off x="530352" y="3903345"/>
             <a:ext cx="11130991" cy="807720"/>
           </a:xfrm>
           <a:prstGeom prst="roundRect">
@@ -10241,7 +10322,7 @@
         </p:nvSpPr>
         <p:spPr>
           <a:xfrm>
-            <a:off x="676656" y="5002911"/>
+            <a:off x="676656" y="4031360"/>
             <a:ext cx="45720" cy="551688"/>
           </a:xfrm>
           <a:prstGeom prst="roundRect">
@@ -10287,7 +10368,7 @@
         </p:nvSpPr>
         <p:spPr>
           <a:xfrm>
-            <a:off x="877824" y="4993767"/>
+            <a:off x="877824" y="4022217"/>
             <a:ext cx="10564063" cy="624840"/>
           </a:xfrm>
           <a:prstGeom prst="rect">
@@ -10589,7 +10670,7 @@
                 </a:solidFill>
                 <a:latin typeface="Calibri"/>
               </a:rPr>
-              <a:t>S12  ·  14 / 29</a:t>
+              <a:t>S12  ·  14 / 30</a:t>
             </a:r>
           </a:p>
         </p:txBody>
@@ -11504,7 +11585,7 @@
                 </a:solidFill>
                 <a:latin typeface="Calibri"/>
               </a:rPr>
-              <a:t>Every call that goes out now describes three consecutive months that each fell, months the member can check on his own statement.</a:t>
+              <a:t>Every call that goes out now describes three consecutive months that each fell, months the member can check on their own statement.</a:t>
             </a:r>
           </a:p>
         </p:txBody>
@@ -11776,7 +11857,7 @@
                 </a:solidFill>
                 <a:latin typeface="Calibri"/>
               </a:rPr>
-              <a:t>S13  ·  15 / 29</a:t>
+              <a:t>S13  ·  15 / 30</a:t>
             </a:r>
           </a:p>
         </p:txBody>
@@ -12725,7 +12806,7 @@
                 </a:solidFill>
                 <a:latin typeface="Calibri"/>
               </a:rPr>
-              <a:t>S14  ·  16 / 29</a:t>
+              <a:t>S14  ·  16 / 30</a:t>
             </a:r>
           </a:p>
         </p:txBody>
@@ -13643,7 +13724,7 @@
                 </a:solidFill>
                 <a:latin typeface="Calibri"/>
               </a:rPr>
-              <a:t>S15  ·  17 / 29</a:t>
+              <a:t>S15  ·  17 / 30</a:t>
             </a:r>
           </a:p>
         </p:txBody>
@@ -14614,7 +14695,7 @@
                 </a:solidFill>
                 <a:latin typeface="Calibri"/>
               </a:rPr>
-              <a:t>[D] A member says he was on holiday and should not be flagged: how does your definition treat a month with no orders, and why not fill it with zero?</a:t>
+              <a:t>[D] A member says they were on holiday and should not be flagged: how does your definition treat a month with no orders, and why not fill it with zero?</a:t>
             </a:r>
           </a:p>
         </p:txBody>
@@ -14886,7 +14967,7 @@
                 </a:solidFill>
                 <a:latin typeface="Calibri"/>
               </a:rPr>
-              <a:t>S16  ·  18 / 29</a:t>
+              <a:t>S16  ·  18 / 30</a:t>
             </a:r>
           </a:p>
         </p:txBody>
@@ -15397,7 +15478,7 @@
                 </a:solidFill>
                 <a:latin typeface="Calibri"/>
               </a:rPr>
-              <a:t>19 / 29</a:t>
+              <a:t>19 / 30</a:t>
             </a:r>
           </a:p>
         </p:txBody>
@@ -16212,7 +16293,7 @@
                 </a:solidFill>
                 <a:latin typeface="Calibri"/>
               </a:rPr>
-              <a:t>S1  ·  2 / 29</a:t>
+              <a:t>S1  ·  2 / 30</a:t>
             </a:r>
           </a:p>
         </p:txBody>
@@ -17987,7 +18068,7 @@
                 </a:solidFill>
                 <a:latin typeface="Calibri"/>
               </a:rPr>
-              <a:t>S17  ·  20 / 29</a:t>
+              <a:t>S17  ·  20 / 30</a:t>
             </a:r>
           </a:p>
         </p:txBody>
@@ -19187,7 +19268,7 @@
                 </a:solidFill>
                 <a:latin typeface="Calibri"/>
               </a:rPr>
-              <a:t>S18  ·  21 / 29</a:t>
+              <a:t>S18  ·  21 / 30</a:t>
             </a:r>
           </a:p>
         </p:txBody>
@@ -19698,7 +19779,7 @@
                 </a:solidFill>
                 <a:latin typeface="Calibri"/>
               </a:rPr>
-              <a:t>22 / 29</a:t>
+              <a:t>22 / 30</a:t>
             </a:r>
           </a:p>
         </p:txBody>
@@ -20568,7 +20649,7 @@
                 </a:solidFill>
                 <a:latin typeface="Calibri"/>
               </a:rPr>
-              <a:t>S19  ·  23 / 29</a:t>
+              <a:t>S19  ·  23 / 30</a:t>
             </a:r>
           </a:p>
         </p:txBody>
@@ -20816,7 +20897,7 @@
       </p:sp>
       <p:pic>
         <p:nvPicPr>
-          <p:cNvPr id="9" name="mermaid diagram" descr="a69f3fbfe7bc78a4.png"/>
+          <p:cNvPr id="9" name="mermaid diagram" descr="11811dd0a6b07bd4.png"/>
           <p:cNvPicPr>
             <a:picLocks noChangeAspect="1"/>
           </p:cNvPicPr>
@@ -20831,7 +20912,7 @@
         <p:spPr>
           <a:xfrm>
             <a:off x="530352" y="1956816"/>
-            <a:ext cx="11130991" cy="1105204"/>
+            <a:ext cx="11130991" cy="822589"/>
           </a:xfrm>
           <a:prstGeom prst="rect">
             <a:avLst/>
@@ -20846,7 +20927,7 @@
         </p:nvSpPr>
         <p:spPr>
           <a:xfrm>
-            <a:off x="530352" y="3171748"/>
+            <a:off x="530352" y="2889133"/>
             <a:ext cx="502920" cy="333756"/>
           </a:xfrm>
           <a:prstGeom prst="rect">
@@ -20881,7 +20962,7 @@
         </p:nvSpPr>
         <p:spPr>
           <a:xfrm>
-            <a:off x="1097280" y="3208324"/>
+            <a:off x="1097280" y="2925709"/>
             <a:ext cx="10564063" cy="368808"/>
           </a:xfrm>
           <a:prstGeom prst="rect">
@@ -20915,7 +20996,7 @@
         </p:nvSpPr>
         <p:spPr>
           <a:xfrm>
-            <a:off x="530352" y="3613708"/>
+            <a:off x="530352" y="3331093"/>
             <a:ext cx="502920" cy="333756"/>
           </a:xfrm>
           <a:prstGeom prst="rect">
@@ -20950,7 +21031,7 @@
         </p:nvSpPr>
         <p:spPr>
           <a:xfrm>
-            <a:off x="1097280" y="3650284"/>
+            <a:off x="1097280" y="3367669"/>
             <a:ext cx="10564063" cy="368808"/>
           </a:xfrm>
           <a:prstGeom prst="rect">
@@ -20984,7 +21065,7 @@
         </p:nvSpPr>
         <p:spPr>
           <a:xfrm>
-            <a:off x="530352" y="4055668"/>
+            <a:off x="530352" y="3773053"/>
             <a:ext cx="502920" cy="333756"/>
           </a:xfrm>
           <a:prstGeom prst="rect">
@@ -21019,7 +21100,7 @@
         </p:nvSpPr>
         <p:spPr>
           <a:xfrm>
-            <a:off x="1097280" y="4092244"/>
+            <a:off x="1097280" y="3809629"/>
             <a:ext cx="10564063" cy="368808"/>
           </a:xfrm>
           <a:prstGeom prst="rect">
@@ -21053,7 +21134,7 @@
         </p:nvSpPr>
         <p:spPr>
           <a:xfrm>
-            <a:off x="530352" y="4497628"/>
+            <a:off x="530352" y="4215013"/>
             <a:ext cx="502920" cy="333756"/>
           </a:xfrm>
           <a:prstGeom prst="rect">
@@ -21088,7 +21169,7 @@
         </p:nvSpPr>
         <p:spPr>
           <a:xfrm>
-            <a:off x="1097280" y="4534204"/>
+            <a:off x="1097280" y="4251589"/>
             <a:ext cx="10564063" cy="368808"/>
           </a:xfrm>
           <a:prstGeom prst="rect">
@@ -21122,7 +21203,7 @@
         </p:nvSpPr>
         <p:spPr>
           <a:xfrm>
-            <a:off x="530352" y="4939588"/>
+            <a:off x="530352" y="4656973"/>
             <a:ext cx="502920" cy="333756"/>
           </a:xfrm>
           <a:prstGeom prst="rect">
@@ -21157,7 +21238,7 @@
         </p:nvSpPr>
         <p:spPr>
           <a:xfrm>
-            <a:off x="1097280" y="4976164"/>
+            <a:off x="1097280" y="4693549"/>
             <a:ext cx="10564063" cy="368808"/>
           </a:xfrm>
           <a:prstGeom prst="rect">
@@ -21191,7 +21272,7 @@
         </p:nvSpPr>
         <p:spPr>
           <a:xfrm>
-            <a:off x="530352" y="5381548"/>
+            <a:off x="530352" y="5098933"/>
             <a:ext cx="502920" cy="333756"/>
           </a:xfrm>
           <a:prstGeom prst="rect">
@@ -21226,7 +21307,7 @@
         </p:nvSpPr>
         <p:spPr>
           <a:xfrm>
-            <a:off x="1097280" y="5418124"/>
+            <a:off x="1097280" y="5135509"/>
             <a:ext cx="10564063" cy="368808"/>
           </a:xfrm>
           <a:prstGeom prst="rect">
@@ -21519,7 +21600,7 @@
                 </a:solidFill>
                 <a:latin typeface="Calibri"/>
               </a:rPr>
-              <a:t>S20  ·  24 / 29</a:t>
+              <a:t>S20  ·  24 / 30</a:t>
             </a:r>
           </a:p>
         </p:txBody>
@@ -22472,7 +22553,7 @@
                 </a:solidFill>
                 <a:latin typeface="Calibri"/>
               </a:rPr>
-              <a:t>S21  ·  25 / 29</a:t>
+              <a:t>S21  ·  25 / 30</a:t>
             </a:r>
           </a:p>
         </p:txBody>
@@ -22678,7 +22759,7 @@
                 </a:solidFill>
                 <a:latin typeface="Georgia"/>
               </a:rPr>
-              <a:t>The interview drill, for the lab: twelve questions</a:t>
+              <a:t>The interview drill, for the lab: ten questions</a:t>
             </a:r>
           </a:p>
         </p:txBody>
@@ -22768,7 +22849,7 @@
                 </a:solidFill>
                 <a:latin typeface="Calibri"/>
               </a:rPr>
-              <a:t>Which interview questions does today equip you to answer, and how are they tagged?</a:t>
+              <a:t>Which staple and frequent interview questions does today equip you to answer?</a:t>
             </a:r>
           </a:p>
         </p:txBody>
@@ -22782,8 +22863,8 @@
           <p:nvPr/>
         </p:nvGraphicFramePr>
         <p:xfrm>
-          <a:off x="530352" y="1874012"/>
-          <a:ext cx="11130991" cy="4134104"/>
+          <a:off x="530352" y="1907032"/>
+          <a:ext cx="11130991" cy="4068064"/>
         </p:xfrm>
         <a:graphic>
           <a:graphicData uri="http://schemas.openxmlformats.org/drawingml/2006/table">
@@ -22795,14 +22876,14 @@
                 <a:gridCol w="914400"/>
                 <a:gridCol w="10216591"/>
               </a:tblGrid>
-              <a:tr h="318008">
+              <a:tr h="369824">
                 <a:tc>
                   <a:txBody>
                     <a:bodyPr/>
                     <a:lstStyle/>
                     <a:p>
                       <a:r>
-                        <a:rPr sz="1150" b="1" i="0">
+                        <a:rPr sz="1450" b="1" i="0">
                           <a:solidFill>
                             <a:srgbClr val="FFFFFF"/>
                           </a:solidFill>
@@ -22824,7 +22905,7 @@
                     <a:lstStyle/>
                     <a:p>
                       <a:r>
-                        <a:rPr sz="1150" b="1" i="0">
+                        <a:rPr sz="1450" b="1" i="0">
                           <a:solidFill>
                             <a:srgbClr val="FFFFFF"/>
                           </a:solidFill>
@@ -22841,14 +22922,14 @@
                   </a:tcPr>
                 </a:tc>
               </a:tr>
-              <a:tr h="318008">
+              <a:tr h="369824">
                 <a:tc>
                   <a:txBody>
                     <a:bodyPr/>
                     <a:lstStyle/>
                     <a:p>
                       <a:r>
-                        <a:rPr sz="1100" b="0" i="0">
+                        <a:rPr sz="1400" b="0" i="0">
                           <a:solidFill>
                             <a:srgbClr val="1A1440"/>
                           </a:solidFill>
@@ -22870,7 +22951,7 @@
                     <a:lstStyle/>
                     <a:p>
                       <a:r>
-                        <a:rPr sz="1100" b="0" i="0">
+                        <a:rPr sz="1400" b="0" i="0">
                           <a:solidFill>
                             <a:srgbClr val="1A1440"/>
                           </a:solidFill>
@@ -22887,14 +22968,14 @@
                   </a:tcPr>
                 </a:tc>
               </a:tr>
-              <a:tr h="318008">
+              <a:tr h="369824">
                 <a:tc>
                   <a:txBody>
                     <a:bodyPr/>
                     <a:lstStyle/>
                     <a:p>
                       <a:r>
-                        <a:rPr sz="1100" b="0" i="0">
+                        <a:rPr sz="1400" b="0" i="0">
                           <a:solidFill>
                             <a:srgbClr val="1A1440"/>
                           </a:solidFill>
@@ -22916,7 +22997,7 @@
                     <a:lstStyle/>
                     <a:p>
                       <a:r>
-                        <a:rPr sz="1100" b="0" i="0">
+                        <a:rPr sz="1400" b="0" i="0">
                           <a:solidFill>
                             <a:srgbClr val="1A1440"/>
                           </a:solidFill>
@@ -22933,14 +23014,14 @@
                   </a:tcPr>
                 </a:tc>
               </a:tr>
-              <a:tr h="318008">
+              <a:tr h="369824">
                 <a:tc>
                   <a:txBody>
                     <a:bodyPr/>
                     <a:lstStyle/>
                     <a:p>
                       <a:r>
-                        <a:rPr sz="1100" b="0" i="0">
+                        <a:rPr sz="1400" b="0" i="0">
                           <a:solidFill>
                             <a:srgbClr val="1A1440"/>
                           </a:solidFill>
@@ -22962,7 +23043,7 @@
                     <a:lstStyle/>
                     <a:p>
                       <a:r>
-                        <a:rPr sz="1100" b="0" i="0">
+                        <a:rPr sz="1400" b="0" i="0">
                           <a:solidFill>
                             <a:srgbClr val="1A1440"/>
                           </a:solidFill>
@@ -22979,14 +23060,14 @@
                   </a:tcPr>
                 </a:tc>
               </a:tr>
-              <a:tr h="318008">
+              <a:tr h="369824">
                 <a:tc>
                   <a:txBody>
                     <a:bodyPr/>
                     <a:lstStyle/>
                     <a:p>
                       <a:r>
-                        <a:rPr sz="1100" b="0" i="0">
+                        <a:rPr sz="1400" b="0" i="0">
                           <a:solidFill>
                             <a:srgbClr val="1A1440"/>
                           </a:solidFill>
@@ -23008,7 +23089,7 @@
                     <a:lstStyle/>
                     <a:p>
                       <a:r>
-                        <a:rPr sz="1100" b="0" i="0">
+                        <a:rPr sz="1400" b="0" i="0">
                           <a:solidFill>
                             <a:srgbClr val="1A1440"/>
                           </a:solidFill>
@@ -23025,14 +23106,14 @@
                   </a:tcPr>
                 </a:tc>
               </a:tr>
-              <a:tr h="318008">
+              <a:tr h="369824">
                 <a:tc>
                   <a:txBody>
                     <a:bodyPr/>
                     <a:lstStyle/>
                     <a:p>
                       <a:r>
-                        <a:rPr sz="1100" b="0" i="0">
+                        <a:rPr sz="1400" b="0" i="0">
                           <a:solidFill>
                             <a:srgbClr val="1A1440"/>
                           </a:solidFill>
@@ -23054,7 +23135,7 @@
                     <a:lstStyle/>
                     <a:p>
                       <a:r>
-                        <a:rPr sz="1100" b="0" i="0">
+                        <a:rPr sz="1400" b="0" i="0">
                           <a:solidFill>
                             <a:srgbClr val="1A1440"/>
                           </a:solidFill>
@@ -23071,14 +23152,14 @@
                   </a:tcPr>
                 </a:tc>
               </a:tr>
-              <a:tr h="318008">
+              <a:tr h="369824">
                 <a:tc>
                   <a:txBody>
                     <a:bodyPr/>
                     <a:lstStyle/>
                     <a:p>
                       <a:r>
-                        <a:rPr sz="1100" b="0" i="0">
+                        <a:rPr sz="1400" b="0" i="0">
                           <a:solidFill>
                             <a:srgbClr val="1A1440"/>
                           </a:solidFill>
@@ -23100,7 +23181,7 @@
                     <a:lstStyle/>
                     <a:p>
                       <a:r>
-                        <a:rPr sz="1100" b="0" i="0">
+                        <a:rPr sz="1400" b="0" i="0">
                           <a:solidFill>
                             <a:srgbClr val="1A1440"/>
                           </a:solidFill>
@@ -23117,14 +23198,14 @@
                   </a:tcPr>
                 </a:tc>
               </a:tr>
-              <a:tr h="318008">
+              <a:tr h="369824">
                 <a:tc>
                   <a:txBody>
                     <a:bodyPr/>
                     <a:lstStyle/>
                     <a:p>
                       <a:r>
-                        <a:rPr sz="1100" b="0" i="0">
+                        <a:rPr sz="1400" b="0" i="0">
                           <a:solidFill>
                             <a:srgbClr val="1A1440"/>
                           </a:solidFill>
@@ -23146,7 +23227,7 @@
                     <a:lstStyle/>
                     <a:p>
                       <a:r>
-                        <a:rPr sz="1100" b="0" i="0">
+                        <a:rPr sz="1400" b="0" i="0">
                           <a:solidFill>
                             <a:srgbClr val="1A1440"/>
                           </a:solidFill>
@@ -23163,14 +23244,14 @@
                   </a:tcPr>
                 </a:tc>
               </a:tr>
-              <a:tr h="318008">
+              <a:tr h="369824">
                 <a:tc>
                   <a:txBody>
                     <a:bodyPr/>
                     <a:lstStyle/>
                     <a:p>
                       <a:r>
-                        <a:rPr sz="1100" b="0" i="0">
+                        <a:rPr sz="1400" b="0" i="0">
                           <a:solidFill>
                             <a:srgbClr val="1A1440"/>
                           </a:solidFill>
@@ -23192,7 +23273,7 @@
                     <a:lstStyle/>
                     <a:p>
                       <a:r>
-                        <a:rPr sz="1100" b="0" i="0">
+                        <a:rPr sz="1400" b="0" i="0">
                           <a:solidFill>
                             <a:srgbClr val="1A1440"/>
                           </a:solidFill>
@@ -23209,14 +23290,14 @@
                   </a:tcPr>
                 </a:tc>
               </a:tr>
-              <a:tr h="318008">
+              <a:tr h="369824">
                 <a:tc>
                   <a:txBody>
                     <a:bodyPr/>
                     <a:lstStyle/>
                     <a:p>
                       <a:r>
-                        <a:rPr sz="1100" b="0" i="0">
+                        <a:rPr sz="1400" b="0" i="0">
                           <a:solidFill>
                             <a:srgbClr val="1A1440"/>
                           </a:solidFill>
@@ -23238,7 +23319,7 @@
                     <a:lstStyle/>
                     <a:p>
                       <a:r>
-                        <a:rPr sz="1100" b="0" i="0">
+                        <a:rPr sz="1400" b="0" i="0">
                           <a:solidFill>
                             <a:srgbClr val="1A1440"/>
                           </a:solidFill>
@@ -23255,14 +23336,14 @@
                   </a:tcPr>
                 </a:tc>
               </a:tr>
-              <a:tr h="318008">
+              <a:tr h="369824">
                 <a:tc>
                   <a:txBody>
                     <a:bodyPr/>
                     <a:lstStyle/>
                     <a:p>
                       <a:r>
-                        <a:rPr sz="1100" b="0" i="0">
+                        <a:rPr sz="1400" b="0" i="0">
                           <a:solidFill>
                             <a:srgbClr val="1A1440"/>
                           </a:solidFill>
@@ -23284,7 +23365,7 @@
                     <a:lstStyle/>
                     <a:p>
                       <a:r>
-                        <a:rPr sz="1100" b="0" i="0">
+                        <a:rPr sz="1400" b="0" i="0">
                           <a:solidFill>
                             <a:srgbClr val="1A1440"/>
                           </a:solidFill>
@@ -23301,98 +23382,6 @@
                   </a:tcPr>
                 </a:tc>
               </a:tr>
-              <a:tr h="318008">
-                <a:tc>
-                  <a:txBody>
-                    <a:bodyPr/>
-                    <a:lstStyle/>
-                    <a:p>
-                      <a:r>
-                        <a:rPr sz="1100" b="0" i="0">
-                          <a:solidFill>
-                            <a:srgbClr val="1A1440"/>
-                          </a:solidFill>
-                          <a:latin typeface="Calibri"/>
-                        </a:rPr>
-                        <a:t>[D]</a:t>
-                      </a:r>
-                    </a:p>
-                  </a:txBody>
-                  <a:tcPr marL="101600" marR="101600" marT="38100" marB="38100" anchor="ctr">
-                    <a:solidFill>
-                      <a:srgbClr val="FFFFFF"/>
-                    </a:solidFill>
-                  </a:tcPr>
-                </a:tc>
-                <a:tc>
-                  <a:txBody>
-                    <a:bodyPr/>
-                    <a:lstStyle/>
-                    <a:p>
-                      <a:r>
-                        <a:rPr sz="1100" b="0" i="0">
-                          <a:solidFill>
-                            <a:srgbClr val="1A1440"/>
-                          </a:solidFill>
-                          <a:latin typeface="Calibri"/>
-                        </a:rPr>
-                        <a:t>The business says ties rank the same: which function, and how many rows might the top-N report ship?</a:t>
-                      </a:r>
-                    </a:p>
-                  </a:txBody>
-                  <a:tcPr marL="101600" marR="101600" marT="38100" marB="38100" anchor="ctr">
-                    <a:solidFill>
-                      <a:srgbClr val="FFFFFF"/>
-                    </a:solidFill>
-                  </a:tcPr>
-                </a:tc>
-              </a:tr>
-              <a:tr h="318008">
-                <a:tc>
-                  <a:txBody>
-                    <a:bodyPr/>
-                    <a:lstStyle/>
-                    <a:p>
-                      <a:r>
-                        <a:rPr sz="1100" b="0" i="0">
-                          <a:solidFill>
-                            <a:srgbClr val="1A1440"/>
-                          </a:solidFill>
-                          <a:latin typeface="Calibri"/>
-                        </a:rPr>
-                        <a:t>[D]</a:t>
-                      </a:r>
-                    </a:p>
-                  </a:txBody>
-                  <a:tcPr marL="101600" marR="101600" marT="38100" marB="38100" anchor="ctr">
-                    <a:solidFill>
-                      <a:srgbClr val="F4F2FA"/>
-                    </a:solidFill>
-                  </a:tcPr>
-                </a:tc>
-                <a:tc>
-                  <a:txBody>
-                    <a:bodyPr/>
-                    <a:lstStyle/>
-                    <a:p>
-                      <a:r>
-                        <a:rPr sz="1100" b="0" i="0">
-                          <a:solidFill>
-                            <a:srgbClr val="1A1440"/>
-                          </a:solidFill>
-                          <a:latin typeface="Calibri"/>
-                        </a:rPr>
-                        <a:t>A member was on holiday: how does your flag treat a month with no orders, and why not zero?</a:t>
-                      </a:r>
-                    </a:p>
-                  </a:txBody>
-                  <a:tcPr marL="101600" marR="101600" marT="38100" marB="38100" anchor="ctr">
-                    <a:solidFill>
-                      <a:srgbClr val="F4F2FA"/>
-                    </a:solidFill>
-                  </a:tcPr>
-                </a:tc>
-              </a:tr>
             </a:tbl>
           </a:graphicData>
         </a:graphic>
@@ -23664,7 +23653,7 @@
                 </a:solidFill>
                 <a:latin typeface="Calibri"/>
               </a:rPr>
-              <a:t>D22  ·  26 / 29</a:t>
+              <a:t>D22  ·  26 / 30</a:t>
             </a:r>
           </a:p>
         </p:txBody>
@@ -23870,6 +23859,839 @@
                 </a:solidFill>
                 <a:latin typeface="Georgia"/>
               </a:rPr>
+              <a:t>The interview drill, for the lab: three to finish</a:t>
+            </a:r>
+          </a:p>
+        </p:txBody>
+      </p:sp>
+      <p:sp>
+        <p:nvSpPr>
+          <p:cNvPr id="8" name="Rounded Rectangle 7"/>
+          <p:cNvSpPr/>
+          <p:nvPr/>
+        </p:nvSpPr>
+        <p:spPr>
+          <a:xfrm>
+            <a:off x="10701223" y="822960"/>
+            <a:ext cx="960120" cy="256032"/>
+          </a:xfrm>
+          <a:prstGeom prst="roundRect">
+            <a:avLst>
+              <a:gd name="adj" fmla="val 50000"/>
+            </a:avLst>
+          </a:prstGeom>
+          <a:solidFill>
+            <a:srgbClr val="1A0F5C"/>
+          </a:solidFill>
+          <a:ln>
+            <a:noFill/>
+          </a:ln>
+          <a:effectLst/>
+        </p:spPr>
+        <p:style>
+          <a:lnRef idx="1">
+            <a:schemeClr val="accent1"/>
+          </a:lnRef>
+          <a:fillRef idx="3">
+            <a:schemeClr val="accent1"/>
+          </a:fillRef>
+          <a:effectRef idx="2">
+            <a:schemeClr val="accent1"/>
+          </a:effectRef>
+          <a:fontRef idx="minor">
+            <a:schemeClr val="lt1"/>
+          </a:fontRef>
+        </p:style>
+        <p:txBody>
+          <a:bodyPr rtlCol="0" anchor="ctr" wrap="none" lIns="25400" rIns="25400" tIns="0" bIns="0"/>
+          <a:lstStyle/>
+          <a:p>
+            <a:pPr algn="ctr"/>
+            <a:r>
+              <a:rPr sz="800" b="1" spc="200">
+                <a:solidFill>
+                  <a:srgbClr val="FFFFFF"/>
+                </a:solidFill>
+                <a:latin typeface="Calibri"/>
+              </a:rPr>
+              <a:t>DEPTH</a:t>
+            </a:r>
+          </a:p>
+        </p:txBody>
+      </p:sp>
+      <p:sp>
+        <p:nvSpPr>
+          <p:cNvPr id="9" name="TextBox 8"/>
+          <p:cNvSpPr txBox="1"/>
+          <p:nvPr/>
+        </p:nvSpPr>
+        <p:spPr>
+          <a:xfrm>
+            <a:off x="530352" y="1243584"/>
+            <a:ext cx="11130991" cy="234696"/>
+          </a:xfrm>
+          <a:prstGeom prst="rect">
+            <a:avLst/>
+          </a:prstGeom>
+          <a:noFill/>
+        </p:spPr>
+        <p:txBody>
+          <a:bodyPr wrap="square" anchor="t" lIns="0" rIns="0" tIns="0" bIns="0">
+            <a:spAutoFit/>
+          </a:bodyPr>
+          <a:lstStyle/>
+          <a:p>
+            <a:pPr algn="l"/>
+            <a:r>
+              <a:rPr sz="1200" b="0" i="0">
+                <a:solidFill>
+                  <a:srgbClr val="6B6690"/>
+                </a:solidFill>
+                <a:latin typeface="Calibri"/>
+              </a:rPr>
+              <a:t>Which differentiator questions close the drill?</a:t>
+            </a:r>
+          </a:p>
+        </p:txBody>
+      </p:sp>
+      <p:graphicFrame>
+        <p:nvGraphicFramePr>
+          <p:cNvPr id="10" name="Table 9"/>
+          <p:cNvGraphicFramePr>
+            <a:graphicFrameLocks noGrp="1"/>
+          </p:cNvGraphicFramePr>
+          <p:nvPr/>
+        </p:nvGraphicFramePr>
+        <p:xfrm>
+          <a:off x="530352" y="1956816"/>
+          <a:ext cx="11130991" cy="1479296"/>
+        </p:xfrm>
+        <a:graphic>
+          <a:graphicData uri="http://schemas.openxmlformats.org/drawingml/2006/table">
+            <a:tbl>
+              <a:tblPr firstRow="0" bandRow="0">
+                <a:tableStyleId>{2D5ABB26-0587-4C30-8999-92F81FD0307C}</a:tableStyleId>
+              </a:tblPr>
+              <a:tblGrid>
+                <a:gridCol w="914400"/>
+                <a:gridCol w="10216591"/>
+              </a:tblGrid>
+              <a:tr h="369824">
+                <a:tc>
+                  <a:txBody>
+                    <a:bodyPr/>
+                    <a:lstStyle/>
+                    <a:p>
+                      <a:r>
+                        <a:rPr sz="1450" b="1" i="0">
+                          <a:solidFill>
+                            <a:srgbClr val="FFFFFF"/>
+                          </a:solidFill>
+                          <a:latin typeface="Calibri"/>
+                        </a:rPr>
+                        <a:t>Tag</a:t>
+                      </a:r>
+                    </a:p>
+                  </a:txBody>
+                  <a:tcPr marL="101600" marR="101600" marT="38100" marB="38100" anchor="ctr">
+                    <a:solidFill>
+                      <a:srgbClr val="1A0F5C"/>
+                    </a:solidFill>
+                  </a:tcPr>
+                </a:tc>
+                <a:tc>
+                  <a:txBody>
+                    <a:bodyPr/>
+                    <a:lstStyle/>
+                    <a:p>
+                      <a:r>
+                        <a:rPr sz="1450" b="1" i="0">
+                          <a:solidFill>
+                            <a:srgbClr val="FFFFFF"/>
+                          </a:solidFill>
+                          <a:latin typeface="Calibri"/>
+                        </a:rPr>
+                        <a:t>Question</a:t>
+                      </a:r>
+                    </a:p>
+                  </a:txBody>
+                  <a:tcPr marL="101600" marR="101600" marT="38100" marB="38100" anchor="ctr">
+                    <a:solidFill>
+                      <a:srgbClr val="1A0F5C"/>
+                    </a:solidFill>
+                  </a:tcPr>
+                </a:tc>
+              </a:tr>
+              <a:tr h="369824">
+                <a:tc>
+                  <a:txBody>
+                    <a:bodyPr/>
+                    <a:lstStyle/>
+                    <a:p>
+                      <a:r>
+                        <a:rPr sz="1400" b="0" i="0">
+                          <a:solidFill>
+                            <a:srgbClr val="1A1440"/>
+                          </a:solidFill>
+                          <a:latin typeface="Calibri"/>
+                        </a:rPr>
+                        <a:t>[D]</a:t>
+                      </a:r>
+                    </a:p>
+                  </a:txBody>
+                  <a:tcPr marL="101600" marR="101600" marT="38100" marB="38100" anchor="ctr">
+                    <a:solidFill>
+                      <a:srgbClr val="FFFFFF"/>
+                    </a:solidFill>
+                  </a:tcPr>
+                </a:tc>
+                <a:tc>
+                  <a:txBody>
+                    <a:bodyPr/>
+                    <a:lstStyle/>
+                    <a:p>
+                      <a:r>
+                        <a:rPr sz="1400" b="0" i="0">
+                          <a:solidFill>
+                            <a:srgbClr val="1A1440"/>
+                          </a:solidFill>
+                          <a:latin typeface="Calibri"/>
+                        </a:rPr>
+                        <a:t>The business says ties rank the same: which function, and how many rows might the top-N report ship?</a:t>
+                      </a:r>
+                    </a:p>
+                  </a:txBody>
+                  <a:tcPr marL="101600" marR="101600" marT="38100" marB="38100" anchor="ctr">
+                    <a:solidFill>
+                      <a:srgbClr val="FFFFFF"/>
+                    </a:solidFill>
+                  </a:tcPr>
+                </a:tc>
+              </a:tr>
+              <a:tr h="369824">
+                <a:tc>
+                  <a:txBody>
+                    <a:bodyPr/>
+                    <a:lstStyle/>
+                    <a:p>
+                      <a:r>
+                        <a:rPr sz="1400" b="0" i="0">
+                          <a:solidFill>
+                            <a:srgbClr val="1A1440"/>
+                          </a:solidFill>
+                          <a:latin typeface="Calibri"/>
+                        </a:rPr>
+                        <a:t>[D]</a:t>
+                      </a:r>
+                    </a:p>
+                  </a:txBody>
+                  <a:tcPr marL="101600" marR="101600" marT="38100" marB="38100" anchor="ctr">
+                    <a:solidFill>
+                      <a:srgbClr val="F4F2FA"/>
+                    </a:solidFill>
+                  </a:tcPr>
+                </a:tc>
+                <a:tc>
+                  <a:txBody>
+                    <a:bodyPr/>
+                    <a:lstStyle/>
+                    <a:p>
+                      <a:r>
+                        <a:rPr sz="1400" b="0" i="0">
+                          <a:solidFill>
+                            <a:srgbClr val="1A1440"/>
+                          </a:solidFill>
+                          <a:latin typeface="Calibri"/>
+                        </a:rPr>
+                        <a:t>A member was on holiday: how does your flag treat a month with no orders, and why not zero?</a:t>
+                      </a:r>
+                    </a:p>
+                  </a:txBody>
+                  <a:tcPr marL="101600" marR="101600" marT="38100" marB="38100" anchor="ctr">
+                    <a:solidFill>
+                      <a:srgbClr val="F4F2FA"/>
+                    </a:solidFill>
+                  </a:tcPr>
+                </a:tc>
+              </a:tr>
+              <a:tr h="369824">
+                <a:tc>
+                  <a:txBody>
+                    <a:bodyPr/>
+                    <a:lstStyle/>
+                    <a:p>
+                      <a:r>
+                        <a:rPr sz="1400" b="0" i="0">
+                          <a:solidFill>
+                            <a:srgbClr val="1A1440"/>
+                          </a:solidFill>
+                          <a:latin typeface="Calibri"/>
+                        </a:rPr>
+                        <a:t>[D]</a:t>
+                      </a:r>
+                    </a:p>
+                  </a:txBody>
+                  <a:tcPr marL="101600" marR="101600" marT="38100" marB="38100" anchor="ctr">
+                    <a:solidFill>
+                      <a:srgbClr val="FFFFFF"/>
+                    </a:solidFill>
+                  </a:tcPr>
+                </a:tc>
+                <a:tc>
+                  <a:txBody>
+                    <a:bodyPr/>
+                    <a:lstStyle/>
+                    <a:p>
+                      <a:r>
+                        <a:rPr sz="1400" b="0" i="0">
+                          <a:solidFill>
+                            <a:srgbClr val="1A1440"/>
+                          </a:solidFill>
+                          <a:latin typeface="Calibri"/>
+                        </a:rPr>
+                        <a:t>Your running total closes below the quarter's total: what do you check first?</a:t>
+                      </a:r>
+                    </a:p>
+                  </a:txBody>
+                  <a:tcPr marL="101600" marR="101600" marT="38100" marB="38100" anchor="ctr">
+                    <a:solidFill>
+                      <a:srgbClr val="FFFFFF"/>
+                    </a:solidFill>
+                  </a:tcPr>
+                </a:tc>
+              </a:tr>
+            </a:tbl>
+          </a:graphicData>
+        </a:graphic>
+      </p:graphicFrame>
+      <p:sp>
+        <p:nvSpPr>
+          <p:cNvPr id="11" name="TextBox 10"/>
+          <p:cNvSpPr txBox="1"/>
+          <p:nvPr/>
+        </p:nvSpPr>
+        <p:spPr>
+          <a:xfrm>
+            <a:off x="530352" y="3692144"/>
+            <a:ext cx="11130991" cy="881888"/>
+          </a:xfrm>
+          <a:prstGeom prst="rect">
+            <a:avLst/>
+          </a:prstGeom>
+          <a:noFill/>
+        </p:spPr>
+        <p:txBody>
+          <a:bodyPr wrap="square" anchor="t" lIns="0" rIns="0" tIns="0" bIns="0">
+            <a:spAutoFit/>
+          </a:bodyPr>
+          <a:lstStyle/>
+          <a:p>
+            <a:pPr>
+              <a:spcAft>
+                <a:spcPts val="800"/>
+              </a:spcAft>
+            </a:pPr>
+            <a:r>
+              <a:rPr sz="1600" b="0" i="0">
+                <a:solidFill>
+                  <a:srgbClr val="1A1440"/>
+                </a:solidFill>
+                <a:latin typeface="Calibri"/>
+              </a:rPr>
+              <a:t>Each one asks for a judgment the day's numbers support: the count a tie rule ships, the month with no</a:t>
+            </a:r>
+          </a:p>
+          <a:p>
+            <a:pPr>
+              <a:spcAft>
+                <a:spcPts val="800"/>
+              </a:spcAft>
+            </a:pPr>
+            <a:r>
+              <a:rPr sz="1600" b="0" i="0">
+                <a:solidFill>
+                  <a:srgbClr val="1A1440"/>
+                </a:solidFill>
+                <a:latin typeface="Calibri"/>
+              </a:rPr>
+              <a:t>order, and the running total that has to close on the quarter's own total.</a:t>
+            </a:r>
+          </a:p>
+        </p:txBody>
+      </p:sp>
+      <p:sp>
+        <p:nvSpPr>
+          <p:cNvPr id="12" name="Oval 11"/>
+          <p:cNvSpPr/>
+          <p:nvPr/>
+        </p:nvSpPr>
+        <p:spPr>
+          <a:xfrm>
+            <a:off x="530352" y="6492240"/>
+            <a:ext cx="64008" cy="64008"/>
+          </a:xfrm>
+          <a:prstGeom prst="ellipse">
+            <a:avLst/>
+          </a:prstGeom>
+          <a:solidFill>
+            <a:srgbClr val="CFC9EE"/>
+          </a:solidFill>
+          <a:ln>
+            <a:noFill/>
+          </a:ln>
+          <a:effectLst/>
+        </p:spPr>
+        <p:style>
+          <a:lnRef idx="1">
+            <a:schemeClr val="accent1"/>
+          </a:lnRef>
+          <a:fillRef idx="3">
+            <a:schemeClr val="accent1"/>
+          </a:fillRef>
+          <a:effectRef idx="2">
+            <a:schemeClr val="accent1"/>
+          </a:effectRef>
+          <a:fontRef idx="minor">
+            <a:schemeClr val="lt1"/>
+          </a:fontRef>
+        </p:style>
+        <p:txBody>
+          <a:bodyPr rtlCol="0" anchor="ctr" wrap="square"/>
+          <a:lstStyle/>
+          <a:p>
+            <a:pPr algn="ctr"/>
+          </a:p>
+        </p:txBody>
+      </p:sp>
+      <p:sp>
+        <p:nvSpPr>
+          <p:cNvPr id="13" name="TextBox 12"/>
+          <p:cNvSpPr txBox="1"/>
+          <p:nvPr/>
+        </p:nvSpPr>
+        <p:spPr>
+          <a:xfrm>
+            <a:off x="640080" y="6437376"/>
+            <a:ext cx="1378457" cy="152146"/>
+          </a:xfrm>
+          <a:prstGeom prst="rect">
+            <a:avLst/>
+          </a:prstGeom>
+          <a:noFill/>
+        </p:spPr>
+        <p:txBody>
+          <a:bodyPr wrap="square" anchor="t" lIns="0" rIns="0" tIns="0" bIns="0">
+            <a:spAutoFit/>
+          </a:bodyPr>
+          <a:lstStyle/>
+          <a:p>
+            <a:pPr algn="l"/>
+            <a:r>
+              <a:rPr sz="700" b="0" i="0">
+                <a:solidFill>
+                  <a:srgbClr val="6B6690"/>
+                </a:solidFill>
+                <a:latin typeface="Calibri"/>
+              </a:rPr>
+              <a:t>Who does Marketing call?</a:t>
+            </a:r>
+          </a:p>
+        </p:txBody>
+      </p:sp>
+      <p:sp>
+        <p:nvSpPr>
+          <p:cNvPr id="14" name="Oval 13"/>
+          <p:cNvSpPr/>
+          <p:nvPr/>
+        </p:nvSpPr>
+        <p:spPr>
+          <a:xfrm>
+            <a:off x="2109977" y="6492240"/>
+            <a:ext cx="64008" cy="64008"/>
+          </a:xfrm>
+          <a:prstGeom prst="ellipse">
+            <a:avLst/>
+          </a:prstGeom>
+          <a:solidFill>
+            <a:srgbClr val="CFC9EE"/>
+          </a:solidFill>
+          <a:ln>
+            <a:noFill/>
+          </a:ln>
+          <a:effectLst/>
+        </p:spPr>
+        <p:style>
+          <a:lnRef idx="1">
+            <a:schemeClr val="accent1"/>
+          </a:lnRef>
+          <a:fillRef idx="3">
+            <a:schemeClr val="accent1"/>
+          </a:fillRef>
+          <a:effectRef idx="2">
+            <a:schemeClr val="accent1"/>
+          </a:effectRef>
+          <a:fontRef idx="minor">
+            <a:schemeClr val="lt1"/>
+          </a:fontRef>
+        </p:style>
+        <p:txBody>
+          <a:bodyPr rtlCol="0" anchor="ctr" wrap="square"/>
+          <a:lstStyle/>
+          <a:p>
+            <a:pPr algn="ctr"/>
+          </a:p>
+        </p:txBody>
+      </p:sp>
+      <p:sp>
+        <p:nvSpPr>
+          <p:cNvPr id="15" name="TextBox 14"/>
+          <p:cNvSpPr txBox="1"/>
+          <p:nvPr/>
+        </p:nvSpPr>
+        <p:spPr>
+          <a:xfrm>
+            <a:off x="2219706" y="6437376"/>
+            <a:ext cx="1194435" cy="152146"/>
+          </a:xfrm>
+          <a:prstGeom prst="rect">
+            <a:avLst/>
+          </a:prstGeom>
+          <a:noFill/>
+        </p:spPr>
+        <p:txBody>
+          <a:bodyPr wrap="square" anchor="t" lIns="0" rIns="0" tIns="0" bIns="0">
+            <a:spAutoFit/>
+          </a:bodyPr>
+          <a:lstStyle/>
+          <a:p>
+            <a:pPr algn="l"/>
+            <a:r>
+              <a:rPr sz="700" b="0" i="0">
+                <a:solidFill>
+                  <a:srgbClr val="6B6690"/>
+                </a:solidFill>
+                <a:latin typeface="Calibri"/>
+              </a:rPr>
+              <a:t>Can you do it alone?</a:t>
+            </a:r>
+          </a:p>
+        </p:txBody>
+      </p:sp>
+      <p:sp>
+        <p:nvSpPr>
+          <p:cNvPr id="16" name="Oval 15"/>
+          <p:cNvSpPr/>
+          <p:nvPr/>
+        </p:nvSpPr>
+        <p:spPr>
+          <a:xfrm>
+            <a:off x="3505580" y="6492240"/>
+            <a:ext cx="64008" cy="64008"/>
+          </a:xfrm>
+          <a:prstGeom prst="ellipse">
+            <a:avLst/>
+          </a:prstGeom>
+          <a:solidFill>
+            <a:srgbClr val="5B3FD6"/>
+          </a:solidFill>
+          <a:ln>
+            <a:noFill/>
+          </a:ln>
+          <a:effectLst/>
+        </p:spPr>
+        <p:style>
+          <a:lnRef idx="1">
+            <a:schemeClr val="accent1"/>
+          </a:lnRef>
+          <a:fillRef idx="3">
+            <a:schemeClr val="accent1"/>
+          </a:fillRef>
+          <a:effectRef idx="2">
+            <a:schemeClr val="accent1"/>
+          </a:effectRef>
+          <a:fontRef idx="minor">
+            <a:schemeClr val="lt1"/>
+          </a:fontRef>
+        </p:style>
+        <p:txBody>
+          <a:bodyPr rtlCol="0" anchor="ctr" wrap="square"/>
+          <a:lstStyle/>
+          <a:p>
+            <a:pPr algn="ctr"/>
+          </a:p>
+        </p:txBody>
+      </p:sp>
+      <p:sp>
+        <p:nvSpPr>
+          <p:cNvPr id="17" name="TextBox 16"/>
+          <p:cNvSpPr txBox="1"/>
+          <p:nvPr/>
+        </p:nvSpPr>
+        <p:spPr>
+          <a:xfrm>
+            <a:off x="3615308" y="6437376"/>
+            <a:ext cx="1470469" cy="152146"/>
+          </a:xfrm>
+          <a:prstGeom prst="rect">
+            <a:avLst/>
+          </a:prstGeom>
+          <a:noFill/>
+        </p:spPr>
+        <p:txBody>
+          <a:bodyPr wrap="square" anchor="t" lIns="0" rIns="0" tIns="0" bIns="0">
+            <a:spAutoFit/>
+          </a:bodyPr>
+          <a:lstStyle/>
+          <a:p>
+            <a:pPr algn="l"/>
+            <a:r>
+              <a:rPr sz="700" b="1" i="0">
+                <a:solidFill>
+                  <a:srgbClr val="5B3FD6"/>
+                </a:solidFill>
+                <a:latin typeface="Calibri"/>
+              </a:rPr>
+              <a:t>What do we tell Marketing?</a:t>
+            </a:r>
+          </a:p>
+        </p:txBody>
+      </p:sp>
+      <p:sp>
+        <p:nvSpPr>
+          <p:cNvPr id="18" name="TextBox 17"/>
+          <p:cNvSpPr txBox="1"/>
+          <p:nvPr/>
+        </p:nvSpPr>
+        <p:spPr>
+          <a:xfrm>
+            <a:off x="10198303" y="6437376"/>
+            <a:ext cx="1463040" cy="160401"/>
+          </a:xfrm>
+          <a:prstGeom prst="rect">
+            <a:avLst/>
+          </a:prstGeom>
+          <a:noFill/>
+        </p:spPr>
+        <p:txBody>
+          <a:bodyPr wrap="square" anchor="t" lIns="0" rIns="0" tIns="0" bIns="0">
+            <a:spAutoFit/>
+          </a:bodyPr>
+          <a:lstStyle/>
+          <a:p>
+            <a:pPr algn="r"/>
+            <a:r>
+              <a:rPr sz="750" b="0" i="0">
+                <a:solidFill>
+                  <a:srgbClr val="6B6690"/>
+                </a:solidFill>
+                <a:latin typeface="Calibri"/>
+              </a:rPr>
+              <a:t>D23  ·  27 / 30</a:t>
+            </a:r>
+          </a:p>
+        </p:txBody>
+      </p:sp>
+    </p:spTree>
+  </p:cSld>
+  <p:clrMapOvr>
+    <a:masterClrMapping/>
+  </p:clrMapOvr>
+</p:sld>
+</file>
+
+<file path=ppt/slides/slide28.xml><?xml version="1.0" encoding="utf-8"?>
+<p:sld xmlns:a="http://schemas.openxmlformats.org/drawingml/2006/main" xmlns:p="http://schemas.openxmlformats.org/presentationml/2006/main" xmlns:r="http://schemas.openxmlformats.org/officeDocument/2006/relationships">
+  <p:cSld>
+    <p:spTree>
+      <p:nvGrpSpPr>
+        <p:cNvPr id="1" name=""/>
+        <p:cNvGrpSpPr/>
+        <p:nvPr/>
+      </p:nvGrpSpPr>
+      <p:grpSpPr/>
+      <p:pic>
+        <p:nvPicPr>
+          <p:cNvPr id="2" name="Picture 1" descr="bg_light.jpg"/>
+          <p:cNvPicPr>
+            <a:picLocks noChangeAspect="1"/>
+          </p:cNvPicPr>
+          <p:nvPr/>
+        </p:nvPicPr>
+        <p:blipFill>
+          <a:blip r:embed="rId2"/>
+          <a:stretch>
+            <a:fillRect/>
+          </a:stretch>
+        </p:blipFill>
+        <p:spPr>
+          <a:xfrm>
+            <a:off x="0" y="0"/>
+            <a:ext cx="12191695" cy="6858000"/>
+          </a:xfrm>
+          <a:prstGeom prst="rect">
+            <a:avLst/>
+          </a:prstGeom>
+        </p:spPr>
+      </p:pic>
+      <p:pic>
+        <p:nvPicPr>
+          <p:cNvPr id="3" name="Picture 2" descr="iitgn_logo.png"/>
+          <p:cNvPicPr>
+            <a:picLocks noChangeAspect="1"/>
+          </p:cNvPicPr>
+          <p:nvPr/>
+        </p:nvPicPr>
+        <p:blipFill>
+          <a:blip r:embed="rId3"/>
+          <a:stretch>
+            <a:fillRect/>
+          </a:stretch>
+        </p:blipFill>
+        <p:spPr>
+          <a:xfrm>
+            <a:off x="530352" y="201168"/>
+            <a:ext cx="420624" cy="420624"/>
+          </a:xfrm>
+          <a:prstGeom prst="rect">
+            <a:avLst/>
+          </a:prstGeom>
+        </p:spPr>
+      </p:pic>
+      <p:sp>
+        <p:nvSpPr>
+          <p:cNvPr id="4" name="TextBox 3"/>
+          <p:cNvSpPr txBox="1"/>
+          <p:nvPr/>
+        </p:nvSpPr>
+        <p:spPr>
+          <a:xfrm>
+            <a:off x="1042416" y="228600"/>
+            <a:ext cx="5120640" cy="185166"/>
+          </a:xfrm>
+          <a:prstGeom prst="rect">
+            <a:avLst/>
+          </a:prstGeom>
+          <a:noFill/>
+        </p:spPr>
+        <p:txBody>
+          <a:bodyPr wrap="square" anchor="t" lIns="0" rIns="0" tIns="0" bIns="0">
+            <a:spAutoFit/>
+          </a:bodyPr>
+          <a:lstStyle/>
+          <a:p>
+            <a:pPr algn="l"/>
+            <a:r>
+              <a:rPr sz="900" b="1" i="0">
+                <a:solidFill>
+                  <a:srgbClr val="1A0F5C"/>
+                </a:solidFill>
+                <a:latin typeface="Calibri"/>
+              </a:rPr>
+              <a:t>Indian Institute of Technology Gandhinagar</a:t>
+            </a:r>
+          </a:p>
+        </p:txBody>
+      </p:sp>
+      <p:sp>
+        <p:nvSpPr>
+          <p:cNvPr id="5" name="TextBox 4"/>
+          <p:cNvSpPr txBox="1"/>
+          <p:nvPr/>
+        </p:nvSpPr>
+        <p:spPr>
+          <a:xfrm>
+            <a:off x="1042416" y="420623"/>
+            <a:ext cx="5852160" cy="127381"/>
+          </a:xfrm>
+          <a:prstGeom prst="rect">
+            <a:avLst/>
+          </a:prstGeom>
+          <a:noFill/>
+        </p:spPr>
+        <p:txBody>
+          <a:bodyPr wrap="square" anchor="t" lIns="0" rIns="0" tIns="0" bIns="0">
+            <a:spAutoFit/>
+          </a:bodyPr>
+          <a:lstStyle/>
+          <a:p>
+            <a:pPr algn="l"/>
+            <a:r>
+              <a:rPr sz="550" b="1" i="0" spc="300">
+                <a:solidFill>
+                  <a:srgbClr val="6B6690"/>
+                </a:solidFill>
+                <a:latin typeface="Calibri"/>
+              </a:rPr>
+              <a:t>ADMINISTERED THROUGH THE COMPETENCY ADVANCEMENT ACADEMY</a:t>
+            </a:r>
+          </a:p>
+        </p:txBody>
+      </p:sp>
+      <p:sp>
+        <p:nvSpPr>
+          <p:cNvPr id="6" name="TextBox 5"/>
+          <p:cNvSpPr txBox="1"/>
+          <p:nvPr/>
+        </p:nvSpPr>
+        <p:spPr>
+          <a:xfrm>
+            <a:off x="5992063" y="310896"/>
+            <a:ext cx="5669280" cy="127381"/>
+          </a:xfrm>
+          <a:prstGeom prst="rect">
+            <a:avLst/>
+          </a:prstGeom>
+          <a:noFill/>
+        </p:spPr>
+        <p:txBody>
+          <a:bodyPr wrap="square" anchor="t" lIns="0" rIns="0" tIns="0" bIns="0">
+            <a:spAutoFit/>
+          </a:bodyPr>
+          <a:lstStyle/>
+          <a:p>
+            <a:pPr algn="r"/>
+            <a:r>
+              <a:rPr sz="550" b="1" i="0" spc="300">
+                <a:solidFill>
+                  <a:srgbClr val="6B6690"/>
+                </a:solidFill>
+                <a:latin typeface="Calibri"/>
+              </a:rPr>
+              <a:t>WEEK 2  ·  DAY 3  ·  KALPA GLOBAL CAPABILITY CENTRE</a:t>
+            </a:r>
+          </a:p>
+        </p:txBody>
+      </p:sp>
+      <p:sp>
+        <p:nvSpPr>
+          <p:cNvPr id="7" name="TextBox 6"/>
+          <p:cNvSpPr txBox="1"/>
+          <p:nvPr/>
+        </p:nvSpPr>
+        <p:spPr>
+          <a:xfrm>
+            <a:off x="530352" y="676656"/>
+            <a:ext cx="10033711" cy="512064"/>
+          </a:xfrm>
+          <a:prstGeom prst="rect">
+            <a:avLst/>
+          </a:prstGeom>
+          <a:noFill/>
+        </p:spPr>
+        <p:txBody>
+          <a:bodyPr wrap="square" anchor="b" lIns="0" rIns="0" tIns="0" bIns="0">
+            <a:spAutoFit/>
+          </a:bodyPr>
+          <a:lstStyle/>
+          <a:p>
+            <a:pPr algn="l"/>
+            <a:r>
+              <a:rPr sz="2600" b="0" i="0">
+                <a:solidFill>
+                  <a:srgbClr val="1A0F5C"/>
+                </a:solidFill>
+                <a:latin typeface="Georgia"/>
+              </a:rPr>
               <a:t>The second case, for the take-home: Retail-Core</a:t>
             </a:r>
           </a:p>
@@ -24164,7 +24986,7 @@
       </p:sp>
       <p:pic>
         <p:nvPicPr>
-          <p:cNvPr id="15" name="mermaid diagram" descr="74b5f738e2ac4f9c.png"/>
+          <p:cNvPr id="15" name="mermaid diagram" descr="f626be52d68ee89f.png"/>
           <p:cNvPicPr>
             <a:picLocks noChangeAspect="1"/>
           </p:cNvPicPr>
@@ -24178,8 +25000,8 @@
         </p:blipFill>
         <p:spPr>
           <a:xfrm>
-            <a:off x="780897" y="3502152"/>
-            <a:ext cx="10629900" cy="1600200"/>
+            <a:off x="530352" y="3502152"/>
+            <a:ext cx="11130991" cy="858395"/>
           </a:xfrm>
           <a:prstGeom prst="rect">
             <a:avLst/>
@@ -24453,7 +25275,7 @@
                 </a:solidFill>
                 <a:latin typeface="Calibri"/>
               </a:rPr>
-              <a:t>D23  ·  27 / 29</a:t>
+              <a:t>D24  ·  28 / 30</a:t>
             </a:r>
           </a:p>
         </p:txBody>
@@ -24466,7 +25288,7 @@
 </p:sld>
 </file>
 
-<file path=ppt/slides/slide28.xml><?xml version="1.0" encoding="utf-8"?>
+<file path=ppt/slides/slide29.xml><?xml version="1.0" encoding="utf-8"?>
 <p:sld xmlns:a="http://schemas.openxmlformats.org/drawingml/2006/main" xmlns:p="http://schemas.openxmlformats.org/presentationml/2006/main" xmlns:r="http://schemas.openxmlformats.org/officeDocument/2006/relationships">
   <p:cSld>
     <p:spTree>
@@ -25524,741 +26346,7 @@
                 </a:solidFill>
                 <a:latin typeface="Calibri"/>
               </a:rPr>
-              <a:t>D24  ·  28 / 29</a:t>
-            </a:r>
-          </a:p>
-        </p:txBody>
-      </p:sp>
-    </p:spTree>
-  </p:cSld>
-  <p:clrMapOvr>
-    <a:masterClrMapping/>
-  </p:clrMapOvr>
-</p:sld>
-</file>
-
-<file path=ppt/slides/slide29.xml><?xml version="1.0" encoding="utf-8"?>
-<p:sld xmlns:a="http://schemas.openxmlformats.org/drawingml/2006/main" xmlns:p="http://schemas.openxmlformats.org/presentationml/2006/main" xmlns:r="http://schemas.openxmlformats.org/officeDocument/2006/relationships">
-  <p:cSld>
-    <p:spTree>
-      <p:nvGrpSpPr>
-        <p:cNvPr id="1" name=""/>
-        <p:cNvGrpSpPr/>
-        <p:nvPr/>
-      </p:nvGrpSpPr>
-      <p:grpSpPr/>
-      <p:pic>
-        <p:nvPicPr>
-          <p:cNvPr id="2" name="Picture 1" descr="bg_light.jpg"/>
-          <p:cNvPicPr>
-            <a:picLocks noChangeAspect="1"/>
-          </p:cNvPicPr>
-          <p:nvPr/>
-        </p:nvPicPr>
-        <p:blipFill>
-          <a:blip r:embed="rId2"/>
-          <a:stretch>
-            <a:fillRect/>
-          </a:stretch>
-        </p:blipFill>
-        <p:spPr>
-          <a:xfrm>
-            <a:off x="0" y="0"/>
-            <a:ext cx="12191695" cy="6858000"/>
-          </a:xfrm>
-          <a:prstGeom prst="rect">
-            <a:avLst/>
-          </a:prstGeom>
-        </p:spPr>
-      </p:pic>
-      <p:pic>
-        <p:nvPicPr>
-          <p:cNvPr id="3" name="Picture 2" descr="iitgn_logo.png"/>
-          <p:cNvPicPr>
-            <a:picLocks noChangeAspect="1"/>
-          </p:cNvPicPr>
-          <p:nvPr/>
-        </p:nvPicPr>
-        <p:blipFill>
-          <a:blip r:embed="rId3"/>
-          <a:stretch>
-            <a:fillRect/>
-          </a:stretch>
-        </p:blipFill>
-        <p:spPr>
-          <a:xfrm>
-            <a:off x="530352" y="201168"/>
-            <a:ext cx="420624" cy="420624"/>
-          </a:xfrm>
-          <a:prstGeom prst="rect">
-            <a:avLst/>
-          </a:prstGeom>
-        </p:spPr>
-      </p:pic>
-      <p:sp>
-        <p:nvSpPr>
-          <p:cNvPr id="4" name="TextBox 3"/>
-          <p:cNvSpPr txBox="1"/>
-          <p:nvPr/>
-        </p:nvSpPr>
-        <p:spPr>
-          <a:xfrm>
-            <a:off x="1042416" y="228600"/>
-            <a:ext cx="5120640" cy="185166"/>
-          </a:xfrm>
-          <a:prstGeom prst="rect">
-            <a:avLst/>
-          </a:prstGeom>
-          <a:noFill/>
-        </p:spPr>
-        <p:txBody>
-          <a:bodyPr wrap="square" anchor="t" lIns="0" rIns="0" tIns="0" bIns="0">
-            <a:spAutoFit/>
-          </a:bodyPr>
-          <a:lstStyle/>
-          <a:p>
-            <a:pPr algn="l"/>
-            <a:r>
-              <a:rPr sz="900" b="1" i="0">
-                <a:solidFill>
-                  <a:srgbClr val="1A0F5C"/>
-                </a:solidFill>
-                <a:latin typeface="Calibri"/>
-              </a:rPr>
-              <a:t>Indian Institute of Technology Gandhinagar</a:t>
-            </a:r>
-          </a:p>
-        </p:txBody>
-      </p:sp>
-      <p:sp>
-        <p:nvSpPr>
-          <p:cNvPr id="5" name="TextBox 4"/>
-          <p:cNvSpPr txBox="1"/>
-          <p:nvPr/>
-        </p:nvSpPr>
-        <p:spPr>
-          <a:xfrm>
-            <a:off x="1042416" y="420623"/>
-            <a:ext cx="5852160" cy="127381"/>
-          </a:xfrm>
-          <a:prstGeom prst="rect">
-            <a:avLst/>
-          </a:prstGeom>
-          <a:noFill/>
-        </p:spPr>
-        <p:txBody>
-          <a:bodyPr wrap="square" anchor="t" lIns="0" rIns="0" tIns="0" bIns="0">
-            <a:spAutoFit/>
-          </a:bodyPr>
-          <a:lstStyle/>
-          <a:p>
-            <a:pPr algn="l"/>
-            <a:r>
-              <a:rPr sz="550" b="1" i="0" spc="300">
-                <a:solidFill>
-                  <a:srgbClr val="6B6690"/>
-                </a:solidFill>
-                <a:latin typeface="Calibri"/>
-              </a:rPr>
-              <a:t>ADMINISTERED THROUGH THE COMPETENCY ADVANCEMENT ACADEMY</a:t>
-            </a:r>
-          </a:p>
-        </p:txBody>
-      </p:sp>
-      <p:sp>
-        <p:nvSpPr>
-          <p:cNvPr id="6" name="TextBox 5"/>
-          <p:cNvSpPr txBox="1"/>
-          <p:nvPr/>
-        </p:nvSpPr>
-        <p:spPr>
-          <a:xfrm>
-            <a:off x="5992063" y="310896"/>
-            <a:ext cx="5669280" cy="127381"/>
-          </a:xfrm>
-          <a:prstGeom prst="rect">
-            <a:avLst/>
-          </a:prstGeom>
-          <a:noFill/>
-        </p:spPr>
-        <p:txBody>
-          <a:bodyPr wrap="square" anchor="t" lIns="0" rIns="0" tIns="0" bIns="0">
-            <a:spAutoFit/>
-          </a:bodyPr>
-          <a:lstStyle/>
-          <a:p>
-            <a:pPr algn="r"/>
-            <a:r>
-              <a:rPr sz="550" b="1" i="0" spc="300">
-                <a:solidFill>
-                  <a:srgbClr val="6B6690"/>
-                </a:solidFill>
-                <a:latin typeface="Calibri"/>
-              </a:rPr>
-              <a:t>WEEK 2  ·  DAY 3  ·  KALPA GLOBAL CAPABILITY CENTRE</a:t>
-            </a:r>
-          </a:p>
-        </p:txBody>
-      </p:sp>
-      <p:sp>
-        <p:nvSpPr>
-          <p:cNvPr id="7" name="TextBox 6"/>
-          <p:cNvSpPr txBox="1"/>
-          <p:nvPr/>
-        </p:nvSpPr>
-        <p:spPr>
-          <a:xfrm>
-            <a:off x="530352" y="676656"/>
-            <a:ext cx="11130991" cy="512064"/>
-          </a:xfrm>
-          <a:prstGeom prst="rect">
-            <a:avLst/>
-          </a:prstGeom>
-          <a:noFill/>
-        </p:spPr>
-        <p:txBody>
-          <a:bodyPr wrap="square" anchor="b" lIns="0" rIns="0" tIns="0" bIns="0">
-            <a:spAutoFit/>
-          </a:bodyPr>
-          <a:lstStyle/>
-          <a:p>
-            <a:pPr algn="l"/>
-            <a:r>
-              <a:rPr sz="2600" b="0" i="0">
-                <a:solidFill>
-                  <a:srgbClr val="1A0F5C"/>
-                </a:solidFill>
-                <a:latin typeface="Georgia"/>
-              </a:rPr>
-              <a:t>Tomorrow: one table per customer, left open</a:t>
-            </a:r>
-          </a:p>
-        </p:txBody>
-      </p:sp>
-      <p:sp>
-        <p:nvSpPr>
-          <p:cNvPr id="8" name="TextBox 7"/>
-          <p:cNvSpPr txBox="1"/>
-          <p:nvPr/>
-        </p:nvSpPr>
-        <p:spPr>
-          <a:xfrm>
-            <a:off x="530352" y="1243584"/>
-            <a:ext cx="11130991" cy="234696"/>
-          </a:xfrm>
-          <a:prstGeom prst="rect">
-            <a:avLst/>
-          </a:prstGeom>
-          <a:noFill/>
-        </p:spPr>
-        <p:txBody>
-          <a:bodyPr wrap="square" anchor="t" lIns="0" rIns="0" tIns="0" bIns="0">
-            <a:spAutoFit/>
-          </a:bodyPr>
-          <a:lstStyle/>
-          <a:p>
-            <a:pPr algn="l"/>
-            <a:r>
-              <a:rPr sz="1200" b="0" i="0">
-                <a:solidFill>
-                  <a:srgbClr val="6B6690"/>
-                </a:solidFill>
-                <a:latin typeface="Calibri"/>
-              </a:rPr>
-              <a:t>The growth team asks the next question: what does Marketing's own table look like?</a:t>
-            </a:r>
-          </a:p>
-        </p:txBody>
-      </p:sp>
-      <p:sp>
-        <p:nvSpPr>
-          <p:cNvPr id="9" name="Rounded Rectangle 8"/>
-          <p:cNvSpPr/>
-          <p:nvPr/>
-        </p:nvSpPr>
-        <p:spPr>
-          <a:xfrm>
-            <a:off x="530352" y="1956816"/>
-            <a:ext cx="11130991" cy="1121664"/>
-          </a:xfrm>
-          <a:prstGeom prst="roundRect">
-            <a:avLst>
-              <a:gd name="adj" fmla="val 5000"/>
-            </a:avLst>
-          </a:prstGeom>
-          <a:gradFill rotWithShape="1">
-            <a:gsLst>
-              <a:gs pos="0">
-                <a:srgbClr val="2C1A86"/>
-              </a:gs>
-              <a:gs pos="100000">
-                <a:srgbClr val="1A0F5C"/>
-              </a:gs>
-            </a:gsLst>
-            <a:lin scaled="0" ang="16200000"/>
-          </a:gradFill>
-          <a:ln>
-            <a:noFill/>
-          </a:ln>
-          <a:effectLst>
-            <a:outerShdw blurRad="76200" dist="19050" dir="5400000" algn="bl" rotWithShape="0">
-              <a:srgbClr val="1A0F5C">
-                <a:alpha val="12000"/>
-              </a:srgbClr>
-            </a:outerShdw>
-          </a:effectLst>
-        </p:spPr>
-        <p:style>
-          <a:lnRef idx="1">
-            <a:schemeClr val="accent1"/>
-          </a:lnRef>
-          <a:fillRef idx="3">
-            <a:schemeClr val="accent1"/>
-          </a:fillRef>
-          <a:effectRef idx="2">
-            <a:schemeClr val="accent1"/>
-          </a:effectRef>
-          <a:fontRef idx="minor">
-            <a:schemeClr val="lt1"/>
-          </a:fontRef>
-        </p:style>
-        <p:txBody>
-          <a:bodyPr rtlCol="0" anchor="ctr" wrap="square"/>
-          <a:lstStyle/>
-          <a:p>
-            <a:pPr algn="ctr"/>
-          </a:p>
-        </p:txBody>
-      </p:sp>
-      <p:sp>
-        <p:nvSpPr>
-          <p:cNvPr id="10" name="Oval 9"/>
-          <p:cNvSpPr/>
-          <p:nvPr/>
-        </p:nvSpPr>
-        <p:spPr>
-          <a:xfrm>
-            <a:off x="758952" y="2289048"/>
-            <a:ext cx="457200" cy="457200"/>
-          </a:xfrm>
-          <a:prstGeom prst="ellipse">
-            <a:avLst/>
-          </a:prstGeom>
-          <a:solidFill>
-            <a:srgbClr val="5B3FD6"/>
-          </a:solidFill>
-          <a:ln>
-            <a:noFill/>
-          </a:ln>
-          <a:effectLst/>
-        </p:spPr>
-        <p:style>
-          <a:lnRef idx="1">
-            <a:schemeClr val="accent1"/>
-          </a:lnRef>
-          <a:fillRef idx="3">
-            <a:schemeClr val="accent1"/>
-          </a:fillRef>
-          <a:effectRef idx="2">
-            <a:schemeClr val="accent1"/>
-          </a:effectRef>
-          <a:fontRef idx="minor">
-            <a:schemeClr val="lt1"/>
-          </a:fontRef>
-        </p:style>
-        <p:txBody>
-          <a:bodyPr rtlCol="0" anchor="ctr" wrap="square"/>
-          <a:lstStyle/>
-          <a:p>
-            <a:pPr algn="ctr"/>
-          </a:p>
-        </p:txBody>
-      </p:sp>
-      <p:pic>
-        <p:nvPicPr>
-          <p:cNvPr id="11" name="Picture 10" descr="message-square_028dbd132a0a.png"/>
-          <p:cNvPicPr>
-            <a:picLocks noChangeAspect="1"/>
-          </p:cNvPicPr>
-          <p:nvPr/>
-        </p:nvPicPr>
-        <p:blipFill>
-          <a:blip r:embed="rId4"/>
-          <a:stretch>
-            <a:fillRect/>
-          </a:stretch>
-        </p:blipFill>
-        <p:spPr>
-          <a:xfrm>
-            <a:off x="868680" y="2398776"/>
-            <a:ext cx="237744" cy="237744"/>
-          </a:xfrm>
-          <a:prstGeom prst="rect">
-            <a:avLst/>
-          </a:prstGeom>
-        </p:spPr>
-      </p:pic>
-      <p:sp>
-        <p:nvSpPr>
-          <p:cNvPr id="12" name="TextBox 11"/>
-          <p:cNvSpPr txBox="1"/>
-          <p:nvPr/>
-        </p:nvSpPr>
-        <p:spPr>
-          <a:xfrm>
-            <a:off x="1399031" y="2103120"/>
-            <a:ext cx="9987991" cy="160401"/>
-          </a:xfrm>
-          <a:prstGeom prst="rect">
-            <a:avLst/>
-          </a:prstGeom>
-          <a:noFill/>
-        </p:spPr>
-        <p:txBody>
-          <a:bodyPr wrap="square" anchor="t" lIns="0" rIns="0" tIns="0" bIns="0">
-            <a:spAutoFit/>
-          </a:bodyPr>
-          <a:lstStyle/>
-          <a:p>
-            <a:pPr algn="l"/>
-            <a:r>
-              <a:rPr sz="750" b="1" i="0" spc="250">
-                <a:solidFill>
-                  <a:srgbClr val="D9A7FF"/>
-                </a:solidFill>
-                <a:latin typeface="Calibri"/>
-              </a:rPr>
-              <a:t>THE CLIENT ASKS</a:t>
-            </a:r>
-          </a:p>
-        </p:txBody>
-      </p:sp>
-      <p:sp>
-        <p:nvSpPr>
-          <p:cNvPr id="13" name="TextBox 12"/>
-          <p:cNvSpPr txBox="1"/>
-          <p:nvPr/>
-        </p:nvSpPr>
-        <p:spPr>
-          <a:xfrm>
-            <a:off x="1399031" y="2322576"/>
-            <a:ext cx="9987991" cy="682752"/>
-          </a:xfrm>
-          <a:prstGeom prst="rect">
-            <a:avLst/>
-          </a:prstGeom>
-          <a:noFill/>
-        </p:spPr>
-        <p:txBody>
-          <a:bodyPr wrap="square" anchor="t" lIns="0" rIns="0" tIns="0" bIns="0">
-            <a:spAutoFit/>
-          </a:bodyPr>
-          <a:lstStyle/>
-          <a:p>
-            <a:r>
-              <a:rPr sz="1500" b="0" i="0">
-                <a:solidFill>
-                  <a:srgbClr val="FFFFFF"/>
-                </a:solidFill>
-                <a:latin typeface="Calibri"/>
-              </a:rPr>
-              <a:t>"We want one table with one row per customer, refreshed every Monday: how recently they bought, how often, how much, their segment, whether the monsoon sale reached them, and last week's flags."</a:t>
-            </a:r>
-          </a:p>
-        </p:txBody>
-      </p:sp>
-      <p:pic>
-        <p:nvPicPr>
-          <p:cNvPr id="14" name="mermaid diagram" descr="7c7d2ba252e30238.png"/>
-          <p:cNvPicPr>
-            <a:picLocks noChangeAspect="1"/>
-          </p:cNvPicPr>
-          <p:nvPr/>
-        </p:nvPicPr>
-        <p:blipFill>
-          <a:blip r:embed="rId6"/>
-          <a:stretch>
-            <a:fillRect/>
-          </a:stretch>
-        </p:blipFill>
-        <p:spPr>
-          <a:xfrm>
-            <a:off x="2152497" y="3243072"/>
-            <a:ext cx="7886700" cy="1857375"/>
-          </a:xfrm>
-          <a:prstGeom prst="rect">
-            <a:avLst/>
-          </a:prstGeom>
-        </p:spPr>
-      </p:pic>
-      <p:sp>
-        <p:nvSpPr>
-          <p:cNvPr id="15" name="Oval 14"/>
-          <p:cNvSpPr/>
-          <p:nvPr/>
-        </p:nvSpPr>
-        <p:spPr>
-          <a:xfrm>
-            <a:off x="530352" y="6492240"/>
-            <a:ext cx="64008" cy="64008"/>
-          </a:xfrm>
-          <a:prstGeom prst="ellipse">
-            <a:avLst/>
-          </a:prstGeom>
-          <a:solidFill>
-            <a:srgbClr val="CFC9EE"/>
-          </a:solidFill>
-          <a:ln>
-            <a:noFill/>
-          </a:ln>
-          <a:effectLst/>
-        </p:spPr>
-        <p:style>
-          <a:lnRef idx="1">
-            <a:schemeClr val="accent1"/>
-          </a:lnRef>
-          <a:fillRef idx="3">
-            <a:schemeClr val="accent1"/>
-          </a:fillRef>
-          <a:effectRef idx="2">
-            <a:schemeClr val="accent1"/>
-          </a:effectRef>
-          <a:fontRef idx="minor">
-            <a:schemeClr val="lt1"/>
-          </a:fontRef>
-        </p:style>
-        <p:txBody>
-          <a:bodyPr rtlCol="0" anchor="ctr" wrap="square"/>
-          <a:lstStyle/>
-          <a:p>
-            <a:pPr algn="ctr"/>
-          </a:p>
-        </p:txBody>
-      </p:sp>
-      <p:sp>
-        <p:nvSpPr>
-          <p:cNvPr id="16" name="TextBox 15"/>
-          <p:cNvSpPr txBox="1"/>
-          <p:nvPr/>
-        </p:nvSpPr>
-        <p:spPr>
-          <a:xfrm>
-            <a:off x="640080" y="6437376"/>
-            <a:ext cx="1378457" cy="152146"/>
-          </a:xfrm>
-          <a:prstGeom prst="rect">
-            <a:avLst/>
-          </a:prstGeom>
-          <a:noFill/>
-        </p:spPr>
-        <p:txBody>
-          <a:bodyPr wrap="square" anchor="t" lIns="0" rIns="0" tIns="0" bIns="0">
-            <a:spAutoFit/>
-          </a:bodyPr>
-          <a:lstStyle/>
-          <a:p>
-            <a:pPr algn="l"/>
-            <a:r>
-              <a:rPr sz="700" b="0" i="0">
-                <a:solidFill>
-                  <a:srgbClr val="6B6690"/>
-                </a:solidFill>
-                <a:latin typeface="Calibri"/>
-              </a:rPr>
-              <a:t>Who does Marketing call?</a:t>
-            </a:r>
-          </a:p>
-        </p:txBody>
-      </p:sp>
-      <p:sp>
-        <p:nvSpPr>
-          <p:cNvPr id="17" name="Oval 16"/>
-          <p:cNvSpPr/>
-          <p:nvPr/>
-        </p:nvSpPr>
-        <p:spPr>
-          <a:xfrm>
-            <a:off x="2109977" y="6492240"/>
-            <a:ext cx="64008" cy="64008"/>
-          </a:xfrm>
-          <a:prstGeom prst="ellipse">
-            <a:avLst/>
-          </a:prstGeom>
-          <a:solidFill>
-            <a:srgbClr val="CFC9EE"/>
-          </a:solidFill>
-          <a:ln>
-            <a:noFill/>
-          </a:ln>
-          <a:effectLst/>
-        </p:spPr>
-        <p:style>
-          <a:lnRef idx="1">
-            <a:schemeClr val="accent1"/>
-          </a:lnRef>
-          <a:fillRef idx="3">
-            <a:schemeClr val="accent1"/>
-          </a:fillRef>
-          <a:effectRef idx="2">
-            <a:schemeClr val="accent1"/>
-          </a:effectRef>
-          <a:fontRef idx="minor">
-            <a:schemeClr val="lt1"/>
-          </a:fontRef>
-        </p:style>
-        <p:txBody>
-          <a:bodyPr rtlCol="0" anchor="ctr" wrap="square"/>
-          <a:lstStyle/>
-          <a:p>
-            <a:pPr algn="ctr"/>
-          </a:p>
-        </p:txBody>
-      </p:sp>
-      <p:sp>
-        <p:nvSpPr>
-          <p:cNvPr id="18" name="TextBox 17"/>
-          <p:cNvSpPr txBox="1"/>
-          <p:nvPr/>
-        </p:nvSpPr>
-        <p:spPr>
-          <a:xfrm>
-            <a:off x="2219706" y="6437376"/>
-            <a:ext cx="1194435" cy="152146"/>
-          </a:xfrm>
-          <a:prstGeom prst="rect">
-            <a:avLst/>
-          </a:prstGeom>
-          <a:noFill/>
-        </p:spPr>
-        <p:txBody>
-          <a:bodyPr wrap="square" anchor="t" lIns="0" rIns="0" tIns="0" bIns="0">
-            <a:spAutoFit/>
-          </a:bodyPr>
-          <a:lstStyle/>
-          <a:p>
-            <a:pPr algn="l"/>
-            <a:r>
-              <a:rPr sz="700" b="0" i="0">
-                <a:solidFill>
-                  <a:srgbClr val="6B6690"/>
-                </a:solidFill>
-                <a:latin typeface="Calibri"/>
-              </a:rPr>
-              <a:t>Can you do it alone?</a:t>
-            </a:r>
-          </a:p>
-        </p:txBody>
-      </p:sp>
-      <p:sp>
-        <p:nvSpPr>
-          <p:cNvPr id="19" name="Oval 18"/>
-          <p:cNvSpPr/>
-          <p:nvPr/>
-        </p:nvSpPr>
-        <p:spPr>
-          <a:xfrm>
-            <a:off x="3505580" y="6492240"/>
-            <a:ext cx="64008" cy="64008"/>
-          </a:xfrm>
-          <a:prstGeom prst="ellipse">
-            <a:avLst/>
-          </a:prstGeom>
-          <a:solidFill>
-            <a:srgbClr val="5B3FD6"/>
-          </a:solidFill>
-          <a:ln>
-            <a:noFill/>
-          </a:ln>
-          <a:effectLst/>
-        </p:spPr>
-        <p:style>
-          <a:lnRef idx="1">
-            <a:schemeClr val="accent1"/>
-          </a:lnRef>
-          <a:fillRef idx="3">
-            <a:schemeClr val="accent1"/>
-          </a:fillRef>
-          <a:effectRef idx="2">
-            <a:schemeClr val="accent1"/>
-          </a:effectRef>
-          <a:fontRef idx="minor">
-            <a:schemeClr val="lt1"/>
-          </a:fontRef>
-        </p:style>
-        <p:txBody>
-          <a:bodyPr rtlCol="0" anchor="ctr" wrap="square"/>
-          <a:lstStyle/>
-          <a:p>
-            <a:pPr algn="ctr"/>
-          </a:p>
-        </p:txBody>
-      </p:sp>
-      <p:sp>
-        <p:nvSpPr>
-          <p:cNvPr id="20" name="TextBox 19"/>
-          <p:cNvSpPr txBox="1"/>
-          <p:nvPr/>
-        </p:nvSpPr>
-        <p:spPr>
-          <a:xfrm>
-            <a:off x="3615308" y="6437376"/>
-            <a:ext cx="1470469" cy="152146"/>
-          </a:xfrm>
-          <a:prstGeom prst="rect">
-            <a:avLst/>
-          </a:prstGeom>
-          <a:noFill/>
-        </p:spPr>
-        <p:txBody>
-          <a:bodyPr wrap="square" anchor="t" lIns="0" rIns="0" tIns="0" bIns="0">
-            <a:spAutoFit/>
-          </a:bodyPr>
-          <a:lstStyle/>
-          <a:p>
-            <a:pPr algn="l"/>
-            <a:r>
-              <a:rPr sz="700" b="1" i="0">
-                <a:solidFill>
-                  <a:srgbClr val="5B3FD6"/>
-                </a:solidFill>
-                <a:latin typeface="Calibri"/>
-              </a:rPr>
-              <a:t>What do we tell Marketing?</a:t>
-            </a:r>
-          </a:p>
-        </p:txBody>
-      </p:sp>
-      <p:sp>
-        <p:nvSpPr>
-          <p:cNvPr id="21" name="TextBox 20"/>
-          <p:cNvSpPr txBox="1"/>
-          <p:nvPr/>
-        </p:nvSpPr>
-        <p:spPr>
-          <a:xfrm>
-            <a:off x="10198303" y="6437376"/>
-            <a:ext cx="1463040" cy="160401"/>
-          </a:xfrm>
-          <a:prstGeom prst="rect">
-            <a:avLst/>
-          </a:prstGeom>
-          <a:noFill/>
-        </p:spPr>
-        <p:txBody>
-          <a:bodyPr wrap="square" anchor="t" lIns="0" rIns="0" tIns="0" bIns="0">
-            <a:spAutoFit/>
-          </a:bodyPr>
-          <a:lstStyle/>
-          <a:p>
-            <a:pPr algn="r"/>
-            <a:r>
-              <a:rPr sz="750" b="0" i="0">
-                <a:solidFill>
-                  <a:srgbClr val="6B6690"/>
-                </a:solidFill>
-                <a:latin typeface="Calibri"/>
-              </a:rPr>
-              <a:t>S25  ·  29 / 29</a:t>
+              <a:t>D25  ·  29 / 30</a:t>
             </a:r>
           </a:p>
         </p:txBody>
@@ -26534,7 +26622,7 @@
                 </a:solidFill>
                 <a:latin typeface="Calibri"/>
               </a:rPr>
-              <a:t>Which listed members does Marketing call first, and does each flag hold up when a member says he was on holiday?</a:t>
+              <a:t>Which listed members does Marketing call first, and does each flag hold up when a member says they were on holiday?</a:t>
             </a:r>
           </a:p>
         </p:txBody>
@@ -26769,7 +26857,741 @@
                 </a:solidFill>
                 <a:latin typeface="Calibri"/>
               </a:rPr>
-              <a:t>3 / 29</a:t>
+              <a:t>3 / 30</a:t>
+            </a:r>
+          </a:p>
+        </p:txBody>
+      </p:sp>
+    </p:spTree>
+  </p:cSld>
+  <p:clrMapOvr>
+    <a:masterClrMapping/>
+  </p:clrMapOvr>
+</p:sld>
+</file>
+
+<file path=ppt/slides/slide30.xml><?xml version="1.0" encoding="utf-8"?>
+<p:sld xmlns:a="http://schemas.openxmlformats.org/drawingml/2006/main" xmlns:p="http://schemas.openxmlformats.org/presentationml/2006/main" xmlns:r="http://schemas.openxmlformats.org/officeDocument/2006/relationships">
+  <p:cSld>
+    <p:spTree>
+      <p:nvGrpSpPr>
+        <p:cNvPr id="1" name=""/>
+        <p:cNvGrpSpPr/>
+        <p:nvPr/>
+      </p:nvGrpSpPr>
+      <p:grpSpPr/>
+      <p:pic>
+        <p:nvPicPr>
+          <p:cNvPr id="2" name="Picture 1" descr="bg_light.jpg"/>
+          <p:cNvPicPr>
+            <a:picLocks noChangeAspect="1"/>
+          </p:cNvPicPr>
+          <p:nvPr/>
+        </p:nvPicPr>
+        <p:blipFill>
+          <a:blip r:embed="rId2"/>
+          <a:stretch>
+            <a:fillRect/>
+          </a:stretch>
+        </p:blipFill>
+        <p:spPr>
+          <a:xfrm>
+            <a:off x="0" y="0"/>
+            <a:ext cx="12191695" cy="6858000"/>
+          </a:xfrm>
+          <a:prstGeom prst="rect">
+            <a:avLst/>
+          </a:prstGeom>
+        </p:spPr>
+      </p:pic>
+      <p:pic>
+        <p:nvPicPr>
+          <p:cNvPr id="3" name="Picture 2" descr="iitgn_logo.png"/>
+          <p:cNvPicPr>
+            <a:picLocks noChangeAspect="1"/>
+          </p:cNvPicPr>
+          <p:nvPr/>
+        </p:nvPicPr>
+        <p:blipFill>
+          <a:blip r:embed="rId3"/>
+          <a:stretch>
+            <a:fillRect/>
+          </a:stretch>
+        </p:blipFill>
+        <p:spPr>
+          <a:xfrm>
+            <a:off x="530352" y="201168"/>
+            <a:ext cx="420624" cy="420624"/>
+          </a:xfrm>
+          <a:prstGeom prst="rect">
+            <a:avLst/>
+          </a:prstGeom>
+        </p:spPr>
+      </p:pic>
+      <p:sp>
+        <p:nvSpPr>
+          <p:cNvPr id="4" name="TextBox 3"/>
+          <p:cNvSpPr txBox="1"/>
+          <p:nvPr/>
+        </p:nvSpPr>
+        <p:spPr>
+          <a:xfrm>
+            <a:off x="1042416" y="228600"/>
+            <a:ext cx="5120640" cy="185166"/>
+          </a:xfrm>
+          <a:prstGeom prst="rect">
+            <a:avLst/>
+          </a:prstGeom>
+          <a:noFill/>
+        </p:spPr>
+        <p:txBody>
+          <a:bodyPr wrap="square" anchor="t" lIns="0" rIns="0" tIns="0" bIns="0">
+            <a:spAutoFit/>
+          </a:bodyPr>
+          <a:lstStyle/>
+          <a:p>
+            <a:pPr algn="l"/>
+            <a:r>
+              <a:rPr sz="900" b="1" i="0">
+                <a:solidFill>
+                  <a:srgbClr val="1A0F5C"/>
+                </a:solidFill>
+                <a:latin typeface="Calibri"/>
+              </a:rPr>
+              <a:t>Indian Institute of Technology Gandhinagar</a:t>
+            </a:r>
+          </a:p>
+        </p:txBody>
+      </p:sp>
+      <p:sp>
+        <p:nvSpPr>
+          <p:cNvPr id="5" name="TextBox 4"/>
+          <p:cNvSpPr txBox="1"/>
+          <p:nvPr/>
+        </p:nvSpPr>
+        <p:spPr>
+          <a:xfrm>
+            <a:off x="1042416" y="420623"/>
+            <a:ext cx="5852160" cy="127381"/>
+          </a:xfrm>
+          <a:prstGeom prst="rect">
+            <a:avLst/>
+          </a:prstGeom>
+          <a:noFill/>
+        </p:spPr>
+        <p:txBody>
+          <a:bodyPr wrap="square" anchor="t" lIns="0" rIns="0" tIns="0" bIns="0">
+            <a:spAutoFit/>
+          </a:bodyPr>
+          <a:lstStyle/>
+          <a:p>
+            <a:pPr algn="l"/>
+            <a:r>
+              <a:rPr sz="550" b="1" i="0" spc="300">
+                <a:solidFill>
+                  <a:srgbClr val="6B6690"/>
+                </a:solidFill>
+                <a:latin typeface="Calibri"/>
+              </a:rPr>
+              <a:t>ADMINISTERED THROUGH THE COMPETENCY ADVANCEMENT ACADEMY</a:t>
+            </a:r>
+          </a:p>
+        </p:txBody>
+      </p:sp>
+      <p:sp>
+        <p:nvSpPr>
+          <p:cNvPr id="6" name="TextBox 5"/>
+          <p:cNvSpPr txBox="1"/>
+          <p:nvPr/>
+        </p:nvSpPr>
+        <p:spPr>
+          <a:xfrm>
+            <a:off x="5992063" y="310896"/>
+            <a:ext cx="5669280" cy="127381"/>
+          </a:xfrm>
+          <a:prstGeom prst="rect">
+            <a:avLst/>
+          </a:prstGeom>
+          <a:noFill/>
+        </p:spPr>
+        <p:txBody>
+          <a:bodyPr wrap="square" anchor="t" lIns="0" rIns="0" tIns="0" bIns="0">
+            <a:spAutoFit/>
+          </a:bodyPr>
+          <a:lstStyle/>
+          <a:p>
+            <a:pPr algn="r"/>
+            <a:r>
+              <a:rPr sz="550" b="1" i="0" spc="300">
+                <a:solidFill>
+                  <a:srgbClr val="6B6690"/>
+                </a:solidFill>
+                <a:latin typeface="Calibri"/>
+              </a:rPr>
+              <a:t>WEEK 2  ·  DAY 3  ·  KALPA GLOBAL CAPABILITY CENTRE</a:t>
+            </a:r>
+          </a:p>
+        </p:txBody>
+      </p:sp>
+      <p:sp>
+        <p:nvSpPr>
+          <p:cNvPr id="7" name="TextBox 6"/>
+          <p:cNvSpPr txBox="1"/>
+          <p:nvPr/>
+        </p:nvSpPr>
+        <p:spPr>
+          <a:xfrm>
+            <a:off x="530352" y="676656"/>
+            <a:ext cx="11130991" cy="512064"/>
+          </a:xfrm>
+          <a:prstGeom prst="rect">
+            <a:avLst/>
+          </a:prstGeom>
+          <a:noFill/>
+        </p:spPr>
+        <p:txBody>
+          <a:bodyPr wrap="square" anchor="b" lIns="0" rIns="0" tIns="0" bIns="0">
+            <a:spAutoFit/>
+          </a:bodyPr>
+          <a:lstStyle/>
+          <a:p>
+            <a:pPr algn="l"/>
+            <a:r>
+              <a:rPr sz="2600" b="0" i="0">
+                <a:solidFill>
+                  <a:srgbClr val="1A0F5C"/>
+                </a:solidFill>
+                <a:latin typeface="Georgia"/>
+              </a:rPr>
+              <a:t>Tomorrow: one table per customer, left open</a:t>
+            </a:r>
+          </a:p>
+        </p:txBody>
+      </p:sp>
+      <p:sp>
+        <p:nvSpPr>
+          <p:cNvPr id="8" name="TextBox 7"/>
+          <p:cNvSpPr txBox="1"/>
+          <p:nvPr/>
+        </p:nvSpPr>
+        <p:spPr>
+          <a:xfrm>
+            <a:off x="530352" y="1243584"/>
+            <a:ext cx="11130991" cy="234696"/>
+          </a:xfrm>
+          <a:prstGeom prst="rect">
+            <a:avLst/>
+          </a:prstGeom>
+          <a:noFill/>
+        </p:spPr>
+        <p:txBody>
+          <a:bodyPr wrap="square" anchor="t" lIns="0" rIns="0" tIns="0" bIns="0">
+            <a:spAutoFit/>
+          </a:bodyPr>
+          <a:lstStyle/>
+          <a:p>
+            <a:pPr algn="l"/>
+            <a:r>
+              <a:rPr sz="1200" b="0" i="0">
+                <a:solidFill>
+                  <a:srgbClr val="6B6690"/>
+                </a:solidFill>
+                <a:latin typeface="Calibri"/>
+              </a:rPr>
+              <a:t>The growth team asks the next question: what does Marketing's own table look like?</a:t>
+            </a:r>
+          </a:p>
+        </p:txBody>
+      </p:sp>
+      <p:sp>
+        <p:nvSpPr>
+          <p:cNvPr id="9" name="Rounded Rectangle 8"/>
+          <p:cNvSpPr/>
+          <p:nvPr/>
+        </p:nvSpPr>
+        <p:spPr>
+          <a:xfrm>
+            <a:off x="530352" y="1956816"/>
+            <a:ext cx="11130991" cy="1121664"/>
+          </a:xfrm>
+          <a:prstGeom prst="roundRect">
+            <a:avLst>
+              <a:gd name="adj" fmla="val 5000"/>
+            </a:avLst>
+          </a:prstGeom>
+          <a:gradFill rotWithShape="1">
+            <a:gsLst>
+              <a:gs pos="0">
+                <a:srgbClr val="2C1A86"/>
+              </a:gs>
+              <a:gs pos="100000">
+                <a:srgbClr val="1A0F5C"/>
+              </a:gs>
+            </a:gsLst>
+            <a:lin scaled="0" ang="16200000"/>
+          </a:gradFill>
+          <a:ln>
+            <a:noFill/>
+          </a:ln>
+          <a:effectLst>
+            <a:outerShdw blurRad="76200" dist="19050" dir="5400000" algn="bl" rotWithShape="0">
+              <a:srgbClr val="1A0F5C">
+                <a:alpha val="12000"/>
+              </a:srgbClr>
+            </a:outerShdw>
+          </a:effectLst>
+        </p:spPr>
+        <p:style>
+          <a:lnRef idx="1">
+            <a:schemeClr val="accent1"/>
+          </a:lnRef>
+          <a:fillRef idx="3">
+            <a:schemeClr val="accent1"/>
+          </a:fillRef>
+          <a:effectRef idx="2">
+            <a:schemeClr val="accent1"/>
+          </a:effectRef>
+          <a:fontRef idx="minor">
+            <a:schemeClr val="lt1"/>
+          </a:fontRef>
+        </p:style>
+        <p:txBody>
+          <a:bodyPr rtlCol="0" anchor="ctr" wrap="square"/>
+          <a:lstStyle/>
+          <a:p>
+            <a:pPr algn="ctr"/>
+          </a:p>
+        </p:txBody>
+      </p:sp>
+      <p:sp>
+        <p:nvSpPr>
+          <p:cNvPr id="10" name="Oval 9"/>
+          <p:cNvSpPr/>
+          <p:nvPr/>
+        </p:nvSpPr>
+        <p:spPr>
+          <a:xfrm>
+            <a:off x="758952" y="2289048"/>
+            <a:ext cx="457200" cy="457200"/>
+          </a:xfrm>
+          <a:prstGeom prst="ellipse">
+            <a:avLst/>
+          </a:prstGeom>
+          <a:solidFill>
+            <a:srgbClr val="5B3FD6"/>
+          </a:solidFill>
+          <a:ln>
+            <a:noFill/>
+          </a:ln>
+          <a:effectLst/>
+        </p:spPr>
+        <p:style>
+          <a:lnRef idx="1">
+            <a:schemeClr val="accent1"/>
+          </a:lnRef>
+          <a:fillRef idx="3">
+            <a:schemeClr val="accent1"/>
+          </a:fillRef>
+          <a:effectRef idx="2">
+            <a:schemeClr val="accent1"/>
+          </a:effectRef>
+          <a:fontRef idx="minor">
+            <a:schemeClr val="lt1"/>
+          </a:fontRef>
+        </p:style>
+        <p:txBody>
+          <a:bodyPr rtlCol="0" anchor="ctr" wrap="square"/>
+          <a:lstStyle/>
+          <a:p>
+            <a:pPr algn="ctr"/>
+          </a:p>
+        </p:txBody>
+      </p:sp>
+      <p:pic>
+        <p:nvPicPr>
+          <p:cNvPr id="11" name="Picture 10" descr="message-square_028dbd132a0a.png"/>
+          <p:cNvPicPr>
+            <a:picLocks noChangeAspect="1"/>
+          </p:cNvPicPr>
+          <p:nvPr/>
+        </p:nvPicPr>
+        <p:blipFill>
+          <a:blip r:embed="rId4"/>
+          <a:stretch>
+            <a:fillRect/>
+          </a:stretch>
+        </p:blipFill>
+        <p:spPr>
+          <a:xfrm>
+            <a:off x="868680" y="2398776"/>
+            <a:ext cx="237744" cy="237744"/>
+          </a:xfrm>
+          <a:prstGeom prst="rect">
+            <a:avLst/>
+          </a:prstGeom>
+        </p:spPr>
+      </p:pic>
+      <p:sp>
+        <p:nvSpPr>
+          <p:cNvPr id="12" name="TextBox 11"/>
+          <p:cNvSpPr txBox="1"/>
+          <p:nvPr/>
+        </p:nvSpPr>
+        <p:spPr>
+          <a:xfrm>
+            <a:off x="1399031" y="2103120"/>
+            <a:ext cx="9987991" cy="160401"/>
+          </a:xfrm>
+          <a:prstGeom prst="rect">
+            <a:avLst/>
+          </a:prstGeom>
+          <a:noFill/>
+        </p:spPr>
+        <p:txBody>
+          <a:bodyPr wrap="square" anchor="t" lIns="0" rIns="0" tIns="0" bIns="0">
+            <a:spAutoFit/>
+          </a:bodyPr>
+          <a:lstStyle/>
+          <a:p>
+            <a:pPr algn="l"/>
+            <a:r>
+              <a:rPr sz="750" b="1" i="0" spc="250">
+                <a:solidFill>
+                  <a:srgbClr val="D9A7FF"/>
+                </a:solidFill>
+                <a:latin typeface="Calibri"/>
+              </a:rPr>
+              <a:t>THE CLIENT ASKS</a:t>
+            </a:r>
+          </a:p>
+        </p:txBody>
+      </p:sp>
+      <p:sp>
+        <p:nvSpPr>
+          <p:cNvPr id="13" name="TextBox 12"/>
+          <p:cNvSpPr txBox="1"/>
+          <p:nvPr/>
+        </p:nvSpPr>
+        <p:spPr>
+          <a:xfrm>
+            <a:off x="1399031" y="2322576"/>
+            <a:ext cx="9987991" cy="682752"/>
+          </a:xfrm>
+          <a:prstGeom prst="rect">
+            <a:avLst/>
+          </a:prstGeom>
+          <a:noFill/>
+        </p:spPr>
+        <p:txBody>
+          <a:bodyPr wrap="square" anchor="t" lIns="0" rIns="0" tIns="0" bIns="0">
+            <a:spAutoFit/>
+          </a:bodyPr>
+          <a:lstStyle/>
+          <a:p>
+            <a:r>
+              <a:rPr sz="1500" b="0" i="0">
+                <a:solidFill>
+                  <a:srgbClr val="FFFFFF"/>
+                </a:solidFill>
+                <a:latin typeface="Calibri"/>
+              </a:rPr>
+              <a:t>"We want one table with one row per customer, refreshed every Monday: how recently they bought, how often, how much, their segment, whether the monsoon sale reached them, and last week's flags."</a:t>
+            </a:r>
+          </a:p>
+        </p:txBody>
+      </p:sp>
+      <p:pic>
+        <p:nvPicPr>
+          <p:cNvPr id="14" name="mermaid diagram" descr="a8ecfae2913fb977.png"/>
+          <p:cNvPicPr>
+            <a:picLocks noChangeAspect="1"/>
+          </p:cNvPicPr>
+          <p:nvPr/>
+        </p:nvPicPr>
+        <p:blipFill>
+          <a:blip r:embed="rId6"/>
+          <a:stretch>
+            <a:fillRect/>
+          </a:stretch>
+        </p:blipFill>
+        <p:spPr>
+          <a:xfrm>
+            <a:off x="2102491" y="3243072"/>
+            <a:ext cx="7986712" cy="1128712"/>
+          </a:xfrm>
+          <a:prstGeom prst="rect">
+            <a:avLst/>
+          </a:prstGeom>
+        </p:spPr>
+      </p:pic>
+      <p:sp>
+        <p:nvSpPr>
+          <p:cNvPr id="15" name="Oval 14"/>
+          <p:cNvSpPr/>
+          <p:nvPr/>
+        </p:nvSpPr>
+        <p:spPr>
+          <a:xfrm>
+            <a:off x="530352" y="6492240"/>
+            <a:ext cx="64008" cy="64008"/>
+          </a:xfrm>
+          <a:prstGeom prst="ellipse">
+            <a:avLst/>
+          </a:prstGeom>
+          <a:solidFill>
+            <a:srgbClr val="CFC9EE"/>
+          </a:solidFill>
+          <a:ln>
+            <a:noFill/>
+          </a:ln>
+          <a:effectLst/>
+        </p:spPr>
+        <p:style>
+          <a:lnRef idx="1">
+            <a:schemeClr val="accent1"/>
+          </a:lnRef>
+          <a:fillRef idx="3">
+            <a:schemeClr val="accent1"/>
+          </a:fillRef>
+          <a:effectRef idx="2">
+            <a:schemeClr val="accent1"/>
+          </a:effectRef>
+          <a:fontRef idx="minor">
+            <a:schemeClr val="lt1"/>
+          </a:fontRef>
+        </p:style>
+        <p:txBody>
+          <a:bodyPr rtlCol="0" anchor="ctr" wrap="square"/>
+          <a:lstStyle/>
+          <a:p>
+            <a:pPr algn="ctr"/>
+          </a:p>
+        </p:txBody>
+      </p:sp>
+      <p:sp>
+        <p:nvSpPr>
+          <p:cNvPr id="16" name="TextBox 15"/>
+          <p:cNvSpPr txBox="1"/>
+          <p:nvPr/>
+        </p:nvSpPr>
+        <p:spPr>
+          <a:xfrm>
+            <a:off x="640080" y="6437376"/>
+            <a:ext cx="1378457" cy="152146"/>
+          </a:xfrm>
+          <a:prstGeom prst="rect">
+            <a:avLst/>
+          </a:prstGeom>
+          <a:noFill/>
+        </p:spPr>
+        <p:txBody>
+          <a:bodyPr wrap="square" anchor="t" lIns="0" rIns="0" tIns="0" bIns="0">
+            <a:spAutoFit/>
+          </a:bodyPr>
+          <a:lstStyle/>
+          <a:p>
+            <a:pPr algn="l"/>
+            <a:r>
+              <a:rPr sz="700" b="0" i="0">
+                <a:solidFill>
+                  <a:srgbClr val="6B6690"/>
+                </a:solidFill>
+                <a:latin typeface="Calibri"/>
+              </a:rPr>
+              <a:t>Who does Marketing call?</a:t>
+            </a:r>
+          </a:p>
+        </p:txBody>
+      </p:sp>
+      <p:sp>
+        <p:nvSpPr>
+          <p:cNvPr id="17" name="Oval 16"/>
+          <p:cNvSpPr/>
+          <p:nvPr/>
+        </p:nvSpPr>
+        <p:spPr>
+          <a:xfrm>
+            <a:off x="2109977" y="6492240"/>
+            <a:ext cx="64008" cy="64008"/>
+          </a:xfrm>
+          <a:prstGeom prst="ellipse">
+            <a:avLst/>
+          </a:prstGeom>
+          <a:solidFill>
+            <a:srgbClr val="CFC9EE"/>
+          </a:solidFill>
+          <a:ln>
+            <a:noFill/>
+          </a:ln>
+          <a:effectLst/>
+        </p:spPr>
+        <p:style>
+          <a:lnRef idx="1">
+            <a:schemeClr val="accent1"/>
+          </a:lnRef>
+          <a:fillRef idx="3">
+            <a:schemeClr val="accent1"/>
+          </a:fillRef>
+          <a:effectRef idx="2">
+            <a:schemeClr val="accent1"/>
+          </a:effectRef>
+          <a:fontRef idx="minor">
+            <a:schemeClr val="lt1"/>
+          </a:fontRef>
+        </p:style>
+        <p:txBody>
+          <a:bodyPr rtlCol="0" anchor="ctr" wrap="square"/>
+          <a:lstStyle/>
+          <a:p>
+            <a:pPr algn="ctr"/>
+          </a:p>
+        </p:txBody>
+      </p:sp>
+      <p:sp>
+        <p:nvSpPr>
+          <p:cNvPr id="18" name="TextBox 17"/>
+          <p:cNvSpPr txBox="1"/>
+          <p:nvPr/>
+        </p:nvSpPr>
+        <p:spPr>
+          <a:xfrm>
+            <a:off x="2219706" y="6437376"/>
+            <a:ext cx="1194435" cy="152146"/>
+          </a:xfrm>
+          <a:prstGeom prst="rect">
+            <a:avLst/>
+          </a:prstGeom>
+          <a:noFill/>
+        </p:spPr>
+        <p:txBody>
+          <a:bodyPr wrap="square" anchor="t" lIns="0" rIns="0" tIns="0" bIns="0">
+            <a:spAutoFit/>
+          </a:bodyPr>
+          <a:lstStyle/>
+          <a:p>
+            <a:pPr algn="l"/>
+            <a:r>
+              <a:rPr sz="700" b="0" i="0">
+                <a:solidFill>
+                  <a:srgbClr val="6B6690"/>
+                </a:solidFill>
+                <a:latin typeface="Calibri"/>
+              </a:rPr>
+              <a:t>Can you do it alone?</a:t>
+            </a:r>
+          </a:p>
+        </p:txBody>
+      </p:sp>
+      <p:sp>
+        <p:nvSpPr>
+          <p:cNvPr id="19" name="Oval 18"/>
+          <p:cNvSpPr/>
+          <p:nvPr/>
+        </p:nvSpPr>
+        <p:spPr>
+          <a:xfrm>
+            <a:off x="3505580" y="6492240"/>
+            <a:ext cx="64008" cy="64008"/>
+          </a:xfrm>
+          <a:prstGeom prst="ellipse">
+            <a:avLst/>
+          </a:prstGeom>
+          <a:solidFill>
+            <a:srgbClr val="5B3FD6"/>
+          </a:solidFill>
+          <a:ln>
+            <a:noFill/>
+          </a:ln>
+          <a:effectLst/>
+        </p:spPr>
+        <p:style>
+          <a:lnRef idx="1">
+            <a:schemeClr val="accent1"/>
+          </a:lnRef>
+          <a:fillRef idx="3">
+            <a:schemeClr val="accent1"/>
+          </a:fillRef>
+          <a:effectRef idx="2">
+            <a:schemeClr val="accent1"/>
+          </a:effectRef>
+          <a:fontRef idx="minor">
+            <a:schemeClr val="lt1"/>
+          </a:fontRef>
+        </p:style>
+        <p:txBody>
+          <a:bodyPr rtlCol="0" anchor="ctr" wrap="square"/>
+          <a:lstStyle/>
+          <a:p>
+            <a:pPr algn="ctr"/>
+          </a:p>
+        </p:txBody>
+      </p:sp>
+      <p:sp>
+        <p:nvSpPr>
+          <p:cNvPr id="20" name="TextBox 19"/>
+          <p:cNvSpPr txBox="1"/>
+          <p:nvPr/>
+        </p:nvSpPr>
+        <p:spPr>
+          <a:xfrm>
+            <a:off x="3615308" y="6437376"/>
+            <a:ext cx="1470469" cy="152146"/>
+          </a:xfrm>
+          <a:prstGeom prst="rect">
+            <a:avLst/>
+          </a:prstGeom>
+          <a:noFill/>
+        </p:spPr>
+        <p:txBody>
+          <a:bodyPr wrap="square" anchor="t" lIns="0" rIns="0" tIns="0" bIns="0">
+            <a:spAutoFit/>
+          </a:bodyPr>
+          <a:lstStyle/>
+          <a:p>
+            <a:pPr algn="l"/>
+            <a:r>
+              <a:rPr sz="700" b="1" i="0">
+                <a:solidFill>
+                  <a:srgbClr val="5B3FD6"/>
+                </a:solidFill>
+                <a:latin typeface="Calibri"/>
+              </a:rPr>
+              <a:t>What do we tell Marketing?</a:t>
+            </a:r>
+          </a:p>
+        </p:txBody>
+      </p:sp>
+      <p:sp>
+        <p:nvSpPr>
+          <p:cNvPr id="21" name="TextBox 20"/>
+          <p:cNvSpPr txBox="1"/>
+          <p:nvPr/>
+        </p:nvSpPr>
+        <p:spPr>
+          <a:xfrm>
+            <a:off x="10198303" y="6437376"/>
+            <a:ext cx="1463040" cy="160401"/>
+          </a:xfrm>
+          <a:prstGeom prst="rect">
+            <a:avLst/>
+          </a:prstGeom>
+          <a:noFill/>
+        </p:spPr>
+        <p:txBody>
+          <a:bodyPr wrap="square" anchor="t" lIns="0" rIns="0" tIns="0" bIns="0">
+            <a:spAutoFit/>
+          </a:bodyPr>
+          <a:lstStyle/>
+          <a:p>
+            <a:pPr algn="r"/>
+            <a:r>
+              <a:rPr sz="750" b="0" i="0">
+                <a:solidFill>
+                  <a:srgbClr val="6B6690"/>
+                </a:solidFill>
+                <a:latin typeface="Calibri"/>
+              </a:rPr>
+              <a:t>S26  ·  30 / 30</a:t>
             </a:r>
           </a:p>
         </p:txBody>
@@ -27147,7 +27969,7 @@
                 </a:solidFill>
                 <a:latin typeface="Calibri"/>
               </a:rPr>
-              <a:t>The member team rings the flagged members on the protect lists this week, and the head of Retail-Plus answers to his members for every call. A call that tells a loyal member his spend is falling when he was away costs his goodwill and maybe his renewal.</a:t>
+              <a:t>The member team rings the flagged members on the protect lists this week, and the head of Retail-Plus answers to the tier's members for every call. A call that tells a loyal member their spend is falling when they were away costs their goodwill and maybe their renewal.</a:t>
             </a:r>
           </a:p>
         </p:txBody>
@@ -28687,7 +29509,7 @@
                 </a:solidFill>
                 <a:latin typeface="Calibri"/>
               </a:rPr>
-              <a:t>S2  ·  4 / 29</a:t>
+              <a:t>S2  ·  4 / 30</a:t>
             </a:r>
           </a:p>
         </p:txBody>
@@ -29155,7 +29977,7 @@
                 </a:solidFill>
                 <a:latin typeface="Calibri"/>
               </a:rPr>
-              <a:t>Answers to his members for every call the member team makes.</a:t>
+              <a:t>Answers to the tier's members for every call the member team makes.</a:t>
             </a:r>
           </a:p>
         </p:txBody>
@@ -29615,7 +30437,7 @@
                 </a:solidFill>
                 <a:latin typeface="Calibri"/>
               </a:rPr>
-              <a:t>His goodwill, maybe his renewal, and a week of calls spent on false alarms.</a:t>
+              <a:t>Their goodwill, maybe their renewal, and a week of calls spent on false alarms.</a:t>
             </a:r>
           </a:p>
         </p:txBody>
@@ -29812,7 +30634,7 @@
                 </a:solidFill>
                 <a:latin typeface="Calibri"/>
               </a:rPr>
-              <a:t>"Is your flag wrong about him, and how many others?"</a:t>
+              <a:t>"Is your flag wrong about them, and how many others?"</a:t>
             </a:r>
           </a:p>
         </p:txBody>
@@ -30084,7 +30906,7 @@
                 </a:solidFill>
                 <a:latin typeface="Calibri"/>
               </a:rPr>
-              <a:t>S3  ·  5 / 29</a:t>
+              <a:t>S3  ·  5 / 30</a:t>
             </a:r>
           </a:p>
         </p:txBody>
@@ -30332,7 +31154,7 @@
       </p:sp>
       <p:pic>
         <p:nvPicPr>
-          <p:cNvPr id="9" name="mermaid diagram" descr="42125c35229b1109.png"/>
+          <p:cNvPr id="9" name="mermaid diagram" descr="85128bbef259f1ec.png"/>
           <p:cNvPicPr>
             <a:picLocks noChangeAspect="1"/>
           </p:cNvPicPr>
@@ -30346,8 +31168,8 @@
         </p:blipFill>
         <p:spPr>
           <a:xfrm>
-            <a:off x="854597" y="1682496"/>
-            <a:ext cx="4137834" cy="4517136"/>
+            <a:off x="3186733" y="1664208"/>
+            <a:ext cx="5818228" cy="3203447"/>
           </a:xfrm>
           <a:prstGeom prst="rect">
             <a:avLst/>
@@ -30362,8 +31184,8 @@
         </p:nvSpPr>
         <p:spPr>
           <a:xfrm>
-            <a:off x="5761917" y="1956816"/>
-            <a:ext cx="5899425" cy="1639824"/>
+            <a:off x="530352" y="4913376"/>
+            <a:ext cx="11130991" cy="1121664"/>
           </a:xfrm>
           <a:prstGeom prst="roundRect">
             <a:avLst>
@@ -30416,7 +31238,7 @@
         </p:nvSpPr>
         <p:spPr>
           <a:xfrm>
-            <a:off x="5990517" y="2548128"/>
+            <a:off x="758952" y="5245608"/>
             <a:ext cx="457200" cy="457200"/>
           </a:xfrm>
           <a:prstGeom prst="ellipse">
@@ -30468,7 +31290,7 @@
         </p:blipFill>
         <p:spPr>
           <a:xfrm>
-            <a:off x="6100245" y="2657856"/>
+            <a:off x="868680" y="5355336"/>
             <a:ext cx="237744" cy="237744"/>
           </a:xfrm>
           <a:prstGeom prst="rect">
@@ -30484,8 +31306,8 @@
         </p:nvSpPr>
         <p:spPr>
           <a:xfrm>
-            <a:off x="6630597" y="2103120"/>
-            <a:ext cx="4756425" cy="160401"/>
+            <a:off x="1399031" y="5059680"/>
+            <a:ext cx="9987991" cy="160401"/>
           </a:xfrm>
           <a:prstGeom prst="rect">
             <a:avLst/>
@@ -30519,8 +31341,8 @@
         </p:nvSpPr>
         <p:spPr>
           <a:xfrm>
-            <a:off x="6630597" y="2322576"/>
-            <a:ext cx="4756425" cy="1200912"/>
+            <a:off x="1399031" y="5279136"/>
+            <a:ext cx="9987991" cy="682752"/>
           </a:xfrm>
           <a:prstGeom prst="rect">
             <a:avLst/>
@@ -30812,7 +31634,7 @@
                 </a:solidFill>
                 <a:latin typeface="Calibri"/>
               </a:rPr>
-              <a:t>S4  ·  6 / 29</a:t>
+              <a:t>S4  ·  6 / 30</a:t>
             </a:r>
           </a:p>
         </p:txBody>
@@ -31940,7 +32762,7 @@
                 </a:solidFill>
                 <a:latin typeface="Calibri"/>
               </a:rPr>
-              <a:t>S5  ·  7 / 29</a:t>
+              <a:t>S5  ·  7 / 30</a:t>
             </a:r>
           </a:p>
         </p:txBody>
@@ -32188,7 +33010,7 @@
       </p:sp>
       <p:pic>
         <p:nvPicPr>
-          <p:cNvPr id="9" name="mermaid diagram" descr="9bd98ac1668d421c.png"/>
+          <p:cNvPr id="9" name="mermaid diagram" descr="054ebe97ce9d4699.png"/>
           <p:cNvPicPr>
             <a:picLocks noChangeAspect="1"/>
           </p:cNvPicPr>
@@ -32202,8 +33024,8 @@
         </p:blipFill>
         <p:spPr>
           <a:xfrm>
-            <a:off x="2395385" y="1956816"/>
-            <a:ext cx="7400925" cy="3043237"/>
+            <a:off x="3459803" y="1956816"/>
+            <a:ext cx="5272087" cy="2300287"/>
           </a:xfrm>
           <a:prstGeom prst="rect">
             <a:avLst/>
@@ -32477,7 +33299,7 @@
                 </a:solidFill>
                 <a:latin typeface="Calibri"/>
               </a:rPr>
-              <a:t>S6  ·  8 / 29</a:t>
+              <a:t>S6  ·  8 / 30</a:t>
             </a:r>
           </a:p>
         </p:txBody>
@@ -32725,7 +33547,7 @@
       </p:sp>
       <p:pic>
         <p:nvPicPr>
-          <p:cNvPr id="9" name="mermaid diagram" descr="8c7b1f5da3100c69.png"/>
+          <p:cNvPr id="9" name="mermaid diagram" descr="be445e52615d0647.png"/>
           <p:cNvPicPr>
             <a:picLocks noChangeAspect="1"/>
           </p:cNvPicPr>
@@ -32739,8 +33561,8 @@
         </p:blipFill>
         <p:spPr>
           <a:xfrm>
-            <a:off x="3762689" y="1664208"/>
-            <a:ext cx="4666315" cy="3250692"/>
+            <a:off x="3731266" y="1956816"/>
+            <a:ext cx="4729162" cy="2043112"/>
           </a:xfrm>
           <a:prstGeom prst="rect">
             <a:avLst/>
@@ -32755,7 +33577,7 @@
         </p:nvSpPr>
         <p:spPr>
           <a:xfrm>
-            <a:off x="530352" y="4960620"/>
+            <a:off x="530352" y="4146232"/>
             <a:ext cx="11130991" cy="1074420"/>
           </a:xfrm>
           <a:prstGeom prst="roundRect">
@@ -32803,7 +33625,7 @@
         </p:nvSpPr>
         <p:spPr>
           <a:xfrm>
-            <a:off x="676656" y="5088636"/>
+            <a:off x="676656" y="4274248"/>
             <a:ext cx="45720" cy="818388"/>
           </a:xfrm>
           <a:prstGeom prst="roundRect">
@@ -32849,7 +33671,7 @@
         </p:nvSpPr>
         <p:spPr>
           <a:xfrm>
-            <a:off x="877824" y="5079492"/>
+            <a:off x="877824" y="4265104"/>
             <a:ext cx="10564063" cy="891540"/>
           </a:xfrm>
           <a:prstGeom prst="rect">
@@ -33151,7 +33973,7 @@
                 </a:solidFill>
                 <a:latin typeface="Calibri"/>
               </a:rPr>
-              <a:t>S7  ·  9 / 29</a:t>
+              <a:t>S7  ·  9 / 30</a:t>
             </a:r>
           </a:p>
         </p:txBody>

--- a/content/W02/D3/slides/C2_W02_D03_half2_STUDENT.pptx
+++ b/content/W02/D3/slides/C2_W02_D03_half2_STUDENT.pptx
@@ -6064,7 +6064,7 @@
                 </a:solidFill>
                 <a:latin typeface="Georgia"/>
               </a:rPr>
-              <a:t>“Before we ring anyone: one of your flagged members rang our help line to say they were travelling in August and have not stopped buying. Is your flag wrong about them, and how many others?”</a:t>
+              <a:t>“Before we ring anyone: one of your flagged members, C-0216, rang our help line to say they were travelling in August and have not stopped buying. Is your flag wrong about them, and how many others?”</a:t>
             </a:r>
           </a:p>
         </p:txBody>

--- a/content/W02/D3/slides/C2_W02_D03_half2_STUDENT.pptx
+++ b/content/W02/D3/slides/C2_W02_D03_half2_STUDENT.pptx
@@ -541,17 +541,17 @@
           </a:p>
           <a:p>
             <a:r>
-              <a:t>room a case to run alone. The trainer's part of the afternoon is 60 minutes: chapter 6 (30), the</a:t>
-            </a:r>
-          </a:p>
-          <a:p>
-            <a:r>
-              <a:t>escalated case's first two parts (20) and the Kahoot (10). The tentative IITGN block follows. Then</a:t>
-            </a:r>
-          </a:p>
-          <a:p>
-            <a:r>
-              <a:t>what the morning established.</a:t>
+              <a:t>room a case to run alone. The trainer's part of the afternoon is 60 minutes: chapter 6 with this</a:t>
+            </a:r>
+          </a:p>
+          <a:p>
+            <a:r>
+              <a:t>cover and the morning's answers (30), the escalated case's first two parts (20) and the close with</a:t>
+            </a:r>
+          </a:p>
+          <a:p>
+            <a:r>
+              <a:t>the Kahoot (10). The tentative IITGN block follows. Then what the morning established.</a:t>
             </a:r>
           </a:p>
         </p:txBody>
@@ -911,12 +911,17 @@
           <a:lstStyle/>
           <a:p>
             <a:r>
-              <a:t>LIVE, 3 minutes. Marketing asked about calendar months, and LAG counts rows. Wherever a member</a:t>
-            </a:r>
-          </a:p>
-          <a:p>
-            <a:r>
-              <a:t>skipped a month, LAG steps over the gap, so a holiday reads as a fall. Then the fix.</a:t>
+              <a:t>LIVE, 2 minutes. Marketing asked about calendar months, and LAG counts rows. Wherever a member</a:t>
+            </a:r>
+          </a:p>
+          <a:p>
+            <a:r>
+              <a:t>skipped a month, LAG steps over the gap, so a holiday reads as a fall. C-0216 is one of the seven.</a:t>
+            </a:r>
+          </a:p>
+          <a:p>
+            <a:r>
+              <a:t>Then the fix.</a:t>
             </a:r>
           </a:p>
         </p:txBody>
@@ -1056,7 +1061,7 @@
           <a:lstStyle/>
           <a:p>
             <a:r>
-              <a:t>LIVE, 3 minutes. A missing month has no row to join to, so a gap breaks the run here by</a:t>
+              <a:t>LIVE, 2 minutes. A missing month has no row to join to, so a gap breaks the run here by</a:t>
             </a:r>
           </a:p>
           <a:p>
@@ -1376,7 +1381,7 @@
           <a:lstStyle/>
           <a:p>
             <a:r>
-              <a:t>LIVE, 2 minutes. Read the five answers as one story. Q2 is July to September 2026; revenue is</a:t>
+              <a:t>LIVE, 1 minute. Read the five answers as one story. Q2 is July to September 2026; revenue is</a:t>
             </a:r>
           </a:p>
           <a:p>
@@ -1456,7 +1461,7 @@
           <a:lstStyle/>
           <a:p>
             <a:r>
-              <a:t>LIVE, 3 minutes. Read the marketing lead's message. Each part holds two lettered markers; each</a:t>
+              <a:t>LIVE, 2 minutes. Read the marketing lead's message. Each part holds two lettered markers; each</a:t>
             </a:r>
           </a:p>
           <a:p>
@@ -1466,7 +1471,12 @@
           </a:p>
           <a:p>
             <a:r>
-              <a:t>part behaves. Seventeen minutes alone; the support TA answers environment problems only.</a:t>
+              <a:t>part behaves. Seventeen minutes alone; the support TA answers environment problems only. Then the</a:t>
+            </a:r>
+          </a:p>
+          <a:p>
+            <a:r>
+              <a:t>rules the case keeps.</a:t>
             </a:r>
           </a:p>
         </p:txBody>
@@ -1536,7 +1546,7 @@
           <a:lstStyle/>
           <a:p>
             <a:r>
-              <a:t>LIVE, 2 minutes. The cards repeat the morning's rules and give away none of the case's answers.</a:t>
+              <a:t>LIVE, 1 minute. The cards repeat the morning's rules and give away none of the case's answers.</a:t>
             </a:r>
           </a:p>
           <a:p>
@@ -1611,7 +1621,7 @@
           <a:lstStyle/>
           <a:p>
             <a:r>
-              <a:t>LIVE. Ten minutes: the day's answer (2), the six lines (1), the Kahoot (6) and tomorrow (1).</a:t>
+              <a:t>LIVE. Ten minutes: the day's answer (2), the six rules (1), the Kahoot (6) and tomorrow (1).</a:t>
             </a:r>
           </a:p>
         </p:txBody>
@@ -1681,12 +1691,12 @@
           <a:lstStyle/>
           <a:p>
             <a:r>
-              <a:t>LIVE, 2 minutes. Ask two learners to read their own line first, including the Retail-Plus count</a:t>
-            </a:r>
-          </a:p>
-          <a:p>
-            <a:r>
-              <a:t>their run gave and its reason; then read this one. Then the six lines worth keeping.</a:t>
+              <a:t>LIVE, 2 minutes. Ask two learners to read their own sentence first, including the Retail-Plus count</a:t>
+            </a:r>
+          </a:p>
+          <a:p>
+            <a:r>
+              <a:t>their run gave and its reason; then read this one. Then the six rules worth keeping.</a:t>
             </a:r>
           </a:p>
         </p:txBody>
@@ -1756,7 +1766,7 @@
           <a:lstStyle/>
           <a:p>
             <a:r>
-              <a:t>LIVE, 1 minute. Read them together. The cheat sheet prints these six lines word for word. Then the</a:t>
+              <a:t>LIVE, 1 minute. Read them together. The cheat sheet prints these six rules word for word. Then the</a:t>
             </a:r>
           </a:p>
           <a:p>
@@ -1831,12 +1841,17 @@
           <a:lstStyle/>
           <a:p>
             <a:r>
-              <a:t>LIVE, 6 minutes, kahoot/C2_W02_D03_quiz_STUDENT.md. Twenty seconds an item; after each, one learner</a:t>
-            </a:r>
-          </a:p>
-          <a:p>
-            <a:r>
-              <a:t>says why the right answer holds. Item 8 is Tuesday's return question. Then tomorrow's ask, left open.</a:t>
+              <a:t>LIVE, 6 minutes, kahoot/C2_W02_D03_quiz_STUDENT.md. None of the eight is graded. Twenty seconds an</a:t>
+            </a:r>
+          </a:p>
+          <a:p>
+            <a:r>
+              <a:t>item; after each, one learner says why the right answer holds. Item 8 is Tuesday's return question.</a:t>
+            </a:r>
+          </a:p>
+          <a:p>
+            <a:r>
+              <a:t>Then tomorrow's ask, left open.</a:t>
             </a:r>
           </a:p>
         </p:txBody>
@@ -1906,22 +1921,92 @@
           <a:lstStyle/>
           <a:p>
             <a:r>
-              <a:t>SELF-STUDY, and the practice lab's drill. [S] is a staple asked everywhere and [F] frequent at global</a:t>
-            </a:r>
-          </a:p>
-          <a:p>
-            <a:r>
-              <a:t>capability centres and product companies; D23 carries the three differentiators. Each question is</a:t>
-            </a:r>
-          </a:p>
-          <a:p>
-            <a:r>
-              <a:t>answered in full in its chapter's notebook and in the study notes; in the lab, pairs ask each other</a:t>
-            </a:r>
-          </a:p>
-          <a:p>
-            <a:r>
-              <a:t>aloud.</a:t>
+              <a:t>SELF-STUDY, ten minutes of the practice lab's fifteen-minute drill. [S] is a staple asked everywhere</a:t>
+            </a:r>
+          </a:p>
+          <a:p>
+            <a:r>
+              <a:t>and [F] frequent at global capability centres and product companies; D23 carries the three</a:t>
+            </a:r>
+          </a:p>
+          <a:p>
+            <a:r>
+              <a:t>differentiators. In the lab, pairs ask each other aloud. The answers in one breath, in order:</a:t>
+            </a:r>
+          </a:p>
+          <a:p>
+            <a:r>
+              <a:t>ROW_NUMBER numbers every row, breaking a tie by the rest of its ORDER BY or arbitrarily; RANK shares</a:t>
+            </a:r>
+          </a:p>
+          <a:p>
+            <a:r>
+              <a:t>the number and skips, 1, 1, 3; DENSE_RANK shares it and skips nothing, 1, 1, 2. A window partitioned</a:t>
+            </a:r>
+          </a:p>
+          <a:p>
+            <a:r>
+              <a:t>by the group, numbered in a CTE and filtered outside, since GROUP BY collapses each group and LIMIT</a:t>
+            </a:r>
+          </a:p>
+          <a:p>
+            <a:r>
+              <a:t>counts across the result. GROUP BY returns one row per group; a window keeps every row and adds a</a:t>
+            </a:r>
+          </a:p>
+          <a:p>
+            <a:r>
+              <a:t>column. One row per customer per month, lag 1 and lag 2 partitioned by customer and ordered by</a:t>
+            </a:r>
+          </a:p>
+          <a:p>
+            <a:r>
+              <a:t>month, a check that the lagged months are the calendar months before, and the rows that fall twice.</a:t>
+            </a:r>
+          </a:p>
+          <a:p>
+            <a:r>
+              <a:t>WHERE filters before the window is computed, so compute it in a CTE and filter outside. It ranked</a:t>
+            </a:r>
+          </a:p>
+          <a:p>
+            <a:r>
+              <a:t>order rows; check distinct customers against rows and rank customers after adding up their orders.</a:t>
+            </a:r>
+          </a:p>
+          <a:p>
+            <a:r>
+              <a:t>Find out first: RANK with a tie at tenth is the rule working, DENSE_RANK can run past ten with ties</a:t>
+            </a:r>
+          </a:p>
+          <a:p>
+            <a:r>
+              <a:t>above, and ROW_NUMBER cannot ship eleven, so a repeated id there is a fanned-out join. Most often the</a:t>
+            </a:r>
+          </a:p>
+          <a:p>
+            <a:r>
+              <a:t>window has no PARTITION BY; a default argument in lag() or a descending ORDER BY gives the same</a:t>
+            </a:r>
+          </a:p>
+          <a:p>
+            <a:r>
+              <a:t>symptom. Under the default frame a date-only running total repeats on every run but gives peers one</a:t>
+            </a:r>
+          </a:p>
+          <a:p>
+            <a:r>
+              <a:t>figure; a ROWS frame over a non-unique order can change between runs; the date plus the order id</a:t>
+            </a:r>
+          </a:p>
+          <a:p>
+            <a:r>
+              <a:t>gives every row its own step. A cumulative actual beside one week's plan; compare to date with to</a:t>
+            </a:r>
+          </a:p>
+          <a:p>
+            <a:r>
+              <a:t>date.</a:t>
             </a:r>
           </a:p>
         </p:txBody>
@@ -1991,12 +2076,37 @@
           <a:lstStyle/>
           <a:p>
             <a:r>
-              <a:t>SELF-STUDY, and the practice lab's drill, asked last. [D] marks a differentiator. The answers are in</a:t>
-            </a:r>
-          </a:p>
-          <a:p>
-            <a:r>
-              <a:t>chapter 3's, chapter 6's and chapter 5's notebooks and in the study notes.</a:t>
+              <a:t>SELF-STUDY, the last five minutes of the practice lab's drill. [D] marks a differentiator. The</a:t>
+            </a:r>
+          </a:p>
+          <a:p>
+            <a:r>
+              <a:t>answers in one breath: RANK, and the report can ship more than N when a tie straddles the line, so it</a:t>
+            </a:r>
+          </a:p>
+          <a:p>
+            <a:r>
+              <a:t>states the count; DENSE_RANK can ship more even with no tie at the line; ROW_NUMBER always ships N and</a:t>
+            </a:r>
+          </a:p>
+          <a:p>
+            <a:r>
+              <a:t>hides the tie. A month with no order is no reading, so it breaks the run; a zero would read a quiet</a:t>
+            </a:r>
+          </a:p>
+          <a:p>
+            <a:r>
+              <a:t>month as a fall, and here zeros flag 26 members, 17 of them for a quiet September alone. Whether</a:t>
+            </a:r>
+          </a:p>
+          <a:p>
+            <a:r>
+              <a:t>every row made it in: the last cumulative value against the independent total, then rows outside</a:t>
+            </a:r>
+          </a:p>
+          <a:p>
+            <a:r>
+              <a:t>the join's calendar, here 25 orders of 1 to 5 July, Rs 15,39,820.</a:t>
             </a:r>
           </a:p>
         </p:txBody>
@@ -2146,12 +2256,12 @@
           <a:lstStyle/>
           <a:p>
             <a:r>
-              <a:t>SELF-STUDY, and the lab's debrief of the room's wrong answers. Each line is a trap the day staged on</a:t>
-            </a:r>
-          </a:p>
-          <a:p>
-            <a:r>
-              <a:t>purpose, and the room met each wrong number before anyone named the mistake.</a:t>
+              <a:t>SELF-STUDY, ten minutes, and the lab's debrief of the room's wrong answers. Each row is a trap the</a:t>
+            </a:r>
+          </a:p>
+          <a:p>
+            <a:r>
+              <a:t>day staged on purpose, and the room met each wrong number before anyone named the mistake.</a:t>
             </a:r>
           </a:p>
         </p:txBody>
@@ -2221,22 +2331,22 @@
           <a:lstStyle/>
           <a:p>
             <a:r>
-              <a:t>LIVE. Thirty minutes: the need and the company (4), the options and the call (5), the list and</a:t>
-            </a:r>
-          </a:p>
-          <a:p>
-            <a:r>
-              <a:t>the member on holiday (6), the trap, its check and its fix (8, never cut), the second route (3),</a:t>
-            </a:r>
-          </a:p>
-          <a:p>
-            <a:r>
-              <a:t>the calls (2) and the close (2). Notebook 6 and sql/C2_W02_D03_06_call_first_STUDENT.sql run</a:t>
-            </a:r>
-          </a:p>
-          <a:p>
-            <a:r>
-              <a:t>beside it.</a:t>
+              <a:t>LIVE. Twenty-eight minutes after the cover and the morning's answers: the map, the need and the</a:t>
+            </a:r>
+          </a:p>
+          <a:p>
+            <a:r>
+              <a:t>company (5), the options and the picture (4), the list and the member on holiday (7), the trap, its</a:t>
+            </a:r>
+          </a:p>
+          <a:p>
+            <a:r>
+              <a:t>check and its fix (6, never cut), the second route (2), the calls (2) and the close (2). Notebook 06</a:t>
+            </a:r>
+          </a:p>
+          <a:p>
+            <a:r>
+              <a:t>and sql/C2_W02_D03_06_call_first_STUDENT.sql run beside it.</a:t>
             </a:r>
           </a:p>
         </p:txBody>
@@ -2621,7 +2731,7 @@
           <a:lstStyle/>
           <a:p>
             <a:r>
-              <a:t>LIVE, 4 minutes. Members buy in 2.5 of the six months on average, 752 member-months for 301</a:t>
+              <a:t>LIVE, 3 minutes. Members buy in 2.5 of the six months on average, 752 member-months for 301</a:t>
             </a:r>
           </a:p>
           <a:p>
@@ -7055,7 +7165,7 @@
                 </a:solidFill>
                 <a:latin typeface="Calibri"/>
               </a:rPr>
-              <a:t>A member whose spend can fall twice from a high month is a member who spent a lot, so the flag sits inside the lists.</a:t>
+              <a:t>All 16 sit inside the lists this quarter, two of them in the last three places of their list, so the overlap is read from the data every time, never assumed.</a:t>
             </a:r>
           </a:p>
         </p:txBody>
@@ -8568,7 +8678,7 @@
       </p:sp>
       <p:pic>
         <p:nvPicPr>
-          <p:cNvPr id="9" name="mermaid diagram" descr="cae16322f66e6210.png"/>
+          <p:cNvPr id="9" name="mermaid diagram" descr="d7920b8c8aeac347.png"/>
           <p:cNvPicPr>
             <a:picLocks noChangeAspect="1"/>
           </p:cNvPicPr>
@@ -8582,8 +8692,8 @@
         </p:blipFill>
         <p:spPr>
           <a:xfrm>
-            <a:off x="3352647" y="1956816"/>
-            <a:ext cx="5486400" cy="1557337"/>
+            <a:off x="1409547" y="1956816"/>
+            <a:ext cx="9372600" cy="2000250"/>
           </a:xfrm>
           <a:prstGeom prst="rect">
             <a:avLst/>
@@ -8598,7 +8708,7 @@
         </p:nvSpPr>
         <p:spPr>
           <a:xfrm>
-            <a:off x="530352" y="3660457"/>
+            <a:off x="530352" y="4103370"/>
             <a:ext cx="11130991" cy="807720"/>
           </a:xfrm>
           <a:prstGeom prst="roundRect">
@@ -8646,7 +8756,7 @@
         </p:nvSpPr>
         <p:spPr>
           <a:xfrm>
-            <a:off x="676656" y="3788473"/>
+            <a:off x="676656" y="4231385"/>
             <a:ext cx="45720" cy="551688"/>
           </a:xfrm>
           <a:prstGeom prst="roundRect">
@@ -8692,7 +8802,7 @@
         </p:nvSpPr>
         <p:spPr>
           <a:xfrm>
-            <a:off x="877824" y="3779329"/>
+            <a:off x="877824" y="4222242"/>
             <a:ext cx="10564063" cy="624840"/>
           </a:xfrm>
           <a:prstGeom prst="rect">
@@ -10244,7 +10354,7 @@
       </p:sp>
       <p:pic>
         <p:nvPicPr>
-          <p:cNvPr id="9" name="mermaid diagram" descr="c8994adb0d915e8d.png"/>
+          <p:cNvPr id="9" name="mermaid diagram" descr="99986eef7fcc0090.png"/>
           <p:cNvPicPr>
             <a:picLocks noChangeAspect="1"/>
           </p:cNvPicPr>
@@ -10258,8 +10368,8 @@
         </p:blipFill>
         <p:spPr>
           <a:xfrm>
-            <a:off x="1909610" y="1956816"/>
-            <a:ext cx="8372475" cy="1800225"/>
+            <a:off x="3858637" y="1664208"/>
+            <a:ext cx="4474420" cy="3517392"/>
           </a:xfrm>
           <a:prstGeom prst="rect">
             <a:avLst/>
@@ -10274,7 +10384,7 @@
         </p:nvSpPr>
         <p:spPr>
           <a:xfrm>
-            <a:off x="530352" y="3903345"/>
+            <a:off x="530352" y="5227320"/>
             <a:ext cx="11130991" cy="807720"/>
           </a:xfrm>
           <a:prstGeom prst="roundRect">
@@ -10322,7 +10432,7 @@
         </p:nvSpPr>
         <p:spPr>
           <a:xfrm>
-            <a:off x="676656" y="4031360"/>
+            <a:off x="676656" y="5355336"/>
             <a:ext cx="45720" cy="551688"/>
           </a:xfrm>
           <a:prstGeom prst="roundRect">
@@ -10368,7 +10478,7 @@
         </p:nvSpPr>
         <p:spPr>
           <a:xfrm>
-            <a:off x="877824" y="4022217"/>
+            <a:off x="877824" y="5346192"/>
             <a:ext cx="10564063" cy="624840"/>
           </a:xfrm>
           <a:prstGeom prst="rect">
@@ -10398,7 +10508,7 @@
                 </a:solidFill>
                 <a:latin typeface="Calibri"/>
               </a:rPr>
-              <a:t>Carry lag(month) beside lag(spend) and count the flags whose two rows before September are not August and July: seven, C-0216 among them.</a:t>
+              <a:t>Carry lag(month) beside lag(spend) and count the flags whose two rows before September are not August and July: seven. The member on holiday is one of the seven.</a:t>
             </a:r>
           </a:p>
         </p:txBody>
@@ -13269,7 +13379,7 @@
         <p:spPr>
           <a:xfrm>
             <a:off x="530352" y="2883408"/>
-            <a:ext cx="11130991" cy="1121664"/>
+            <a:ext cx="11130991" cy="862584"/>
           </a:xfrm>
           <a:prstGeom prst="roundRect">
             <a:avLst>
@@ -13328,7 +13438,7 @@
         </p:nvSpPr>
         <p:spPr>
           <a:xfrm>
-            <a:off x="758952" y="3215640"/>
+            <a:off x="758952" y="3086100"/>
             <a:ext cx="457200" cy="457200"/>
           </a:xfrm>
           <a:prstGeom prst="ellipse">
@@ -13380,7 +13490,7 @@
         </p:blipFill>
         <p:spPr>
           <a:xfrm>
-            <a:off x="868680" y="3325368"/>
+            <a:off x="868680" y="3195828"/>
             <a:ext cx="237744" cy="237744"/>
           </a:xfrm>
           <a:prstGeom prst="rect">
@@ -13432,7 +13542,7 @@
         <p:spPr>
           <a:xfrm>
             <a:off x="1399031" y="3249168"/>
-            <a:ext cx="9987991" cy="682752"/>
+            <a:ext cx="9987991" cy="423672"/>
           </a:xfrm>
           <a:prstGeom prst="rect">
             <a:avLst/>
@@ -13452,14 +13562,53 @@
                 </a:solidFill>
                 <a:latin typeface="Calibri"/>
               </a:rPr>
-              <a:t>"Who do we ring first?" All nine flagged members are on a protect list. Run block c6_call_list in your own notebook and read the nine before you write the line to Marketing.</a:t>
-            </a:r>
-          </a:p>
-        </p:txBody>
-      </p:sp>
-      <p:sp>
-        <p:nvSpPr>
-          <p:cNvPr id="15" name="Oval 14"/>
+              <a:t>"Who do we ring first?"</a:t>
+            </a:r>
+          </a:p>
+        </p:txBody>
+      </p:sp>
+      <p:sp>
+        <p:nvSpPr>
+          <p:cNvPr id="15" name="TextBox 14"/>
+          <p:cNvSpPr txBox="1"/>
+          <p:nvPr/>
+        </p:nvSpPr>
+        <p:spPr>
+          <a:xfrm>
+            <a:off x="530352" y="3910584"/>
+            <a:ext cx="11130991" cy="772160"/>
+          </a:xfrm>
+          <a:prstGeom prst="rect">
+            <a:avLst/>
+          </a:prstGeom>
+          <a:noFill/>
+        </p:spPr>
+        <p:txBody>
+          <a:bodyPr wrap="square" anchor="t" lIns="0" rIns="0" tIns="0" bIns="0">
+            <a:spAutoFit/>
+          </a:bodyPr>
+          <a:lstStyle/>
+          <a:p>
+            <a:pPr>
+              <a:spcAft>
+                <a:spcPts val="800"/>
+              </a:spcAft>
+            </a:pPr>
+            <a:r>
+              <a:rPr sz="1600" b="0" i="0">
+                <a:solidFill>
+                  <a:srgbClr val="1A1440"/>
+                </a:solidFill>
+                <a:latin typeface="Calibri"/>
+              </a:rPr>
+              <a:t>All nine flagged members are on a protect list. Run block c6_call_list in your own notebook and read the nine before you write the sentence to Marketing.</a:t>
+            </a:r>
+          </a:p>
+        </p:txBody>
+      </p:sp>
+      <p:sp>
+        <p:nvSpPr>
+          <p:cNvPr id="16" name="Oval 15"/>
           <p:cNvSpPr/>
           <p:nvPr/>
         </p:nvSpPr>
@@ -13503,7 +13652,7 @@
       </p:sp>
       <p:sp>
         <p:nvSpPr>
-          <p:cNvPr id="16" name="TextBox 15"/>
+          <p:cNvPr id="17" name="TextBox 16"/>
           <p:cNvSpPr txBox="1"/>
           <p:nvPr/>
         </p:nvSpPr>
@@ -13538,7 +13687,7 @@
       </p:sp>
       <p:sp>
         <p:nvSpPr>
-          <p:cNvPr id="17" name="Oval 16"/>
+          <p:cNvPr id="18" name="Oval 17"/>
           <p:cNvSpPr/>
           <p:nvPr/>
         </p:nvSpPr>
@@ -13582,7 +13731,7 @@
       </p:sp>
       <p:sp>
         <p:nvSpPr>
-          <p:cNvPr id="18" name="TextBox 17"/>
+          <p:cNvPr id="19" name="TextBox 18"/>
           <p:cNvSpPr txBox="1"/>
           <p:nvPr/>
         </p:nvSpPr>
@@ -13617,7 +13766,7 @@
       </p:sp>
       <p:sp>
         <p:nvSpPr>
-          <p:cNvPr id="19" name="Oval 18"/>
+          <p:cNvPr id="20" name="Oval 19"/>
           <p:cNvSpPr/>
           <p:nvPr/>
         </p:nvSpPr>
@@ -13661,7 +13810,7 @@
       </p:sp>
       <p:sp>
         <p:nvSpPr>
-          <p:cNvPr id="20" name="TextBox 19"/>
+          <p:cNvPr id="21" name="TextBox 20"/>
           <p:cNvSpPr txBox="1"/>
           <p:nvPr/>
         </p:nvSpPr>
@@ -13696,7 +13845,7 @@
       </p:sp>
       <p:sp>
         <p:nvSpPr>
-          <p:cNvPr id="21" name="TextBox 20"/>
+          <p:cNvPr id="22" name="TextBox 21"/>
           <p:cNvSpPr txBox="1"/>
           <p:nvPr/>
         </p:nvSpPr>
@@ -15443,7 +15592,7 @@
                 </a:solidFill>
                 <a:latin typeface="Calibri"/>
               </a:rPr>
-              <a:t>Week 2 Day 3: who do we protect before they drift</a:t>
+              <a:t>Week 2, Day 3. Who does Marketing call first?</a:t>
             </a:r>
           </a:p>
         </p:txBody>
@@ -15684,7 +15833,7 @@
                 </a:solidFill>
                 <a:latin typeface="Georgia"/>
               </a:rPr>
-              <a:t>The morning answered five questions with numbers</a:t>
+              <a:t>A list per segment, RANK, 16 flags, Q2 on plan</a:t>
             </a:r>
           </a:p>
         </p:txBody>
@@ -15919,7 +16068,7 @@
                           </a:solidFill>
                           <a:latin typeface="Calibri"/>
                         </a:rPr>
-                        <a:t>RANK, with the count and its reason; DENSE_RANK can run past the line</a:t>
+                        <a:t>RANK, with the count and its reason; DENSE_RANK can run past fifty</a:t>
                       </a:r>
                     </a:p>
                   </a:txBody>
@@ -16731,7 +16880,7 @@
                 </a:solidFill>
                 <a:latin typeface="Calibri"/>
               </a:rPr>
-              <a:t>"We start calling on Monday. Send me each segment's protect list under the head of Retail-Plus's rule, with its count; the members we ring first; how much of each segment's Q2 revenue the lists cover; and one line Meera can take into the leadership meeting on whether Q2 is on track."</a:t>
+              <a:t>"We start calling on Monday. Send me each segment's protect list under the head of Retail-Plus's rule, with its count; the members we ring first; how much of each segment's Q2 revenue the lists cover; and one sentence Meera can take into the leadership meeting on whether Q2 is on track."</a:t>
             </a:r>
           </a:p>
         </p:txBody>
@@ -17740,7 +17889,7 @@
         <p:spPr>
           <a:xfrm>
             <a:off x="9746040" y="4535424"/>
-            <a:ext cx="1750710" cy="251205"/>
+            <a:ext cx="1750710" cy="465836"/>
           </a:xfrm>
           <a:prstGeom prst="rect">
             <a:avLst/>
@@ -17761,7 +17910,7 @@
                 </a:solidFill>
                 <a:latin typeface="Calibri"/>
               </a:rPr>
-              <a:t>The lines to send</a:t>
+              <a:t>The sentences to send</a:t>
             </a:r>
           </a:p>
         </p:txBody>
@@ -17774,7 +17923,7 @@
         </p:nvSpPr>
         <p:spPr>
           <a:xfrm>
-            <a:off x="9746040" y="4823206"/>
+            <a:off x="9746040" y="5037836"/>
             <a:ext cx="1750710" cy="201676"/>
           </a:xfrm>
           <a:prstGeom prst="rect">
@@ -18274,7 +18423,7 @@
                 </a:solidFill>
                 <a:latin typeface="Georgia"/>
               </a:rPr>
-              <a:t>Every choice is yours, and the checks read it</a:t>
+              <a:t>Keep the head's rule, calendar months, closed loops</a:t>
             </a:r>
           </a:p>
         </p:txBody>
@@ -19744,7 +19893,7 @@
                 </a:solidFill>
                 <a:latin typeface="Calibri"/>
               </a:rPr>
-              <a:t>Week 2 Day 3: who do we protect before they drift</a:t>
+              <a:t>Week 2, Day 3. Who does Marketing call first?</a:t>
             </a:r>
           </a:p>
         </p:txBody>
@@ -20297,7 +20446,7 @@
                 </a:solidFill>
                 <a:latin typeface="Georgia"/>
               </a:rPr>
-              <a:t>"Each segment's list is its top fifty by Q2 revenue under RANK, so members who spent the same share a place, with every list's count and its reason. Ring the nine members whose spend fell in August and again in September first. Q2 closed on plan, Rs 10 ahead, and the Rs 1.58 crore lead at mid-quarter came from one July week, so the weekly run rate has sat below plan since 10 August."</a:t>
+              <a:t>"Each segment's list is its top fifty by Q2 revenue under RANK, so members who spent the same share a place, with every list's count and its reason. Ring the nine members whose spend fell in August and again in September first. Q2 closed on plan, Rs 10 ahead, and the Rs 1.58 crore lead at mid-quarter came from one July week; six of the seven full weeks from 10 August booked below plan."</a:t>
             </a:r>
           </a:p>
         </p:txBody>
@@ -20855,7 +21004,7 @@
                 </a:solidFill>
                 <a:latin typeface="Georgia"/>
               </a:rPr>
-              <a:t>Six lines worth keeping, one per chapter</a:t>
+              <a:t>Six rules worth keeping, one per chapter</a:t>
             </a:r>
           </a:p>
         </p:txBody>
@@ -20890,14 +21039,14 @@
                 </a:solidFill>
                 <a:latin typeface="Calibri"/>
               </a:rPr>
-              <a:t>Which line does each chapter leave Marketing's list with?</a:t>
+              <a:t>Which rule does each chapter leave Marketing's list with?</a:t>
             </a:r>
           </a:p>
         </p:txBody>
       </p:sp>
       <p:pic>
         <p:nvPicPr>
-          <p:cNvPr id="9" name="mermaid diagram" descr="11811dd0a6b07bd4.png"/>
+          <p:cNvPr id="9" name="mermaid diagram" descr="a69f3fbfe7bc78a4.png"/>
           <p:cNvPicPr>
             <a:picLocks noChangeAspect="1"/>
           </p:cNvPicPr>
@@ -20911,8 +21060,8 @@
         </p:blipFill>
         <p:spPr>
           <a:xfrm>
-            <a:off x="530352" y="1956816"/>
-            <a:ext cx="11130991" cy="822589"/>
+            <a:off x="530352" y="1896466"/>
+            <a:ext cx="11130991" cy="1105204"/>
           </a:xfrm>
           <a:prstGeom prst="rect">
             <a:avLst/>
@@ -20927,7 +21076,7 @@
         </p:nvSpPr>
         <p:spPr>
           <a:xfrm>
-            <a:off x="530352" y="2889133"/>
+            <a:off x="530352" y="3111398"/>
             <a:ext cx="502920" cy="333756"/>
           </a:xfrm>
           <a:prstGeom prst="rect">
@@ -20962,7 +21111,7 @@
         </p:nvSpPr>
         <p:spPr>
           <a:xfrm>
-            <a:off x="1097280" y="2925709"/>
+            <a:off x="1097280" y="3147974"/>
             <a:ext cx="10564063" cy="368808"/>
           </a:xfrm>
           <a:prstGeom prst="rect">
@@ -20996,7 +21145,7 @@
         </p:nvSpPr>
         <p:spPr>
           <a:xfrm>
-            <a:off x="530352" y="3331093"/>
+            <a:off x="530352" y="3553358"/>
             <a:ext cx="502920" cy="333756"/>
           </a:xfrm>
           <a:prstGeom prst="rect">
@@ -21031,7 +21180,7 @@
         </p:nvSpPr>
         <p:spPr>
           <a:xfrm>
-            <a:off x="1097280" y="3367669"/>
+            <a:off x="1097280" y="3589934"/>
             <a:ext cx="10564063" cy="368808"/>
           </a:xfrm>
           <a:prstGeom prst="rect">
@@ -21065,7 +21214,7 @@
         </p:nvSpPr>
         <p:spPr>
           <a:xfrm>
-            <a:off x="530352" y="3773053"/>
+            <a:off x="530352" y="3995318"/>
             <a:ext cx="502920" cy="333756"/>
           </a:xfrm>
           <a:prstGeom prst="rect">
@@ -21100,7 +21249,76 @@
         </p:nvSpPr>
         <p:spPr>
           <a:xfrm>
-            <a:off x="1097280" y="3809629"/>
+            <a:off x="1097280" y="4031894"/>
+            <a:ext cx="10564063" cy="627888"/>
+          </a:xfrm>
+          <a:prstGeom prst="rect">
+            <a:avLst/>
+          </a:prstGeom>
+          <a:noFill/>
+        </p:spPr>
+        <p:txBody>
+          <a:bodyPr wrap="square" anchor="t" lIns="0" rIns="0" tIns="0" bIns="0">
+            <a:spAutoFit/>
+          </a:bodyPr>
+          <a:lstStyle/>
+          <a:p>
+            <a:r>
+              <a:rPr sz="1500" b="0" i="0">
+                <a:solidFill>
+                  <a:srgbClr val="1A1440"/>
+                </a:solidFill>
+                <a:latin typeface="Calibri"/>
+              </a:rPr>
+              <a:t>RANK keeps a tie at the line, the last place a list keeps, and says the count; DENSE_RANK can run past the line with no tie at it.</a:t>
+            </a:r>
+          </a:p>
+        </p:txBody>
+      </p:sp>
+      <p:sp>
+        <p:nvSpPr>
+          <p:cNvPr id="16" name="TextBox 15"/>
+          <p:cNvSpPr txBox="1"/>
+          <p:nvPr/>
+        </p:nvSpPr>
+        <p:spPr>
+          <a:xfrm>
+            <a:off x="530352" y="4696358"/>
+            <a:ext cx="502920" cy="333756"/>
+          </a:xfrm>
+          <a:prstGeom prst="rect">
+            <a:avLst/>
+          </a:prstGeom>
+          <a:noFill/>
+        </p:spPr>
+        <p:txBody>
+          <a:bodyPr wrap="square" anchor="t" lIns="0" rIns="0" tIns="0" bIns="0">
+            <a:spAutoFit/>
+          </a:bodyPr>
+          <a:lstStyle/>
+          <a:p>
+            <a:pPr algn="l"/>
+            <a:r>
+              <a:rPr sz="1800" b="0" i="0">
+                <a:solidFill>
+                  <a:srgbClr val="5B3FD6"/>
+                </a:solidFill>
+                <a:latin typeface="Georgia"/>
+              </a:rPr>
+              <a:t>04</a:t>
+            </a:r>
+          </a:p>
+        </p:txBody>
+      </p:sp>
+      <p:sp>
+        <p:nvSpPr>
+          <p:cNvPr id="17" name="TextBox 16"/>
+          <p:cNvSpPr txBox="1"/>
+          <p:nvPr/>
+        </p:nvSpPr>
+        <p:spPr>
+          <a:xfrm>
+            <a:off x="1097280" y="4732934"/>
             <a:ext cx="10564063" cy="368808"/>
           </a:xfrm>
           <a:prstGeom prst="rect">
@@ -21121,20 +21339,20 @@
                 </a:solidFill>
                 <a:latin typeface="Calibri"/>
               </a:rPr>
-              <a:t>RANK keeps a tie at the line and says the count; DENSE_RANK can run past the line with no tie at it.</a:t>
-            </a:r>
-          </a:p>
-        </p:txBody>
-      </p:sp>
-      <p:sp>
-        <p:nvSpPr>
-          <p:cNvPr id="16" name="TextBox 15"/>
-          <p:cNvSpPr txBox="1"/>
-          <p:nvPr/>
-        </p:nvSpPr>
-        <p:spPr>
-          <a:xfrm>
-            <a:off x="530352" y="4215013"/>
+              <a:t>Tell the window whose rows belong together, or LAG reads another member's month.</a:t>
+            </a:r>
+          </a:p>
+        </p:txBody>
+      </p:sp>
+      <p:sp>
+        <p:nvSpPr>
+          <p:cNvPr id="18" name="TextBox 17"/>
+          <p:cNvSpPr txBox="1"/>
+          <p:nvPr/>
+        </p:nvSpPr>
+        <p:spPr>
+          <a:xfrm>
+            <a:off x="530352" y="5138318"/>
             <a:ext cx="502920" cy="333756"/>
           </a:xfrm>
           <a:prstGeom prst="rect">
@@ -21156,20 +21374,20 @@
                 </a:solidFill>
                 <a:latin typeface="Georgia"/>
               </a:rPr>
-              <a:t>04</a:t>
-            </a:r>
-          </a:p>
-        </p:txBody>
-      </p:sp>
-      <p:sp>
-        <p:nvSpPr>
-          <p:cNvPr id="17" name="TextBox 16"/>
-          <p:cNvSpPr txBox="1"/>
-          <p:nvPr/>
-        </p:nvSpPr>
-        <p:spPr>
-          <a:xfrm>
-            <a:off x="1097280" y="4251589"/>
+              <a:t>05</a:t>
+            </a:r>
+          </a:p>
+        </p:txBody>
+      </p:sp>
+      <p:sp>
+        <p:nvSpPr>
+          <p:cNvPr id="19" name="TextBox 18"/>
+          <p:cNvSpPr txBox="1"/>
+          <p:nvPr/>
+        </p:nvSpPr>
+        <p:spPr>
+          <a:xfrm>
+            <a:off x="1097280" y="5174894"/>
             <a:ext cx="10564063" cy="368808"/>
           </a:xfrm>
           <a:prstGeom prst="rect">
@@ -21190,20 +21408,20 @@
                 </a:solidFill>
                 <a:latin typeface="Calibri"/>
               </a:rPr>
-              <a:t>Tell the window whose rows belong together, or LAG reads another member's month.</a:t>
-            </a:r>
-          </a:p>
-        </p:txBody>
-      </p:sp>
-      <p:sp>
-        <p:nvSpPr>
-          <p:cNvPr id="18" name="TextBox 17"/>
-          <p:cNvSpPr txBox="1"/>
-          <p:nvPr/>
-        </p:nvSpPr>
-        <p:spPr>
-          <a:xfrm>
-            <a:off x="530352" y="4656973"/>
+              <a:t>A running total is done when its last value equals the quarter's total.</a:t>
+            </a:r>
+          </a:p>
+        </p:txBody>
+      </p:sp>
+      <p:sp>
+        <p:nvSpPr>
+          <p:cNvPr id="20" name="TextBox 19"/>
+          <p:cNvSpPr txBox="1"/>
+          <p:nvPr/>
+        </p:nvSpPr>
+        <p:spPr>
+          <a:xfrm>
+            <a:off x="530352" y="5580278"/>
             <a:ext cx="502920" cy="333756"/>
           </a:xfrm>
           <a:prstGeom prst="rect">
@@ -21225,75 +21443,6 @@
                 </a:solidFill>
                 <a:latin typeface="Georgia"/>
               </a:rPr>
-              <a:t>05</a:t>
-            </a:r>
-          </a:p>
-        </p:txBody>
-      </p:sp>
-      <p:sp>
-        <p:nvSpPr>
-          <p:cNvPr id="19" name="TextBox 18"/>
-          <p:cNvSpPr txBox="1"/>
-          <p:nvPr/>
-        </p:nvSpPr>
-        <p:spPr>
-          <a:xfrm>
-            <a:off x="1097280" y="4693549"/>
-            <a:ext cx="10564063" cy="368808"/>
-          </a:xfrm>
-          <a:prstGeom prst="rect">
-            <a:avLst/>
-          </a:prstGeom>
-          <a:noFill/>
-        </p:spPr>
-        <p:txBody>
-          <a:bodyPr wrap="square" anchor="t" lIns="0" rIns="0" tIns="0" bIns="0">
-            <a:spAutoFit/>
-          </a:bodyPr>
-          <a:lstStyle/>
-          <a:p>
-            <a:r>
-              <a:rPr sz="1500" b="0" i="0">
-                <a:solidFill>
-                  <a:srgbClr val="1A1440"/>
-                </a:solidFill>
-                <a:latin typeface="Calibri"/>
-              </a:rPr>
-              <a:t>A running total is done when its last value equals the quarter's total.</a:t>
-            </a:r>
-          </a:p>
-        </p:txBody>
-      </p:sp>
-      <p:sp>
-        <p:nvSpPr>
-          <p:cNvPr id="20" name="TextBox 19"/>
-          <p:cNvSpPr txBox="1"/>
-          <p:nvPr/>
-        </p:nvSpPr>
-        <p:spPr>
-          <a:xfrm>
-            <a:off x="530352" y="5098933"/>
-            <a:ext cx="502920" cy="333756"/>
-          </a:xfrm>
-          <a:prstGeom prst="rect">
-            <a:avLst/>
-          </a:prstGeom>
-          <a:noFill/>
-        </p:spPr>
-        <p:txBody>
-          <a:bodyPr wrap="square" anchor="t" lIns="0" rIns="0" tIns="0" bIns="0">
-            <a:spAutoFit/>
-          </a:bodyPr>
-          <a:lstStyle/>
-          <a:p>
-            <a:pPr algn="l"/>
-            <a:r>
-              <a:rPr sz="1800" b="0" i="0">
-                <a:solidFill>
-                  <a:srgbClr val="5B3FD6"/>
-                </a:solidFill>
-                <a:latin typeface="Georgia"/>
-              </a:rPr>
               <a:t>06</a:t>
             </a:r>
           </a:p>
@@ -21307,7 +21456,7 @@
         </p:nvSpPr>
         <p:spPr>
           <a:xfrm>
-            <a:off x="1097280" y="5135509"/>
+            <a:off x="1097280" y="5616854"/>
             <a:ext cx="10564063" cy="368808"/>
           </a:xfrm>
           <a:prstGeom prst="rect">
@@ -21806,7 +21955,7 @@
                 </a:solidFill>
                 <a:latin typeface="Georgia"/>
               </a:rPr>
-              <a:t>The Kahoot: eight items, none of them graded</a:t>
+              <a:t>Eight decisions, from tie rules to Tuesday's join</a:t>
             </a:r>
           </a:p>
         </p:txBody>
@@ -22133,7 +22282,7 @@
                           </a:solidFill>
                           <a:latin typeface="Calibri"/>
                         </a:rPr>
-                        <a:t>What ROW_NUMBER does to a tie at the line</a:t>
+                        <a:t>What ROW_NUMBER does when the fourth and fifth tie</a:t>
                       </a:r>
                     </a:p>
                   </a:txBody>
@@ -22957,7 +23106,7 @@
                           </a:solidFill>
                           <a:latin typeface="Calibri"/>
                         </a:rPr>
-                        <a:t>RANK, DENSE_RANK and ROW_NUMBER on a tie.</a:t>
+                        <a:t>What do RANK, DENSE_RANK and ROW_NUMBER give on a tie?</a:t>
                       </a:r>
                     </a:p>
                   </a:txBody>
@@ -24986,7 +25135,7 @@
       </p:sp>
       <p:pic>
         <p:nvPicPr>
-          <p:cNvPr id="15" name="mermaid diagram" descr="f626be52d68ee89f.png"/>
+          <p:cNvPr id="15" name="mermaid diagram" descr="74b5f738e2ac4f9c.png"/>
           <p:cNvPicPr>
             <a:picLocks noChangeAspect="1"/>
           </p:cNvPicPr>
@@ -25000,8 +25149,8 @@
         </p:blipFill>
         <p:spPr>
           <a:xfrm>
-            <a:off x="530352" y="3502152"/>
-            <a:ext cx="11130991" cy="858395"/>
+            <a:off x="780897" y="3502152"/>
+            <a:ext cx="10629900" cy="1600200"/>
           </a:xfrm>
           <a:prstGeom prst="rect">
             <a:avLst/>
@@ -26822,7 +26971,7 @@
                 </a:solidFill>
                 <a:latin typeface="Calibri"/>
               </a:rPr>
-              <a:t>Week 2 Day 3: who do we protect before they drift</a:t>
+              <a:t>Week 2, Day 3. Who does Marketing call first?</a:t>
             </a:r>
           </a:p>
         </p:txBody>
@@ -27302,7 +27451,7 @@
       </p:sp>
       <p:pic>
         <p:nvPicPr>
-          <p:cNvPr id="14" name="mermaid diagram" descr="a8ecfae2913fb977.png"/>
+          <p:cNvPr id="14" name="mermaid diagram" descr="7c7d2ba252e30238.png"/>
           <p:cNvPicPr>
             <a:picLocks noChangeAspect="1"/>
           </p:cNvPicPr>
@@ -27316,8 +27465,8 @@
         </p:blipFill>
         <p:spPr>
           <a:xfrm>
-            <a:off x="2102491" y="3243072"/>
-            <a:ext cx="7986712" cy="1128712"/>
+            <a:off x="2152497" y="3243072"/>
+            <a:ext cx="7886700" cy="1857375"/>
           </a:xfrm>
           <a:prstGeom prst="rect">
             <a:avLst/>
@@ -27832,7 +27981,7 @@
                 </a:solidFill>
                 <a:latin typeface="Calibri"/>
               </a:rPr>
-              <a:t>Who needs this answer, and which questions lead to it?</a:t>
+              <a:t>Who needs the call list, and which questions lead to it?</a:t>
             </a:r>
           </a:p>
         </p:txBody>
@@ -30451,7 +30600,7 @@
         <p:spPr>
           <a:xfrm>
             <a:off x="530352" y="4104132"/>
-            <a:ext cx="11130991" cy="862584"/>
+            <a:ext cx="11130991" cy="1121664"/>
           </a:xfrm>
           <a:prstGeom prst="roundRect">
             <a:avLst>
@@ -30510,7 +30659,7 @@
         </p:nvSpPr>
         <p:spPr>
           <a:xfrm>
-            <a:off x="758952" y="4306824"/>
+            <a:off x="758952" y="4436364"/>
             <a:ext cx="457200" cy="457200"/>
           </a:xfrm>
           <a:prstGeom prst="ellipse">
@@ -30562,7 +30711,7 @@
         </p:blipFill>
         <p:spPr>
           <a:xfrm>
-            <a:off x="868680" y="4416552"/>
+            <a:off x="868680" y="4546092"/>
             <a:ext cx="237744" cy="237744"/>
           </a:xfrm>
           <a:prstGeom prst="rect">
@@ -30614,7 +30763,7 @@
         <p:spPr>
           <a:xfrm>
             <a:off x="1399031" y="4469892"/>
-            <a:ext cx="9987991" cy="423672"/>
+            <a:ext cx="9987991" cy="682752"/>
           </a:xfrm>
           <a:prstGeom prst="rect">
             <a:avLst/>
@@ -30634,7 +30783,7 @@
                 </a:solidFill>
                 <a:latin typeface="Calibri"/>
               </a:rPr>
-              <a:t>"Is your flag wrong about them, and how many others?"</a:t>
+              <a:t>"C-0216 rang our help line to say they were travelling in August and have not stopped buying. Is your flag wrong about them, and how many others?"</a:t>
             </a:r>
           </a:p>
         </p:txBody>
@@ -31154,7 +31303,7 @@
       </p:sp>
       <p:pic>
         <p:nvPicPr>
-          <p:cNvPr id="9" name="mermaid diagram" descr="85128bbef259f1ec.png"/>
+          <p:cNvPr id="9" name="mermaid diagram" descr="42125c35229b1109.png"/>
           <p:cNvPicPr>
             <a:picLocks noChangeAspect="1"/>
           </p:cNvPicPr>
@@ -31168,8 +31317,8 @@
         </p:blipFill>
         <p:spPr>
           <a:xfrm>
-            <a:off x="3186733" y="1664208"/>
-            <a:ext cx="5818228" cy="3203447"/>
+            <a:off x="854597" y="1682496"/>
+            <a:ext cx="4137834" cy="4517136"/>
           </a:xfrm>
           <a:prstGeom prst="rect">
             <a:avLst/>
@@ -31184,8 +31333,8 @@
         </p:nvSpPr>
         <p:spPr>
           <a:xfrm>
-            <a:off x="530352" y="4913376"/>
-            <a:ext cx="11130991" cy="1121664"/>
+            <a:off x="5761917" y="1956816"/>
+            <a:ext cx="5899425" cy="1639824"/>
           </a:xfrm>
           <a:prstGeom prst="roundRect">
             <a:avLst>
@@ -31238,7 +31387,7 @@
         </p:nvSpPr>
         <p:spPr>
           <a:xfrm>
-            <a:off x="758952" y="5245608"/>
+            <a:off x="5990517" y="2548128"/>
             <a:ext cx="457200" cy="457200"/>
           </a:xfrm>
           <a:prstGeom prst="ellipse">
@@ -31290,7 +31439,7 @@
         </p:blipFill>
         <p:spPr>
           <a:xfrm>
-            <a:off x="868680" y="5355336"/>
+            <a:off x="6100245" y="2657856"/>
             <a:ext cx="237744" cy="237744"/>
           </a:xfrm>
           <a:prstGeom prst="rect">
@@ -31306,8 +31455,8 @@
         </p:nvSpPr>
         <p:spPr>
           <a:xfrm>
-            <a:off x="1399031" y="5059680"/>
-            <a:ext cx="9987991" cy="160401"/>
+            <a:off x="6630597" y="2103120"/>
+            <a:ext cx="4756425" cy="160401"/>
           </a:xfrm>
           <a:prstGeom prst="rect">
             <a:avLst/>
@@ -31341,8 +31490,8 @@
         </p:nvSpPr>
         <p:spPr>
           <a:xfrm>
-            <a:off x="1399031" y="5279136"/>
-            <a:ext cx="9987991" cy="682752"/>
+            <a:off x="6630597" y="2322576"/>
+            <a:ext cx="4756425" cy="1200912"/>
           </a:xfrm>
           <a:prstGeom prst="rect">
             <a:avLst/>
@@ -32367,7 +32516,7 @@
         <p:spPr>
           <a:xfrm>
             <a:off x="530352" y="3889248"/>
-            <a:ext cx="11130991" cy="807720"/>
+            <a:ext cx="11130991" cy="1074420"/>
           </a:xfrm>
           <a:prstGeom prst="roundRect">
             <a:avLst>
@@ -32415,7 +32564,7 @@
         <p:spPr>
           <a:xfrm>
             <a:off x="676656" y="4017263"/>
-            <a:ext cx="45720" cy="551688"/>
+            <a:ext cx="45720" cy="818388"/>
           </a:xfrm>
           <a:prstGeom prst="roundRect">
             <a:avLst>
@@ -32461,7 +32610,7 @@
         <p:spPr>
           <a:xfrm>
             <a:off x="877824" y="4008119"/>
-            <a:ext cx="10564063" cy="624840"/>
+            <a:ext cx="10564063" cy="891540"/>
           </a:xfrm>
           <a:prstGeom prst="rect">
             <a:avLst/>
@@ -32490,7 +32639,7 @@
                 </a:solidFill>
                 <a:latin typeface="Calibri"/>
               </a:rPr>
-              <a:t>B: the rows that exist, plus two columns. What would switch it: Marketing also wanting "went quiet" as its own signal, which D's calendar makes into rows a query can count.</a:t>
+              <a:t>B, because it reads only the rows that exist and adds two columns. What would switch it: a monthly dashboard with a row for every member in every month, quiet months shown as blanks, which only D's calendar gives.</a:t>
             </a:r>
           </a:p>
         </p:txBody>
@@ -33010,7 +33159,7 @@
       </p:sp>
       <p:pic>
         <p:nvPicPr>
-          <p:cNvPr id="9" name="mermaid diagram" descr="054ebe97ce9d4699.png"/>
+          <p:cNvPr id="9" name="mermaid diagram" descr="9bd98ac1668d421c.png"/>
           <p:cNvPicPr>
             <a:picLocks noChangeAspect="1"/>
           </p:cNvPicPr>
@@ -33024,8 +33173,8 @@
         </p:blipFill>
         <p:spPr>
           <a:xfrm>
-            <a:off x="3459803" y="1956816"/>
-            <a:ext cx="5272087" cy="2300287"/>
+            <a:off x="2395385" y="1956816"/>
+            <a:ext cx="7400925" cy="3043237"/>
           </a:xfrm>
           <a:prstGeom prst="rect">
             <a:avLst/>
@@ -33547,7 +33696,7 @@
       </p:sp>
       <p:pic>
         <p:nvPicPr>
-          <p:cNvPr id="9" name="mermaid diagram" descr="be445e52615d0647.png"/>
+          <p:cNvPr id="9" name="mermaid diagram" descr="8c7b1f5da3100c69.png"/>
           <p:cNvPicPr>
             <a:picLocks noChangeAspect="1"/>
           </p:cNvPicPr>
@@ -33561,8 +33710,8 @@
         </p:blipFill>
         <p:spPr>
           <a:xfrm>
-            <a:off x="3731266" y="1956816"/>
-            <a:ext cx="4729162" cy="2043112"/>
+            <a:off x="3762689" y="1664208"/>
+            <a:ext cx="4666315" cy="3250692"/>
           </a:xfrm>
           <a:prstGeom prst="rect">
             <a:avLst/>
@@ -33577,7 +33726,7 @@
         </p:nvSpPr>
         <p:spPr>
           <a:xfrm>
-            <a:off x="530352" y="4146232"/>
+            <a:off x="530352" y="4960620"/>
             <a:ext cx="11130991" cy="1074420"/>
           </a:xfrm>
           <a:prstGeom prst="roundRect">
@@ -33625,7 +33774,7 @@
         </p:nvSpPr>
         <p:spPr>
           <a:xfrm>
-            <a:off x="676656" y="4274248"/>
+            <a:off x="676656" y="5088636"/>
             <a:ext cx="45720" cy="818388"/>
           </a:xfrm>
           <a:prstGeom prst="roundRect">
@@ -33671,7 +33820,7 @@
         </p:nvSpPr>
         <p:spPr>
           <a:xfrm>
-            <a:off x="877824" y="4265104"/>
+            <a:off x="877824" y="5079492"/>
             <a:ext cx="10564063" cy="891540"/>
           </a:xfrm>
           <a:prstGeom prst="rect">

--- a/content/W02/D3/slides/C2_W02_D03_half2_STUDENT.pptx
+++ b/content/W02/D3/slides/C2_W02_D03_half2_STUDENT.pptx
@@ -2076,7 +2076,7 @@
           <a:lstStyle/>
           <a:p>
             <a:r>
-              <a:t>SELF-STUDY, the last five minutes of the practice lab's drill. [D] marks a differentiator. The</a:t>
+              <a:t>SELF-STUDY, the last five minutes of the practice lab's drill. [D] is the tag for a differentiator. The</a:t>
             </a:r>
           </a:p>
           <a:p>
@@ -8678,7 +8678,7 @@
       </p:sp>
       <p:pic>
         <p:nvPicPr>
-          <p:cNvPr id="9" name="mermaid diagram" descr="d7920b8c8aeac347.png"/>
+          <p:cNvPr id="9" name="mermaid diagram" descr="cae16322f66e6210.png"/>
           <p:cNvPicPr>
             <a:picLocks noChangeAspect="1"/>
           </p:cNvPicPr>
@@ -8692,8 +8692,8 @@
         </p:blipFill>
         <p:spPr>
           <a:xfrm>
-            <a:off x="1409547" y="1956816"/>
-            <a:ext cx="9372600" cy="2000250"/>
+            <a:off x="3352647" y="1956816"/>
+            <a:ext cx="5486400" cy="1557337"/>
           </a:xfrm>
           <a:prstGeom prst="rect">
             <a:avLst/>
@@ -8708,7 +8708,7 @@
         </p:nvSpPr>
         <p:spPr>
           <a:xfrm>
-            <a:off x="530352" y="4103370"/>
+            <a:off x="530352" y="3660457"/>
             <a:ext cx="11130991" cy="807720"/>
           </a:xfrm>
           <a:prstGeom prst="roundRect">
@@ -8756,7 +8756,7 @@
         </p:nvSpPr>
         <p:spPr>
           <a:xfrm>
-            <a:off x="676656" y="4231385"/>
+            <a:off x="676656" y="3788473"/>
             <a:ext cx="45720" cy="551688"/>
           </a:xfrm>
           <a:prstGeom prst="roundRect">
@@ -8802,7 +8802,7 @@
         </p:nvSpPr>
         <p:spPr>
           <a:xfrm>
-            <a:off x="877824" y="4222242"/>
+            <a:off x="877824" y="3779329"/>
             <a:ext cx="10564063" cy="624840"/>
           </a:xfrm>
           <a:prstGeom prst="rect">
@@ -10354,7 +10354,7 @@
       </p:sp>
       <p:pic>
         <p:nvPicPr>
-          <p:cNvPr id="9" name="mermaid diagram" descr="99986eef7fcc0090.png"/>
+          <p:cNvPr id="9" name="mermaid diagram" descr="0880f8b546cd4842.png"/>
           <p:cNvPicPr>
             <a:picLocks noChangeAspect="1"/>
           </p:cNvPicPr>
@@ -10368,8 +10368,8 @@
         </p:blipFill>
         <p:spPr>
           <a:xfrm>
-            <a:off x="3858637" y="1664208"/>
-            <a:ext cx="4474420" cy="3517392"/>
+            <a:off x="3016891" y="1956816"/>
+            <a:ext cx="6157912" cy="2300287"/>
           </a:xfrm>
           <a:prstGeom prst="rect">
             <a:avLst/>
@@ -10384,7 +10384,7 @@
         </p:nvSpPr>
         <p:spPr>
           <a:xfrm>
-            <a:off x="530352" y="5227320"/>
+            <a:off x="530352" y="4403407"/>
             <a:ext cx="11130991" cy="807720"/>
           </a:xfrm>
           <a:prstGeom prst="roundRect">
@@ -10432,7 +10432,7 @@
         </p:nvSpPr>
         <p:spPr>
           <a:xfrm>
-            <a:off x="676656" y="5355336"/>
+            <a:off x="676656" y="4531423"/>
             <a:ext cx="45720" cy="551688"/>
           </a:xfrm>
           <a:prstGeom prst="roundRect">
@@ -10478,7 +10478,7 @@
         </p:nvSpPr>
         <p:spPr>
           <a:xfrm>
-            <a:off x="877824" y="5346192"/>
+            <a:off x="877824" y="4522279"/>
             <a:ext cx="10564063" cy="624840"/>
           </a:xfrm>
           <a:prstGeom prst="rect">
@@ -21046,7 +21046,7 @@
       </p:sp>
       <p:pic>
         <p:nvPicPr>
-          <p:cNvPr id="9" name="mermaid diagram" descr="a69f3fbfe7bc78a4.png"/>
+          <p:cNvPr id="9" name="mermaid diagram" descr="11811dd0a6b07bd4.png"/>
           <p:cNvPicPr>
             <a:picLocks noChangeAspect="1"/>
           </p:cNvPicPr>
@@ -21060,8 +21060,8 @@
         </p:blipFill>
         <p:spPr>
           <a:xfrm>
-            <a:off x="530352" y="1896466"/>
-            <a:ext cx="11130991" cy="1105204"/>
+            <a:off x="530352" y="1956816"/>
+            <a:ext cx="11130991" cy="822589"/>
           </a:xfrm>
           <a:prstGeom prst="rect">
             <a:avLst/>
@@ -21076,7 +21076,7 @@
         </p:nvSpPr>
         <p:spPr>
           <a:xfrm>
-            <a:off x="530352" y="3111398"/>
+            <a:off x="530352" y="2889133"/>
             <a:ext cx="502920" cy="333756"/>
           </a:xfrm>
           <a:prstGeom prst="rect">
@@ -21111,7 +21111,7 @@
         </p:nvSpPr>
         <p:spPr>
           <a:xfrm>
-            <a:off x="1097280" y="3147974"/>
+            <a:off x="1097280" y="2925709"/>
             <a:ext cx="10564063" cy="368808"/>
           </a:xfrm>
           <a:prstGeom prst="rect">
@@ -21145,7 +21145,7 @@
         </p:nvSpPr>
         <p:spPr>
           <a:xfrm>
-            <a:off x="530352" y="3553358"/>
+            <a:off x="530352" y="3331093"/>
             <a:ext cx="502920" cy="333756"/>
           </a:xfrm>
           <a:prstGeom prst="rect">
@@ -21180,7 +21180,7 @@
         </p:nvSpPr>
         <p:spPr>
           <a:xfrm>
-            <a:off x="1097280" y="3589934"/>
+            <a:off x="1097280" y="3367669"/>
             <a:ext cx="10564063" cy="368808"/>
           </a:xfrm>
           <a:prstGeom prst="rect">
@@ -21214,7 +21214,7 @@
         </p:nvSpPr>
         <p:spPr>
           <a:xfrm>
-            <a:off x="530352" y="3995318"/>
+            <a:off x="530352" y="3773053"/>
             <a:ext cx="502920" cy="333756"/>
           </a:xfrm>
           <a:prstGeom prst="rect">
@@ -21249,7 +21249,7 @@
         </p:nvSpPr>
         <p:spPr>
           <a:xfrm>
-            <a:off x="1097280" y="4031894"/>
+            <a:off x="1097280" y="3809629"/>
             <a:ext cx="10564063" cy="627888"/>
           </a:xfrm>
           <a:prstGeom prst="rect">
@@ -21283,7 +21283,7 @@
         </p:nvSpPr>
         <p:spPr>
           <a:xfrm>
-            <a:off x="530352" y="4696358"/>
+            <a:off x="530352" y="4474093"/>
             <a:ext cx="502920" cy="333756"/>
           </a:xfrm>
           <a:prstGeom prst="rect">
@@ -21318,7 +21318,7 @@
         </p:nvSpPr>
         <p:spPr>
           <a:xfrm>
-            <a:off x="1097280" y="4732934"/>
+            <a:off x="1097280" y="4510669"/>
             <a:ext cx="10564063" cy="368808"/>
           </a:xfrm>
           <a:prstGeom prst="rect">
@@ -21352,7 +21352,7 @@
         </p:nvSpPr>
         <p:spPr>
           <a:xfrm>
-            <a:off x="530352" y="5138318"/>
+            <a:off x="530352" y="4916053"/>
             <a:ext cx="502920" cy="333756"/>
           </a:xfrm>
           <a:prstGeom prst="rect">
@@ -21387,7 +21387,7 @@
         </p:nvSpPr>
         <p:spPr>
           <a:xfrm>
-            <a:off x="1097280" y="5174894"/>
+            <a:off x="1097280" y="4952629"/>
             <a:ext cx="10564063" cy="368808"/>
           </a:xfrm>
           <a:prstGeom prst="rect">
@@ -21421,7 +21421,7 @@
         </p:nvSpPr>
         <p:spPr>
           <a:xfrm>
-            <a:off x="530352" y="5580278"/>
+            <a:off x="530352" y="5358013"/>
             <a:ext cx="502920" cy="333756"/>
           </a:xfrm>
           <a:prstGeom prst="rect">
@@ -21456,7 +21456,7 @@
         </p:nvSpPr>
         <p:spPr>
           <a:xfrm>
-            <a:off x="1097280" y="5616854"/>
+            <a:off x="1097280" y="5394589"/>
             <a:ext cx="10564063" cy="368808"/>
           </a:xfrm>
           <a:prstGeom prst="rect">
@@ -25135,7 +25135,7 @@
       </p:sp>
       <p:pic>
         <p:nvPicPr>
-          <p:cNvPr id="15" name="mermaid diagram" descr="74b5f738e2ac4f9c.png"/>
+          <p:cNvPr id="15" name="mermaid diagram" descr="f626be52d68ee89f.png"/>
           <p:cNvPicPr>
             <a:picLocks noChangeAspect="1"/>
           </p:cNvPicPr>
@@ -25149,8 +25149,8 @@
         </p:blipFill>
         <p:spPr>
           <a:xfrm>
-            <a:off x="780897" y="3502152"/>
-            <a:ext cx="10629900" cy="1600200"/>
+            <a:off x="530352" y="3502152"/>
+            <a:ext cx="11130991" cy="858395"/>
           </a:xfrm>
           <a:prstGeom prst="rect">
             <a:avLst/>
@@ -27451,7 +27451,7 @@
       </p:sp>
       <p:pic>
         <p:nvPicPr>
-          <p:cNvPr id="14" name="mermaid diagram" descr="7c7d2ba252e30238.png"/>
+          <p:cNvPr id="14" name="mermaid diagram" descr="a8ecfae2913fb977.png"/>
           <p:cNvPicPr>
             <a:picLocks noChangeAspect="1"/>
           </p:cNvPicPr>
@@ -27465,8 +27465,8 @@
         </p:blipFill>
         <p:spPr>
           <a:xfrm>
-            <a:off x="2152497" y="3243072"/>
-            <a:ext cx="7886700" cy="1857375"/>
+            <a:off x="2102491" y="3243072"/>
+            <a:ext cx="7986712" cy="1128712"/>
           </a:xfrm>
           <a:prstGeom prst="rect">
             <a:avLst/>
@@ -31303,7 +31303,7 @@
       </p:sp>
       <p:pic>
         <p:nvPicPr>
-          <p:cNvPr id="9" name="mermaid diagram" descr="42125c35229b1109.png"/>
+          <p:cNvPr id="9" name="mermaid diagram" descr="85128bbef259f1ec.png"/>
           <p:cNvPicPr>
             <a:picLocks noChangeAspect="1"/>
           </p:cNvPicPr>
@@ -31317,8 +31317,8 @@
         </p:blipFill>
         <p:spPr>
           <a:xfrm>
-            <a:off x="854597" y="1682496"/>
-            <a:ext cx="4137834" cy="4517136"/>
+            <a:off x="3186733" y="1664208"/>
+            <a:ext cx="5818228" cy="3203447"/>
           </a:xfrm>
           <a:prstGeom prst="rect">
             <a:avLst/>
@@ -31333,8 +31333,8 @@
         </p:nvSpPr>
         <p:spPr>
           <a:xfrm>
-            <a:off x="5761917" y="1956816"/>
-            <a:ext cx="5899425" cy="1639824"/>
+            <a:off x="530352" y="4913376"/>
+            <a:ext cx="11130991" cy="1121664"/>
           </a:xfrm>
           <a:prstGeom prst="roundRect">
             <a:avLst>
@@ -31387,7 +31387,7 @@
         </p:nvSpPr>
         <p:spPr>
           <a:xfrm>
-            <a:off x="5990517" y="2548128"/>
+            <a:off x="758952" y="5245608"/>
             <a:ext cx="457200" cy="457200"/>
           </a:xfrm>
           <a:prstGeom prst="ellipse">
@@ -31439,7 +31439,7 @@
         </p:blipFill>
         <p:spPr>
           <a:xfrm>
-            <a:off x="6100245" y="2657856"/>
+            <a:off x="868680" y="5355336"/>
             <a:ext cx="237744" cy="237744"/>
           </a:xfrm>
           <a:prstGeom prst="rect">
@@ -31455,8 +31455,8 @@
         </p:nvSpPr>
         <p:spPr>
           <a:xfrm>
-            <a:off x="6630597" y="2103120"/>
-            <a:ext cx="4756425" cy="160401"/>
+            <a:off x="1399031" y="5059680"/>
+            <a:ext cx="9987991" cy="160401"/>
           </a:xfrm>
           <a:prstGeom prst="rect">
             <a:avLst/>
@@ -31490,8 +31490,8 @@
         </p:nvSpPr>
         <p:spPr>
           <a:xfrm>
-            <a:off x="6630597" y="2322576"/>
-            <a:ext cx="4756425" cy="1200912"/>
+            <a:off x="1399031" y="5279136"/>
+            <a:ext cx="9987991" cy="682752"/>
           </a:xfrm>
           <a:prstGeom prst="rect">
             <a:avLst/>
@@ -33159,7 +33159,7 @@
       </p:sp>
       <p:pic>
         <p:nvPicPr>
-          <p:cNvPr id="9" name="mermaid diagram" descr="9bd98ac1668d421c.png"/>
+          <p:cNvPr id="9" name="mermaid diagram" descr="054ebe97ce9d4699.png"/>
           <p:cNvPicPr>
             <a:picLocks noChangeAspect="1"/>
           </p:cNvPicPr>
@@ -33173,8 +33173,8 @@
         </p:blipFill>
         <p:spPr>
           <a:xfrm>
-            <a:off x="2395385" y="1956816"/>
-            <a:ext cx="7400925" cy="3043237"/>
+            <a:off x="3459803" y="1956816"/>
+            <a:ext cx="5272087" cy="2300287"/>
           </a:xfrm>
           <a:prstGeom prst="rect">
             <a:avLst/>
@@ -33696,7 +33696,7 @@
       </p:sp>
       <p:pic>
         <p:nvPicPr>
-          <p:cNvPr id="9" name="mermaid diagram" descr="8c7b1f5da3100c69.png"/>
+          <p:cNvPr id="9" name="mermaid diagram" descr="be445e52615d0647.png"/>
           <p:cNvPicPr>
             <a:picLocks noChangeAspect="1"/>
           </p:cNvPicPr>
@@ -33710,8 +33710,8 @@
         </p:blipFill>
         <p:spPr>
           <a:xfrm>
-            <a:off x="3762689" y="1664208"/>
-            <a:ext cx="4666315" cy="3250692"/>
+            <a:off x="3731266" y="1956816"/>
+            <a:ext cx="4729162" cy="2043112"/>
           </a:xfrm>
           <a:prstGeom prst="rect">
             <a:avLst/>
@@ -33726,7 +33726,7 @@
         </p:nvSpPr>
         <p:spPr>
           <a:xfrm>
-            <a:off x="530352" y="4960620"/>
+            <a:off x="530352" y="4146232"/>
             <a:ext cx="11130991" cy="1074420"/>
           </a:xfrm>
           <a:prstGeom prst="roundRect">
@@ -33774,7 +33774,7 @@
         </p:nvSpPr>
         <p:spPr>
           <a:xfrm>
-            <a:off x="676656" y="5088636"/>
+            <a:off x="676656" y="4274248"/>
             <a:ext cx="45720" cy="818388"/>
           </a:xfrm>
           <a:prstGeom prst="roundRect">
@@ -33820,7 +33820,7 @@
         </p:nvSpPr>
         <p:spPr>
           <a:xfrm>
-            <a:off x="877824" y="5079492"/>
+            <a:off x="877824" y="4265104"/>
             <a:ext cx="10564063" cy="891540"/>
           </a:xfrm>
           <a:prstGeom prst="rect">

--- a/content/W02/D3/slides/C2_W02_D03_half2_STUDENT.pptx
+++ b/content/W02/D3/slides/C2_W02_D03_half2_STUDENT.pptx
@@ -22236,7 +22236,7 @@
                           </a:solidFill>
                           <a:latin typeface="Calibri"/>
                         </a:rPr>
-                        <a:t>Which ORDER BY makes a running total repeatable</a:t>
+                        <a:t>Which ORDER BY gives a running total one step per order</a:t>
                       </a:r>
                     </a:p>
                   </a:txBody>

--- a/content/W02/D3/slides/C2_W02_D03_half2_STUDENT.pptx
+++ b/content/W02/D3/slides/C2_W02_D03_half2_STUDENT.pptx
@@ -1372,17 +1372,17 @@
           <a:lstStyle/>
           <a:p>
             <a:r>
-              <a:t>LIVE, 1 minute. Read the five answers as one story. Q2 is July to September 2026; revenue is</a:t>
-            </a:r>
-          </a:p>
-          <a:p>
-            <a:r>
-              <a:t>booked revenue, every order at its amount whatever its status, Rs 9,84,00,000 for the quarter.</a:t>
-            </a:r>
-          </a:p>
-          <a:p>
-            <a:r>
-              <a:t>Then the day's six topics.</a:t>
+              <a:t>LIVE, 1 minute, which S1a shares. Read the five answers as one story. Q2 is July to September</a:t>
+            </a:r>
+          </a:p>
+          <a:p>
+            <a:r>
+              <a:t>2026; revenue is booked revenue, every order at its amount whatever its status, Rs 9,84,00,000</a:t>
+            </a:r>
+          </a:p>
+          <a:p>
+            <a:r>
+              <a:t>for the quarter. Then the day's six topics.</a:t>
             </a:r>
           </a:p>
         </p:txBody>
@@ -2327,17 +2327,22 @@
           <a:lstStyle/>
           <a:p>
             <a:r>
-              <a:t>LIVE, under a minute. These are the six topics the morning opened on. Point at the fourth row:</a:t>
-            </a:r>
-          </a:p>
-          <a:p>
-            <a:r>
-              <a:t>chapter 6 finishes the month-on-month comparison per customer by checking LAG's months against the</a:t>
-            </a:r>
-          </a:p>
-          <a:p>
-            <a:r>
-              <a:t>calendar, and the escalated case then uses all six. Then chapter 6.</a:t>
+              <a:t>LIVE, inside S1's minute. These are the six topics the morning listed before chapter 1. Point at</a:t>
+            </a:r>
+          </a:p>
+          <a:p>
+            <a:r>
+              <a:t>the fourth row: chapter 6 finishes the month-on-month comparison per customer by checking LAG's</a:t>
+            </a:r>
+          </a:p>
+          <a:p>
+            <a:r>
+              <a:t>months against the calendar, and the escalated case then puts the topics to work together. Then</a:t>
+            </a:r>
+          </a:p>
+          <a:p>
+            <a:r>
+              <a:t>chapter 6.</a:t>
             </a:r>
           </a:p>
         </p:txBody>
@@ -6818,7 +6823,7 @@
       </p:sp>
       <p:pic>
         <p:nvPicPr>
-          <p:cNvPr id="9" name="mermaid diagram" descr="8c7b1f5da3100c69.png"/>
+          <p:cNvPr id="9" name="mermaid diagram" descr="be445e52615d0647.png"/>
           <p:cNvPicPr>
             <a:picLocks noChangeAspect="1"/>
           </p:cNvPicPr>
@@ -6832,8 +6837,8 @@
         </p:blipFill>
         <p:spPr>
           <a:xfrm>
-            <a:off x="3762689" y="1664208"/>
-            <a:ext cx="4666315" cy="3250692"/>
+            <a:off x="3731266" y="1956816"/>
+            <a:ext cx="4729162" cy="2043112"/>
           </a:xfrm>
           <a:prstGeom prst="rect">
             <a:avLst/>
@@ -6848,7 +6853,7 @@
         </p:nvSpPr>
         <p:spPr>
           <a:xfrm>
-            <a:off x="530352" y="4960620"/>
+            <a:off x="530352" y="4146232"/>
             <a:ext cx="11130991" cy="1074420"/>
           </a:xfrm>
           <a:prstGeom prst="roundRect">
@@ -6896,7 +6901,7 @@
         </p:nvSpPr>
         <p:spPr>
           <a:xfrm>
-            <a:off x="676656" y="5088636"/>
+            <a:off x="676656" y="4274248"/>
             <a:ext cx="45720" cy="818388"/>
           </a:xfrm>
           <a:prstGeom prst="roundRect">
@@ -6942,7 +6947,7 @@
         </p:nvSpPr>
         <p:spPr>
           <a:xfrm>
-            <a:off x="877824" y="5079492"/>
+            <a:off x="877824" y="4265104"/>
             <a:ext cx="10564063" cy="891540"/>
           </a:xfrm>
           <a:prstGeom prst="rect">
@@ -9433,7 +9438,7 @@
       </p:sp>
       <p:pic>
         <p:nvPicPr>
-          <p:cNvPr id="9" name="mermaid diagram" descr="d7920b8c8aeac347.png"/>
+          <p:cNvPr id="9" name="mermaid diagram" descr="cae16322f66e6210.png"/>
           <p:cNvPicPr>
             <a:picLocks noChangeAspect="1"/>
           </p:cNvPicPr>
@@ -9447,8 +9452,8 @@
         </p:blipFill>
         <p:spPr>
           <a:xfrm>
-            <a:off x="1409547" y="1956816"/>
-            <a:ext cx="9372600" cy="2000250"/>
+            <a:off x="3352647" y="1956816"/>
+            <a:ext cx="5486400" cy="1557337"/>
           </a:xfrm>
           <a:prstGeom prst="rect">
             <a:avLst/>
@@ -9463,7 +9468,7 @@
         </p:nvSpPr>
         <p:spPr>
           <a:xfrm>
-            <a:off x="530352" y="4103370"/>
+            <a:off x="530352" y="3660457"/>
             <a:ext cx="11130991" cy="807720"/>
           </a:xfrm>
           <a:prstGeom prst="roundRect">
@@ -9511,7 +9516,7 @@
         </p:nvSpPr>
         <p:spPr>
           <a:xfrm>
-            <a:off x="676656" y="4231385"/>
+            <a:off x="676656" y="3788473"/>
             <a:ext cx="45720" cy="551688"/>
           </a:xfrm>
           <a:prstGeom prst="roundRect">
@@ -9557,7 +9562,7 @@
         </p:nvSpPr>
         <p:spPr>
           <a:xfrm>
-            <a:off x="877824" y="4222242"/>
+            <a:off x="877824" y="3779329"/>
             <a:ext cx="10564063" cy="624840"/>
           </a:xfrm>
           <a:prstGeom prst="rect">
@@ -11109,7 +11114,7 @@
       </p:sp>
       <p:pic>
         <p:nvPicPr>
-          <p:cNvPr id="9" name="mermaid diagram" descr="99986eef7fcc0090.png"/>
+          <p:cNvPr id="9" name="mermaid diagram" descr="0880f8b546cd4842.png"/>
           <p:cNvPicPr>
             <a:picLocks noChangeAspect="1"/>
           </p:cNvPicPr>
@@ -11123,8 +11128,8 @@
         </p:blipFill>
         <p:spPr>
           <a:xfrm>
-            <a:off x="3858637" y="1664208"/>
-            <a:ext cx="4474420" cy="3517392"/>
+            <a:off x="3016891" y="1956816"/>
+            <a:ext cx="6157912" cy="2300287"/>
           </a:xfrm>
           <a:prstGeom prst="rect">
             <a:avLst/>
@@ -11139,7 +11144,7 @@
         </p:nvSpPr>
         <p:spPr>
           <a:xfrm>
-            <a:off x="530352" y="5227320"/>
+            <a:off x="530352" y="4403407"/>
             <a:ext cx="11130991" cy="807720"/>
           </a:xfrm>
           <a:prstGeom prst="roundRect">
@@ -11187,7 +11192,7 @@
         </p:nvSpPr>
         <p:spPr>
           <a:xfrm>
-            <a:off x="676656" y="5355336"/>
+            <a:off x="676656" y="4531423"/>
             <a:ext cx="45720" cy="551688"/>
           </a:xfrm>
           <a:prstGeom prst="roundRect">
@@ -11233,7 +11238,7 @@
         </p:nvSpPr>
         <p:spPr>
           <a:xfrm>
-            <a:off x="877824" y="5346192"/>
+            <a:off x="877824" y="4522279"/>
             <a:ext cx="10564063" cy="624840"/>
           </a:xfrm>
           <a:prstGeom prst="rect">
@@ -21801,7 +21806,7 @@
       </p:sp>
       <p:pic>
         <p:nvPicPr>
-          <p:cNvPr id="9" name="mermaid diagram" descr="a69f3fbfe7bc78a4.png"/>
+          <p:cNvPr id="9" name="mermaid diagram" descr="11811dd0a6b07bd4.png"/>
           <p:cNvPicPr>
             <a:picLocks noChangeAspect="1"/>
           </p:cNvPicPr>
@@ -21815,8 +21820,8 @@
         </p:blipFill>
         <p:spPr>
           <a:xfrm>
-            <a:off x="530352" y="1896466"/>
-            <a:ext cx="11130991" cy="1105204"/>
+            <a:off x="530352" y="1956816"/>
+            <a:ext cx="11130991" cy="822589"/>
           </a:xfrm>
           <a:prstGeom prst="rect">
             <a:avLst/>
@@ -21831,7 +21836,7 @@
         </p:nvSpPr>
         <p:spPr>
           <a:xfrm>
-            <a:off x="530352" y="3111398"/>
+            <a:off x="530352" y="2889133"/>
             <a:ext cx="502920" cy="333756"/>
           </a:xfrm>
           <a:prstGeom prst="rect">
@@ -21866,7 +21871,7 @@
         </p:nvSpPr>
         <p:spPr>
           <a:xfrm>
-            <a:off x="1097280" y="3147974"/>
+            <a:off x="1097280" y="2925709"/>
             <a:ext cx="10564063" cy="368808"/>
           </a:xfrm>
           <a:prstGeom prst="rect">
@@ -21900,7 +21905,7 @@
         </p:nvSpPr>
         <p:spPr>
           <a:xfrm>
-            <a:off x="530352" y="3553358"/>
+            <a:off x="530352" y="3331093"/>
             <a:ext cx="502920" cy="333756"/>
           </a:xfrm>
           <a:prstGeom prst="rect">
@@ -21935,7 +21940,7 @@
         </p:nvSpPr>
         <p:spPr>
           <a:xfrm>
-            <a:off x="1097280" y="3589934"/>
+            <a:off x="1097280" y="3367669"/>
             <a:ext cx="10564063" cy="368808"/>
           </a:xfrm>
           <a:prstGeom prst="rect">
@@ -21969,7 +21974,7 @@
         </p:nvSpPr>
         <p:spPr>
           <a:xfrm>
-            <a:off x="530352" y="3995318"/>
+            <a:off x="530352" y="3773053"/>
             <a:ext cx="502920" cy="333756"/>
           </a:xfrm>
           <a:prstGeom prst="rect">
@@ -22004,7 +22009,7 @@
         </p:nvSpPr>
         <p:spPr>
           <a:xfrm>
-            <a:off x="1097280" y="4031894"/>
+            <a:off x="1097280" y="3809629"/>
             <a:ext cx="10564063" cy="627888"/>
           </a:xfrm>
           <a:prstGeom prst="rect">
@@ -22038,7 +22043,7 @@
         </p:nvSpPr>
         <p:spPr>
           <a:xfrm>
-            <a:off x="530352" y="4696358"/>
+            <a:off x="530352" y="4474093"/>
             <a:ext cx="502920" cy="333756"/>
           </a:xfrm>
           <a:prstGeom prst="rect">
@@ -22073,7 +22078,7 @@
         </p:nvSpPr>
         <p:spPr>
           <a:xfrm>
-            <a:off x="1097280" y="4732934"/>
+            <a:off x="1097280" y="4510669"/>
             <a:ext cx="10564063" cy="368808"/>
           </a:xfrm>
           <a:prstGeom prst="rect">
@@ -22107,7 +22112,7 @@
         </p:nvSpPr>
         <p:spPr>
           <a:xfrm>
-            <a:off x="530352" y="5138318"/>
+            <a:off x="530352" y="4916053"/>
             <a:ext cx="502920" cy="333756"/>
           </a:xfrm>
           <a:prstGeom prst="rect">
@@ -22142,7 +22147,7 @@
         </p:nvSpPr>
         <p:spPr>
           <a:xfrm>
-            <a:off x="1097280" y="5174894"/>
+            <a:off x="1097280" y="4952629"/>
             <a:ext cx="10564063" cy="368808"/>
           </a:xfrm>
           <a:prstGeom prst="rect">
@@ -22176,7 +22181,7 @@
         </p:nvSpPr>
         <p:spPr>
           <a:xfrm>
-            <a:off x="530352" y="5580278"/>
+            <a:off x="530352" y="5358013"/>
             <a:ext cx="502920" cy="333756"/>
           </a:xfrm>
           <a:prstGeom prst="rect">
@@ -22211,7 +22216,7 @@
         </p:nvSpPr>
         <p:spPr>
           <a:xfrm>
-            <a:off x="1097280" y="5616854"/>
+            <a:off x="1097280" y="5394589"/>
             <a:ext cx="10564063" cy="368808"/>
           </a:xfrm>
           <a:prstGeom prst="rect">
@@ -25890,7 +25895,7 @@
       </p:sp>
       <p:pic>
         <p:nvPicPr>
-          <p:cNvPr id="15" name="mermaid diagram" descr="74b5f738e2ac4f9c.png"/>
+          <p:cNvPr id="15" name="mermaid diagram" descr="f626be52d68ee89f.png"/>
           <p:cNvPicPr>
             <a:picLocks noChangeAspect="1"/>
           </p:cNvPicPr>
@@ -25904,8 +25909,8 @@
         </p:blipFill>
         <p:spPr>
           <a:xfrm>
-            <a:off x="780897" y="3502152"/>
-            <a:ext cx="10629900" cy="1600200"/>
+            <a:off x="530352" y="3502152"/>
+            <a:ext cx="11130991" cy="858395"/>
           </a:xfrm>
           <a:prstGeom prst="rect">
             <a:avLst/>
@@ -26427,7 +26432,7 @@
       </p:sp>
       <p:pic>
         <p:nvPicPr>
-          <p:cNvPr id="9" name="mermaid diagram" descr="e379156194868999.png"/>
+          <p:cNvPr id="9" name="mermaid diagram" descr="8c9146e02051b291.png"/>
           <p:cNvPicPr>
             <a:picLocks noChangeAspect="1"/>
           </p:cNvPicPr>
@@ -26441,8 +26446,8 @@
         </p:blipFill>
         <p:spPr>
           <a:xfrm>
-            <a:off x="638013" y="1682496"/>
-            <a:ext cx="4571003" cy="4517136"/>
+            <a:off x="530352" y="2620005"/>
+            <a:ext cx="4786326" cy="2642116"/>
           </a:xfrm>
           <a:prstGeom prst="rect">
             <a:avLst/>
@@ -26458,8 +26463,8 @@
           <p:nvPr/>
         </p:nvGraphicFramePr>
         <p:xfrm>
-          <a:off x="5761917" y="1818640"/>
-          <a:ext cx="5899424" cy="2663952"/>
+          <a:off x="5761917" y="1938528"/>
+          <a:ext cx="5899423" cy="4005072"/>
         </p:xfrm>
         <a:graphic>
           <a:graphicData uri="http://schemas.openxmlformats.org/drawingml/2006/table">
@@ -26468,18 +26473,18 @@
                 <a:tableStyleId>{2D5ABB26-0587-4C30-8999-92F81FD0307C}</a:tableStyleId>
               </a:tblPr>
               <a:tblGrid>
-                <a:gridCol w="2369139"/>
-                <a:gridCol w="1949896"/>
-                <a:gridCol w="1580389"/>
+                <a:gridCol w="2275480"/>
+                <a:gridCol w="2177011"/>
+                <a:gridCol w="1446932"/>
               </a:tblGrid>
-              <a:tr h="310896">
+              <a:tr h="542544">
                 <a:tc>
                   <a:txBody>
                     <a:bodyPr/>
                     <a:lstStyle/>
                     <a:p>
                       <a:r>
-                        <a:rPr sz="1050" b="1" i="0">
+                        <a:rPr sz="1250" b="1" i="0">
                           <a:solidFill>
                             <a:srgbClr val="FFFFFF"/>
                           </a:solidFill>
@@ -26501,7 +26506,7 @@
                     <a:lstStyle/>
                     <a:p>
                       <a:r>
-                        <a:rPr sz="1050" b="1" i="0">
+                        <a:rPr sz="1250" b="1" i="0">
                           <a:solidFill>
                             <a:srgbClr val="FFFFFF"/>
                           </a:solidFill>
@@ -26523,7 +26528,7 @@
                     <a:lstStyle/>
                     <a:p>
                       <a:r>
-                        <a:rPr sz="1050" b="1" i="0">
+                        <a:rPr sz="1250" b="1" i="0">
                           <a:solidFill>
                             <a:srgbClr val="FFFFFF"/>
                           </a:solidFill>
@@ -26540,14 +26545,14 @@
                   </a:tcPr>
                 </a:tc>
               </a:tr>
-              <a:tr h="473456">
+              <a:tr h="749808">
                 <a:tc>
                   <a:txBody>
                     <a:bodyPr/>
                     <a:lstStyle/>
                     <a:p>
                       <a:r>
-                        <a:rPr sz="1000" b="0" i="0">
+                        <a:rPr sz="1200" b="0" i="0">
                           <a:solidFill>
                             <a:srgbClr val="1A1440"/>
                           </a:solidFill>
@@ -26569,7 +26574,7 @@
                     <a:lstStyle/>
                     <a:p>
                       <a:r>
-                        <a:rPr sz="1000" b="0" i="0">
+                        <a:rPr sz="1200" b="0" i="0">
                           <a:solidFill>
                             <a:srgbClr val="1A1440"/>
                           </a:solidFill>
@@ -26591,7 +26596,7 @@
                     <a:lstStyle/>
                     <a:p>
                       <a:r>
-                        <a:rPr sz="1000" b="0" i="0">
+                        <a:rPr sz="1200" b="0" i="0">
                           <a:solidFill>
                             <a:srgbClr val="1A1440"/>
                           </a:solidFill>
@@ -26608,14 +26613,14 @@
                   </a:tcPr>
                 </a:tc>
               </a:tr>
-              <a:tr h="473456">
+              <a:tr h="542544">
                 <a:tc>
                   <a:txBody>
                     <a:bodyPr/>
                     <a:lstStyle/>
                     <a:p>
                       <a:r>
-                        <a:rPr sz="1000" b="0" i="0">
+                        <a:rPr sz="1200" b="0" i="0">
                           <a:solidFill>
                             <a:srgbClr val="1A1440"/>
                           </a:solidFill>
@@ -26637,7 +26642,7 @@
                     <a:lstStyle/>
                     <a:p>
                       <a:r>
-                        <a:rPr sz="1000" b="0" i="0">
+                        <a:rPr sz="1200" b="0" i="0">
                           <a:solidFill>
                             <a:srgbClr val="1A1440"/>
                           </a:solidFill>
@@ -26659,7 +26664,7 @@
                     <a:lstStyle/>
                     <a:p>
                       <a:r>
-                        <a:rPr sz="1000" b="0" i="0">
+                        <a:rPr sz="1200" b="0" i="0">
                           <a:solidFill>
                             <a:srgbClr val="1A1440"/>
                           </a:solidFill>
@@ -26676,14 +26681,14 @@
                   </a:tcPr>
                 </a:tc>
               </a:tr>
-              <a:tr h="310896">
+              <a:tr h="542544">
                 <a:tc>
                   <a:txBody>
                     <a:bodyPr/>
                     <a:lstStyle/>
                     <a:p>
                       <a:r>
-                        <a:rPr sz="1000" b="0" i="0">
+                        <a:rPr sz="1200" b="0" i="0">
                           <a:solidFill>
                             <a:srgbClr val="1A1440"/>
                           </a:solidFill>
@@ -26705,7 +26710,7 @@
                     <a:lstStyle/>
                     <a:p>
                       <a:r>
-                        <a:rPr sz="1000" b="0" i="0">
+                        <a:rPr sz="1200" b="0" i="0">
                           <a:solidFill>
                             <a:srgbClr val="1A1440"/>
                           </a:solidFill>
@@ -26727,13 +26732,13 @@
                     <a:lstStyle/>
                     <a:p>
                       <a:r>
-                        <a:rPr sz="1000" b="0" i="0">
+                        <a:rPr sz="1200" b="0" i="0">
                           <a:solidFill>
                             <a:srgbClr val="1A1440"/>
                           </a:solidFill>
                           <a:latin typeface="Calibri"/>
                         </a:rPr>
-                        <a:t>the same 30</a:t>
+                        <a:t>within chapter 2's 30</a:t>
                       </a:r>
                     </a:p>
                   </a:txBody>
@@ -26744,14 +26749,14 @@
                   </a:tcPr>
                 </a:tc>
               </a:tr>
-              <a:tr h="473456">
+              <a:tr h="542544">
                 <a:tc>
                   <a:txBody>
                     <a:bodyPr/>
                     <a:lstStyle/>
                     <a:p>
                       <a:r>
-                        <a:rPr sz="1000" b="0" i="0">
+                        <a:rPr sz="1200" b="0" i="0">
                           <a:solidFill>
                             <a:srgbClr val="1A1440"/>
                           </a:solidFill>
@@ -26773,13 +26778,13 @@
                     <a:lstStyle/>
                     <a:p>
                       <a:r>
-                        <a:rPr sz="1000" b="0" i="0">
+                        <a:rPr sz="1200" b="0" i="0">
                           <a:solidFill>
                             <a:srgbClr val="1A1440"/>
                           </a:solidFill>
                           <a:latin typeface="Calibri"/>
                         </a:rPr>
-                        <a:t>4, and 6 on the calendar</a:t>
+                        <a:t>4, then 6 against calendar months</a:t>
                       </a:r>
                     </a:p>
                   </a:txBody>
@@ -26795,7 +26800,7 @@
                     <a:lstStyle/>
                     <a:p>
                       <a:r>
-                        <a:rPr sz="1000" b="0" i="0">
+                        <a:rPr sz="1200" b="0" i="0">
                           <a:solidFill>
                             <a:srgbClr val="1A1440"/>
                           </a:solidFill>
@@ -26812,14 +26817,14 @@
                   </a:tcPr>
                 </a:tc>
               </a:tr>
-              <a:tr h="310896">
+              <a:tr h="542544">
                 <a:tc>
                   <a:txBody>
                     <a:bodyPr/>
                     <a:lstStyle/>
                     <a:p>
                       <a:r>
-                        <a:rPr sz="1000" b="0" i="0">
+                        <a:rPr sz="1200" b="0" i="0">
                           <a:solidFill>
                             <a:srgbClr val="1A1440"/>
                           </a:solidFill>
@@ -26841,7 +26846,7 @@
                     <a:lstStyle/>
                     <a:p>
                       <a:r>
-                        <a:rPr sz="1000" b="0" i="0">
+                        <a:rPr sz="1200" b="0" i="0">
                           <a:solidFill>
                             <a:srgbClr val="1A1440"/>
                           </a:solidFill>
@@ -26863,7 +26868,7 @@
                     <a:lstStyle/>
                     <a:p>
                       <a:r>
-                        <a:rPr sz="1000" b="0" i="0">
+                        <a:rPr sz="1200" b="0" i="0">
                           <a:solidFill>
                             <a:srgbClr val="1A1440"/>
                           </a:solidFill>
@@ -26880,14 +26885,14 @@
                   </a:tcPr>
                 </a:tc>
               </a:tr>
-              <a:tr h="310896">
+              <a:tr h="542544">
                 <a:tc>
                   <a:txBody>
                     <a:bodyPr/>
                     <a:lstStyle/>
                     <a:p>
                       <a:r>
-                        <a:rPr sz="1000" b="0" i="0">
+                        <a:rPr sz="1200" b="0" i="0">
                           <a:solidFill>
                             <a:srgbClr val="1A1440"/>
                           </a:solidFill>
@@ -26909,7 +26914,7 @@
                     <a:lstStyle/>
                     <a:p>
                       <a:r>
-                        <a:rPr sz="1000" b="0" i="0">
+                        <a:rPr sz="1200" b="0" i="0">
                           <a:solidFill>
                             <a:srgbClr val="1A1440"/>
                           </a:solidFill>
@@ -26931,13 +26936,13 @@
                     <a:lstStyle/>
                     <a:p>
                       <a:r>
-                        <a:rPr sz="1000" b="0" i="0">
+                        <a:rPr sz="1200" b="0" i="0">
                           <a:solidFill>
                             <a:srgbClr val="1A1440"/>
                           </a:solidFill>
                           <a:latin typeface="Calibri"/>
                         </a:rPr>
-                        <a:t>4 of chapter 2's 30</a:t>
+                        <a:t>3 of chapter 2's 30</a:t>
                       </a:r>
                     </a:p>
                   </a:txBody>
@@ -26954,46 +26959,7 @@
       </p:graphicFrame>
       <p:sp>
         <p:nvSpPr>
-          <p:cNvPr id="11" name="TextBox 10"/>
-          <p:cNvSpPr txBox="1"/>
-          <p:nvPr/>
-        </p:nvSpPr>
-        <p:spPr>
-          <a:xfrm>
-            <a:off x="5761917" y="4738624"/>
-            <a:ext cx="5899425" cy="1324864"/>
-          </a:xfrm>
-          <a:prstGeom prst="rect">
-            <a:avLst/>
-          </a:prstGeom>
-          <a:noFill/>
-        </p:spPr>
-        <p:txBody>
-          <a:bodyPr wrap="square" anchor="t" lIns="0" rIns="0" tIns="0" bIns="0">
-            <a:spAutoFit/>
-          </a:bodyPr>
-          <a:lstStyle/>
-          <a:p>
-            <a:pPr>
-              <a:spcAft>
-                <a:spcPts val="800"/>
-              </a:spcAft>
-            </a:pPr>
-            <a:r>
-              <a:rPr sz="1600" b="0" i="0">
-                <a:solidFill>
-                  <a:srgbClr val="1A1440"/>
-                </a:solidFill>
-                <a:latin typeface="Calibri"/>
-              </a:rPr>
-              <a:t>Monday's GROUP BY collapses the rows a window keeps, and WHERE runs before any window, so a filter on the place waits for a CTE; Tuesday's join check closes chapter 5's running total on the quarter.</a:t>
-            </a:r>
-          </a:p>
-        </p:txBody>
-      </p:sp>
-      <p:sp>
-        <p:nvSpPr>
-          <p:cNvPr id="12" name="Oval 11"/>
+          <p:cNvPr id="11" name="Oval 10"/>
           <p:cNvSpPr/>
           <p:nvPr/>
         </p:nvSpPr>
@@ -27037,7 +27003,7 @@
       </p:sp>
       <p:sp>
         <p:nvSpPr>
-          <p:cNvPr id="13" name="TextBox 12"/>
+          <p:cNvPr id="12" name="TextBox 11"/>
           <p:cNvSpPr txBox="1"/>
           <p:nvPr/>
         </p:nvSpPr>
@@ -27072,7 +27038,7 @@
       </p:sp>
       <p:sp>
         <p:nvSpPr>
-          <p:cNvPr id="14" name="Oval 13"/>
+          <p:cNvPr id="13" name="Oval 12"/>
           <p:cNvSpPr/>
           <p:nvPr/>
         </p:nvSpPr>
@@ -27116,7 +27082,7 @@
       </p:sp>
       <p:sp>
         <p:nvSpPr>
-          <p:cNvPr id="15" name="TextBox 14"/>
+          <p:cNvPr id="14" name="TextBox 13"/>
           <p:cNvSpPr txBox="1"/>
           <p:nvPr/>
         </p:nvSpPr>
@@ -27151,7 +27117,7 @@
       </p:sp>
       <p:sp>
         <p:nvSpPr>
-          <p:cNvPr id="16" name="Oval 15"/>
+          <p:cNvPr id="15" name="Oval 14"/>
           <p:cNvSpPr/>
           <p:nvPr/>
         </p:nvSpPr>
@@ -27195,7 +27161,7 @@
       </p:sp>
       <p:sp>
         <p:nvSpPr>
-          <p:cNvPr id="17" name="TextBox 16"/>
+          <p:cNvPr id="16" name="TextBox 15"/>
           <p:cNvSpPr txBox="1"/>
           <p:nvPr/>
         </p:nvSpPr>
@@ -27230,7 +27196,7 @@
       </p:sp>
       <p:sp>
         <p:nvSpPr>
-          <p:cNvPr id="18" name="TextBox 17"/>
+          <p:cNvPr id="17" name="TextBox 16"/>
           <p:cNvSpPr txBox="1"/>
           <p:nvPr/>
         </p:nvSpPr>
@@ -28774,7 +28740,7 @@
       </p:sp>
       <p:pic>
         <p:nvPicPr>
-          <p:cNvPr id="14" name="mermaid diagram" descr="7c7d2ba252e30238.png"/>
+          <p:cNvPr id="14" name="mermaid diagram" descr="a8ecfae2913fb977.png"/>
           <p:cNvPicPr>
             <a:picLocks noChangeAspect="1"/>
           </p:cNvPicPr>
@@ -28788,8 +28754,8 @@
         </p:blipFill>
         <p:spPr>
           <a:xfrm>
-            <a:off x="2152497" y="3243072"/>
-            <a:ext cx="7886700" cy="1857375"/>
+            <a:off x="2102491" y="3243072"/>
+            <a:ext cx="7986712" cy="1128712"/>
           </a:xfrm>
           <a:prstGeom prst="rect">
             <a:avLst/>
@@ -33172,7 +33138,7 @@
       </p:sp>
       <p:pic>
         <p:nvPicPr>
-          <p:cNvPr id="9" name="mermaid diagram" descr="42125c35229b1109.png"/>
+          <p:cNvPr id="9" name="mermaid diagram" descr="85128bbef259f1ec.png"/>
           <p:cNvPicPr>
             <a:picLocks noChangeAspect="1"/>
           </p:cNvPicPr>
@@ -33186,8 +33152,8 @@
         </p:blipFill>
         <p:spPr>
           <a:xfrm>
-            <a:off x="854597" y="1682496"/>
-            <a:ext cx="4137834" cy="4517136"/>
+            <a:off x="3186733" y="1664208"/>
+            <a:ext cx="5818228" cy="3203447"/>
           </a:xfrm>
           <a:prstGeom prst="rect">
             <a:avLst/>
@@ -33202,8 +33168,8 @@
         </p:nvSpPr>
         <p:spPr>
           <a:xfrm>
-            <a:off x="5761917" y="1956816"/>
-            <a:ext cx="5899425" cy="1639824"/>
+            <a:off x="530352" y="4913376"/>
+            <a:ext cx="11130991" cy="1121664"/>
           </a:xfrm>
           <a:prstGeom prst="roundRect">
             <a:avLst>
@@ -33256,7 +33222,7 @@
         </p:nvSpPr>
         <p:spPr>
           <a:xfrm>
-            <a:off x="5990517" y="2548128"/>
+            <a:off x="758952" y="5245608"/>
             <a:ext cx="457200" cy="457200"/>
           </a:xfrm>
           <a:prstGeom prst="ellipse">
@@ -33308,7 +33274,7 @@
         </p:blipFill>
         <p:spPr>
           <a:xfrm>
-            <a:off x="6100245" y="2657856"/>
+            <a:off x="868680" y="5355336"/>
             <a:ext cx="237744" cy="237744"/>
           </a:xfrm>
           <a:prstGeom prst="rect">
@@ -33324,8 +33290,8 @@
         </p:nvSpPr>
         <p:spPr>
           <a:xfrm>
-            <a:off x="6630597" y="2103120"/>
-            <a:ext cx="4756425" cy="160401"/>
+            <a:off x="1399031" y="5059680"/>
+            <a:ext cx="9987991" cy="160401"/>
           </a:xfrm>
           <a:prstGeom prst="rect">
             <a:avLst/>
@@ -33359,8 +33325,8 @@
         </p:nvSpPr>
         <p:spPr>
           <a:xfrm>
-            <a:off x="6630597" y="2322576"/>
-            <a:ext cx="4756425" cy="1200912"/>
+            <a:off x="1399031" y="5279136"/>
+            <a:ext cx="9987991" cy="682752"/>
           </a:xfrm>
           <a:prstGeom prst="rect">
             <a:avLst/>
@@ -35028,7 +34994,7 @@
       </p:sp>
       <p:pic>
         <p:nvPicPr>
-          <p:cNvPr id="9" name="mermaid diagram" descr="9bd98ac1668d421c.png"/>
+          <p:cNvPr id="9" name="mermaid diagram" descr="054ebe97ce9d4699.png"/>
           <p:cNvPicPr>
             <a:picLocks noChangeAspect="1"/>
           </p:cNvPicPr>
@@ -35042,8 +35008,8 @@
         </p:blipFill>
         <p:spPr>
           <a:xfrm>
-            <a:off x="2395385" y="1956816"/>
-            <a:ext cx="7400925" cy="3043237"/>
+            <a:off x="3459803" y="1956816"/>
+            <a:ext cx="5272087" cy="2300287"/>
           </a:xfrm>
           <a:prstGeom prst="rect">
             <a:avLst/>
